--- a/Apresentação1.pptx
+++ b/Apresentação1.pptx
@@ -118,7 +118,7 @@
 <file path=ppt/revisionInfo.xml><?xml version="1.0" encoding="utf-8"?>
 <p1510:revInfo xmlns:a="http://schemas.openxmlformats.org/drawingml/2006/main" xmlns:r="http://schemas.openxmlformats.org/officeDocument/2006/relationships" xmlns:p1510="http://schemas.microsoft.com/office/powerpoint/2015/10/main">
   <p1510:revLst>
-    <p1510:client id="{83E8C568-FE4C-4A8B-AB52-82592F803D4D}" v="4" dt="2026-08-03T10:06:57.605"/>
+    <p1510:client id="{21E506D2-673D-4CC7-B46E-10B0D5DF5344}" v="25" dt="2026-10-01T12:45:46.116"/>
   </p1510:revLst>
 </p1510:revInfo>
 </file>
@@ -127,19 +127,19 @@
 <pc:chgInfo xmlns:a="http://schemas.openxmlformats.org/drawingml/2006/main" xmlns:r="http://schemas.openxmlformats.org/officeDocument/2006/relationships" xmlns:ac="http://schemas.microsoft.com/office/drawing/2013/main/command" xmlns:pc="http://schemas.microsoft.com/office/powerpoint/2013/main/command">
   <pc:docChgLst>
     <pc:chgData name="Pedro Lucas de Oliveira" userId="decf2ebc-4f1b-4875-9cd3-eb66623e709f" providerId="ADAL" clId="{D4888E3A-4B92-457B-A42D-5FC11DBDCBA1}"/>
-    <pc:docChg chg="modSld">
-      <pc:chgData name="Pedro Lucas de Oliveira" userId="decf2ebc-4f1b-4875-9cd3-eb66623e709f" providerId="ADAL" clId="{D4888E3A-4B92-457B-A42D-5FC11DBDCBA1}" dt="2026-08-03T10:15:47.409" v="68" actId="207"/>
+    <pc:docChg chg="undo redo custSel modSld">
+      <pc:chgData name="Pedro Lucas de Oliveira" userId="decf2ebc-4f1b-4875-9cd3-eb66623e709f" providerId="ADAL" clId="{D4888E3A-4B92-457B-A42D-5FC11DBDCBA1}" dt="2026-10-01T12:45:46.116" v="729" actId="164"/>
       <pc:docMkLst>
         <pc:docMk/>
       </pc:docMkLst>
-      <pc:sldChg chg="addSp modSp mod">
-        <pc:chgData name="Pedro Lucas de Oliveira" userId="decf2ebc-4f1b-4875-9cd3-eb66623e709f" providerId="ADAL" clId="{D4888E3A-4B92-457B-A42D-5FC11DBDCBA1}" dt="2026-08-03T10:02:12.753" v="39" actId="14100"/>
+      <pc:sldChg chg="addSp delSp modSp mod">
+        <pc:chgData name="Pedro Lucas de Oliveira" userId="decf2ebc-4f1b-4875-9cd3-eb66623e709f" providerId="ADAL" clId="{D4888E3A-4B92-457B-A42D-5FC11DBDCBA1}" dt="2026-10-01T12:44:27.999" v="698" actId="108"/>
         <pc:sldMkLst>
           <pc:docMk/>
           <pc:sldMk cId="3915172499" sldId="256"/>
         </pc:sldMkLst>
-        <pc:spChg chg="add mod ord">
-          <ac:chgData name="Pedro Lucas de Oliveira" userId="decf2ebc-4f1b-4875-9cd3-eb66623e709f" providerId="ADAL" clId="{D4888E3A-4B92-457B-A42D-5FC11DBDCBA1}" dt="2026-08-03T10:01:48.162" v="33" actId="1036"/>
+        <pc:spChg chg="add del mod ord">
+          <ac:chgData name="Pedro Lucas de Oliveira" userId="decf2ebc-4f1b-4875-9cd3-eb66623e709f" providerId="ADAL" clId="{D4888E3A-4B92-457B-A42D-5FC11DBDCBA1}" dt="2026-10-01T11:35:19.677" v="70" actId="478"/>
           <ac:spMkLst>
             <pc:docMk/>
             <pc:sldMk cId="3915172499" sldId="256"/>
@@ -147,15 +147,15 @@
           </ac:spMkLst>
         </pc:spChg>
         <pc:spChg chg="mod">
-          <ac:chgData name="Pedro Lucas de Oliveira" userId="decf2ebc-4f1b-4875-9cd3-eb66623e709f" providerId="ADAL" clId="{D4888E3A-4B92-457B-A42D-5FC11DBDCBA1}" dt="2026-08-03T10:02:03.532" v="34" actId="14100"/>
+          <ac:chgData name="Pedro Lucas de Oliveira" userId="decf2ebc-4f1b-4875-9cd3-eb66623e709f" providerId="ADAL" clId="{D4888E3A-4B92-457B-A42D-5FC11DBDCBA1}" dt="2026-10-01T12:44:23.346" v="696" actId="108"/>
           <ac:spMkLst>
             <pc:docMk/>
             <pc:sldMk cId="3915172499" sldId="256"/>
             <ac:spMk id="3" creationId="{E934607F-D5B4-3290-9B50-1141193DD2F9}"/>
           </ac:spMkLst>
         </pc:spChg>
-        <pc:spChg chg="add mod">
-          <ac:chgData name="Pedro Lucas de Oliveira" userId="decf2ebc-4f1b-4875-9cd3-eb66623e709f" providerId="ADAL" clId="{D4888E3A-4B92-457B-A42D-5FC11DBDCBA1}" dt="2026-08-03T10:02:12.753" v="39" actId="14100"/>
+        <pc:spChg chg="mod">
+          <ac:chgData name="Pedro Lucas de Oliveira" userId="decf2ebc-4f1b-4875-9cd3-eb66623e709f" providerId="ADAL" clId="{D4888E3A-4B92-457B-A42D-5FC11DBDCBA1}" dt="2026-10-01T12:43:53.305" v="691" actId="14861"/>
           <ac:spMkLst>
             <pc:docMk/>
             <pc:sldMk cId="3915172499" sldId="256"/>
@@ -163,22 +163,118 @@
           </ac:spMkLst>
         </pc:spChg>
         <pc:spChg chg="mod">
-          <ac:chgData name="Pedro Lucas de Oliveira" userId="decf2ebc-4f1b-4875-9cd3-eb66623e709f" providerId="ADAL" clId="{D4888E3A-4B92-457B-A42D-5FC11DBDCBA1}" dt="2026-08-03T09:59:57.191" v="3" actId="1037"/>
+          <ac:chgData name="Pedro Lucas de Oliveira" userId="decf2ebc-4f1b-4875-9cd3-eb66623e709f" providerId="ADAL" clId="{D4888E3A-4B92-457B-A42D-5FC11DBDCBA1}" dt="2026-10-01T12:44:27.999" v="698" actId="108"/>
+          <ac:spMkLst>
+            <pc:docMk/>
+            <pc:sldMk cId="3915172499" sldId="256"/>
+            <ac:spMk id="5" creationId="{2CA3F7F5-F460-9129-6D87-29DF621CDE3A}"/>
+          </ac:spMkLst>
+        </pc:spChg>
+        <pc:spChg chg="add mod topLvl">
+          <ac:chgData name="Pedro Lucas de Oliveira" userId="decf2ebc-4f1b-4875-9cd3-eb66623e709f" providerId="ADAL" clId="{D4888E3A-4B92-457B-A42D-5FC11DBDCBA1}" dt="2026-10-01T11:42:24.617" v="180" actId="164"/>
+          <ac:spMkLst>
+            <pc:docMk/>
+            <pc:sldMk cId="3915172499" sldId="256"/>
+            <ac:spMk id="6" creationId="{7589B568-7B70-492E-3E14-191EC8EB5EEF}"/>
+          </ac:spMkLst>
+        </pc:spChg>
+        <pc:spChg chg="mod">
+          <ac:chgData name="Pedro Lucas de Oliveira" userId="decf2ebc-4f1b-4875-9cd3-eb66623e709f" providerId="ADAL" clId="{D4888E3A-4B92-457B-A42D-5FC11DBDCBA1}" dt="2026-10-01T12:44:25.605" v="697" actId="108"/>
+          <ac:spMkLst>
+            <pc:docMk/>
+            <pc:sldMk cId="3915172499" sldId="256"/>
+            <ac:spMk id="7" creationId="{08C377F6-D462-CFFD-6274-58C207846B69}"/>
+          </ac:spMkLst>
+        </pc:spChg>
+        <pc:spChg chg="add del mod">
+          <ac:chgData name="Pedro Lucas de Oliveira" userId="decf2ebc-4f1b-4875-9cd3-eb66623e709f" providerId="ADAL" clId="{D4888E3A-4B92-457B-A42D-5FC11DBDCBA1}" dt="2026-10-01T11:36:51.523" v="86" actId="478"/>
+          <ac:spMkLst>
+            <pc:docMk/>
+            <pc:sldMk cId="3915172499" sldId="256"/>
+            <ac:spMk id="9" creationId="{053B5C43-9C3E-91A8-FE2E-983DFF6E4878}"/>
+          </ac:spMkLst>
+        </pc:spChg>
+        <pc:spChg chg="add del">
+          <ac:chgData name="Pedro Lucas de Oliveira" userId="decf2ebc-4f1b-4875-9cd3-eb66623e709f" providerId="ADAL" clId="{D4888E3A-4B92-457B-A42D-5FC11DBDCBA1}" dt="2026-10-01T11:37:01.685" v="88" actId="11529"/>
+          <ac:spMkLst>
+            <pc:docMk/>
+            <pc:sldMk cId="3915172499" sldId="256"/>
+            <ac:spMk id="10" creationId="{47BB43AD-270B-2914-D6EB-C9CEBCB3BF39}"/>
+          </ac:spMkLst>
+        </pc:spChg>
+        <pc:spChg chg="add mod ord topLvl">
+          <ac:chgData name="Pedro Lucas de Oliveira" userId="decf2ebc-4f1b-4875-9cd3-eb66623e709f" providerId="ADAL" clId="{D4888E3A-4B92-457B-A42D-5FC11DBDCBA1}" dt="2026-10-01T11:42:24.617" v="180" actId="164"/>
+          <ac:spMkLst>
+            <pc:docMk/>
+            <pc:sldMk cId="3915172499" sldId="256"/>
+            <ac:spMk id="11" creationId="{7AAFB90D-7F3C-CD1F-9143-5139A53DDCE2}"/>
+          </ac:spMkLst>
+        </pc:spChg>
+        <pc:spChg chg="add mod ord">
+          <ac:chgData name="Pedro Lucas de Oliveira" userId="decf2ebc-4f1b-4875-9cd3-eb66623e709f" providerId="ADAL" clId="{D4888E3A-4B92-457B-A42D-5FC11DBDCBA1}" dt="2026-10-01T11:42:24.617" v="180" actId="164"/>
+          <ac:spMkLst>
+            <pc:docMk/>
+            <pc:sldMk cId="3915172499" sldId="256"/>
+            <ac:spMk id="13" creationId="{8D7E6951-012E-140E-CEB9-083D3FD8E9D9}"/>
+          </ac:spMkLst>
+        </pc:spChg>
+        <pc:spChg chg="add mod">
+          <ac:chgData name="Pedro Lucas de Oliveira" userId="decf2ebc-4f1b-4875-9cd3-eb66623e709f" providerId="ADAL" clId="{D4888E3A-4B92-457B-A42D-5FC11DBDCBA1}" dt="2026-10-01T12:44:06.120" v="692" actId="108"/>
+          <ac:spMkLst>
+            <pc:docMk/>
+            <pc:sldMk cId="3915172499" sldId="256"/>
+            <ac:spMk id="16" creationId="{CA19C9A3-47EF-0AD2-7853-A627BCE48330}"/>
+          </ac:spMkLst>
+        </pc:spChg>
+        <pc:spChg chg="add mod">
+          <ac:chgData name="Pedro Lucas de Oliveira" userId="decf2ebc-4f1b-4875-9cd3-eb66623e709f" providerId="ADAL" clId="{D4888E3A-4B92-457B-A42D-5FC11DBDCBA1}" dt="2026-10-01T12:44:21.516" v="695" actId="108"/>
+          <ac:spMkLst>
+            <pc:docMk/>
+            <pc:sldMk cId="3915172499" sldId="256"/>
+            <ac:spMk id="18" creationId="{EC4DC8D0-1EF9-76DF-DD53-5066E8826863}"/>
+          </ac:spMkLst>
+        </pc:spChg>
+        <pc:spChg chg="mod ord">
+          <ac:chgData name="Pedro Lucas de Oliveira" userId="decf2ebc-4f1b-4875-9cd3-eb66623e709f" providerId="ADAL" clId="{D4888E3A-4B92-457B-A42D-5FC11DBDCBA1}" dt="2026-10-01T12:42:21.088" v="533" actId="20577"/>
+          <ac:spMkLst>
+            <pc:docMk/>
+            <pc:sldMk cId="3915172499" sldId="256"/>
+            <ac:spMk id="26" creationId="{E3F63FFE-1804-D7BF-8EC8-0403B865DADA}"/>
+          </ac:spMkLst>
+        </pc:spChg>
+        <pc:spChg chg="del mod">
+          <ac:chgData name="Pedro Lucas de Oliveira" userId="decf2ebc-4f1b-4875-9cd3-eb66623e709f" providerId="ADAL" clId="{D4888E3A-4B92-457B-A42D-5FC11DBDCBA1}" dt="2026-10-01T11:35:18.248" v="69" actId="478"/>
           <ac:spMkLst>
             <pc:docMk/>
             <pc:sldMk cId="3915172499" sldId="256"/>
             <ac:spMk id="75" creationId="{304DDFD2-6990-FADA-3D21-ABC3E159D0A5}"/>
           </ac:spMkLst>
         </pc:spChg>
+        <pc:grpChg chg="add del mod">
+          <ac:chgData name="Pedro Lucas de Oliveira" userId="decf2ebc-4f1b-4875-9cd3-eb66623e709f" providerId="ADAL" clId="{D4888E3A-4B92-457B-A42D-5FC11DBDCBA1}" dt="2026-10-01T11:39:08.405" v="116" actId="165"/>
+          <ac:grpSpMkLst>
+            <pc:docMk/>
+            <pc:sldMk cId="3915172499" sldId="256"/>
+            <ac:grpSpMk id="12" creationId="{2E6E400D-F12B-99CD-C870-859B8A6D074B}"/>
+          </ac:grpSpMkLst>
+        </pc:grpChg>
+        <pc:grpChg chg="add mod">
+          <ac:chgData name="Pedro Lucas de Oliveira" userId="decf2ebc-4f1b-4875-9cd3-eb66623e709f" providerId="ADAL" clId="{D4888E3A-4B92-457B-A42D-5FC11DBDCBA1}" dt="2026-10-01T11:42:24.617" v="180" actId="164"/>
+          <ac:grpSpMkLst>
+            <pc:docMk/>
+            <pc:sldMk cId="3915172499" sldId="256"/>
+            <ac:grpSpMk id="14" creationId="{BD9CC499-AE4B-6B1B-C793-E0F1445793A2}"/>
+          </ac:grpSpMkLst>
+        </pc:grpChg>
       </pc:sldChg>
-      <pc:sldChg chg="addSp modSp mod">
-        <pc:chgData name="Pedro Lucas de Oliveira" userId="decf2ebc-4f1b-4875-9cd3-eb66623e709f" providerId="ADAL" clId="{D4888E3A-4B92-457B-A42D-5FC11DBDCBA1}" dt="2026-08-03T10:15:47.409" v="68" actId="207"/>
+      <pc:sldChg chg="addSp delSp modSp mod">
+        <pc:chgData name="Pedro Lucas de Oliveira" userId="decf2ebc-4f1b-4875-9cd3-eb66623e709f" providerId="ADAL" clId="{D4888E3A-4B92-457B-A42D-5FC11DBDCBA1}" dt="2026-10-01T12:45:16.116" v="710"/>
         <pc:sldMkLst>
           <pc:docMk/>
           <pc:sldMk cId="1611592038" sldId="257"/>
         </pc:sldMkLst>
-        <pc:spChg chg="add mod ord">
-          <ac:chgData name="Pedro Lucas de Oliveira" userId="decf2ebc-4f1b-4875-9cd3-eb66623e709f" providerId="ADAL" clId="{D4888E3A-4B92-457B-A42D-5FC11DBDCBA1}" dt="2026-08-03T10:02:24.560" v="41" actId="167"/>
+        <pc:spChg chg="del">
+          <ac:chgData name="Pedro Lucas de Oliveira" userId="decf2ebc-4f1b-4875-9cd3-eb66623e709f" providerId="ADAL" clId="{D4888E3A-4B92-457B-A42D-5FC11DBDCBA1}" dt="2026-10-01T11:38:48.850" v="111" actId="478"/>
           <ac:spMkLst>
             <pc:docMk/>
             <pc:sldMk cId="1611592038" sldId="257"/>
@@ -186,7 +282,7 @@
           </ac:spMkLst>
         </pc:spChg>
         <pc:spChg chg="mod">
-          <ac:chgData name="Pedro Lucas de Oliveira" userId="decf2ebc-4f1b-4875-9cd3-eb66623e709f" providerId="ADAL" clId="{D4888E3A-4B92-457B-A42D-5FC11DBDCBA1}" dt="2026-08-03T10:15:19.334" v="67" actId="14100"/>
+          <ac:chgData name="Pedro Lucas de Oliveira" userId="decf2ebc-4f1b-4875-9cd3-eb66623e709f" providerId="ADAL" clId="{D4888E3A-4B92-457B-A42D-5FC11DBDCBA1}" dt="2026-10-01T12:44:41.039" v="700" actId="108"/>
           <ac:spMkLst>
             <pc:docMk/>
             <pc:sldMk cId="1611592038" sldId="257"/>
@@ -194,7 +290,7 @@
           </ac:spMkLst>
         </pc:spChg>
         <pc:spChg chg="mod">
-          <ac:chgData name="Pedro Lucas de Oliveira" userId="decf2ebc-4f1b-4875-9cd3-eb66623e709f" providerId="ADAL" clId="{D4888E3A-4B92-457B-A42D-5FC11DBDCBA1}" dt="2026-08-03T10:03:16.927" v="57" actId="14100"/>
+          <ac:chgData name="Pedro Lucas de Oliveira" userId="decf2ebc-4f1b-4875-9cd3-eb66623e709f" providerId="ADAL" clId="{D4888E3A-4B92-457B-A42D-5FC11DBDCBA1}" dt="2026-10-01T12:45:15.236" v="708"/>
           <ac:spMkLst>
             <pc:docMk/>
             <pc:sldMk cId="1611592038" sldId="257"/>
@@ -202,7 +298,15 @@
           </ac:spMkLst>
         </pc:spChg>
         <pc:spChg chg="mod">
-          <ac:chgData name="Pedro Lucas de Oliveira" userId="decf2ebc-4f1b-4875-9cd3-eb66623e709f" providerId="ADAL" clId="{D4888E3A-4B92-457B-A42D-5FC11DBDCBA1}" dt="2026-08-03T10:15:11.975" v="65" actId="1076"/>
+          <ac:chgData name="Pedro Lucas de Oliveira" userId="decf2ebc-4f1b-4875-9cd3-eb66623e709f" providerId="ADAL" clId="{D4888E3A-4B92-457B-A42D-5FC11DBDCBA1}" dt="2026-10-01T11:42:26.431" v="181"/>
+          <ac:spMkLst>
+            <pc:docMk/>
+            <pc:sldMk cId="1611592038" sldId="257"/>
+            <ac:spMk id="6" creationId="{3F120648-1438-B22A-D83A-614FBFB3A4CC}"/>
+          </ac:spMkLst>
+        </pc:spChg>
+        <pc:spChg chg="mod">
+          <ac:chgData name="Pedro Lucas de Oliveira" userId="decf2ebc-4f1b-4875-9cd3-eb66623e709f" providerId="ADAL" clId="{D4888E3A-4B92-457B-A42D-5FC11DBDCBA1}" dt="2026-10-01T12:45:12.028" v="702"/>
           <ac:spMkLst>
             <pc:docMk/>
             <pc:sldMk cId="1611592038" sldId="257"/>
@@ -210,53 +314,245 @@
           </ac:spMkLst>
         </pc:spChg>
         <pc:spChg chg="mod">
-          <ac:chgData name="Pedro Lucas de Oliveira" userId="decf2ebc-4f1b-4875-9cd3-eb66623e709f" providerId="ADAL" clId="{D4888E3A-4B92-457B-A42D-5FC11DBDCBA1}" dt="2026-08-03T10:03:13.003" v="56" actId="1076"/>
+          <ac:chgData name="Pedro Lucas de Oliveira" userId="decf2ebc-4f1b-4875-9cd3-eb66623e709f" providerId="ADAL" clId="{D4888E3A-4B92-457B-A42D-5FC11DBDCBA1}" dt="2026-10-01T11:42:26.431" v="181"/>
+          <ac:spMkLst>
+            <pc:docMk/>
+            <pc:sldMk cId="1611592038" sldId="257"/>
+            <ac:spMk id="8" creationId="{8388B717-2703-90B6-D900-70C8D2C79ADB}"/>
+          </ac:spMkLst>
+        </pc:spChg>
+        <pc:spChg chg="mod">
+          <ac:chgData name="Pedro Lucas de Oliveira" userId="decf2ebc-4f1b-4875-9cd3-eb66623e709f" providerId="ADAL" clId="{D4888E3A-4B92-457B-A42D-5FC11DBDCBA1}" dt="2026-10-01T12:45:13.079" v="704"/>
+          <ac:spMkLst>
+            <pc:docMk/>
+            <pc:sldMk cId="1611592038" sldId="257"/>
+            <ac:spMk id="9" creationId="{87B6D34D-C954-7704-D1A2-96EC93B75A03}"/>
+          </ac:spMkLst>
+        </pc:spChg>
+        <pc:spChg chg="mod">
+          <ac:chgData name="Pedro Lucas de Oliveira" userId="decf2ebc-4f1b-4875-9cd3-eb66623e709f" providerId="ADAL" clId="{D4888E3A-4B92-457B-A42D-5FC11DBDCBA1}" dt="2026-10-01T11:42:26.431" v="181"/>
+          <ac:spMkLst>
+            <pc:docMk/>
+            <pc:sldMk cId="1611592038" sldId="257"/>
+            <ac:spMk id="10" creationId="{72E67AA6-47A1-534A-DBF6-3BEE14262E04}"/>
+          </ac:spMkLst>
+        </pc:spChg>
+        <pc:spChg chg="mod">
+          <ac:chgData name="Pedro Lucas de Oliveira" userId="decf2ebc-4f1b-4875-9cd3-eb66623e709f" providerId="ADAL" clId="{D4888E3A-4B92-457B-A42D-5FC11DBDCBA1}" dt="2026-10-01T12:45:14.264" v="706"/>
+          <ac:spMkLst>
+            <pc:docMk/>
+            <pc:sldMk cId="1611592038" sldId="257"/>
+            <ac:spMk id="11" creationId="{4FA2D67F-F0FD-AE63-9F85-2284E38CDE42}"/>
+          </ac:spMkLst>
+        </pc:spChg>
+        <pc:spChg chg="mod">
+          <ac:chgData name="Pedro Lucas de Oliveira" userId="decf2ebc-4f1b-4875-9cd3-eb66623e709f" providerId="ADAL" clId="{D4888E3A-4B92-457B-A42D-5FC11DBDCBA1}" dt="2026-10-01T12:45:16.116" v="710"/>
           <ac:spMkLst>
             <pc:docMk/>
             <pc:sldMk cId="1611592038" sldId="257"/>
             <ac:spMk id="13" creationId="{263120D6-D566-68E6-5C94-FEB8D8F9915E}"/>
           </ac:spMkLst>
         </pc:spChg>
+        <pc:spChg chg="add mod">
+          <ac:chgData name="Pedro Lucas de Oliveira" userId="decf2ebc-4f1b-4875-9cd3-eb66623e709f" providerId="ADAL" clId="{D4888E3A-4B92-457B-A42D-5FC11DBDCBA1}" dt="2026-10-01T12:44:38.877" v="699" actId="108"/>
+          <ac:spMkLst>
+            <pc:docMk/>
+            <pc:sldMk cId="1611592038" sldId="257"/>
+            <ac:spMk id="14" creationId="{008B230A-9A30-AB27-4FC9-68E83FE503B8}"/>
+          </ac:spMkLst>
+        </pc:spChg>
         <pc:spChg chg="mod">
-          <ac:chgData name="Pedro Lucas de Oliveira" userId="decf2ebc-4f1b-4875-9cd3-eb66623e709f" providerId="ADAL" clId="{D4888E3A-4B92-457B-A42D-5FC11DBDCBA1}" dt="2026-08-03T10:15:47.409" v="68" actId="207"/>
+          <ac:chgData name="Pedro Lucas de Oliveira" userId="decf2ebc-4f1b-4875-9cd3-eb66623e709f" providerId="ADAL" clId="{D4888E3A-4B92-457B-A42D-5FC11DBDCBA1}" dt="2026-10-01T12:42:35.535" v="536" actId="1076"/>
           <ac:spMkLst>
             <pc:docMk/>
             <pc:sldMk cId="1611592038" sldId="257"/>
             <ac:spMk id="29" creationId="{4C2BC9B8-1640-8C90-7F2C-F3A59AD59C8E}"/>
           </ac:spMkLst>
         </pc:spChg>
-        <pc:spChg chg="mod">
-          <ac:chgData name="Pedro Lucas de Oliveira" userId="decf2ebc-4f1b-4875-9cd3-eb66623e709f" providerId="ADAL" clId="{D4888E3A-4B92-457B-A42D-5FC11DBDCBA1}" dt="2026-08-03T10:02:34.822" v="48" actId="1037"/>
+        <pc:spChg chg="del">
+          <ac:chgData name="Pedro Lucas de Oliveira" userId="decf2ebc-4f1b-4875-9cd3-eb66623e709f" providerId="ADAL" clId="{D4888E3A-4B92-457B-A42D-5FC11DBDCBA1}" dt="2026-10-01T11:38:47.988" v="110" actId="478"/>
           <ac:spMkLst>
             <pc:docMk/>
             <pc:sldMk cId="1611592038" sldId="257"/>
             <ac:spMk id="75" creationId="{292C0DCC-6C67-D103-618D-603AA8238AF5}"/>
           </ac:spMkLst>
         </pc:spChg>
+        <pc:grpChg chg="add mod ord">
+          <ac:chgData name="Pedro Lucas de Oliveira" userId="decf2ebc-4f1b-4875-9cd3-eb66623e709f" providerId="ADAL" clId="{D4888E3A-4B92-457B-A42D-5FC11DBDCBA1}" dt="2026-10-01T12:42:31.565" v="535" actId="1076"/>
+          <ac:grpSpMkLst>
+            <pc:docMk/>
+            <pc:sldMk cId="1611592038" sldId="257"/>
+            <ac:grpSpMk id="4" creationId="{DE18E8E2-06C0-6B3C-650E-7D7E20B6BAC2}"/>
+          </ac:grpSpMkLst>
+        </pc:grpChg>
       </pc:sldChg>
-      <pc:sldChg chg="addSp modSp mod">
-        <pc:chgData name="Pedro Lucas de Oliveira" userId="decf2ebc-4f1b-4875-9cd3-eb66623e709f" providerId="ADAL" clId="{D4888E3A-4B92-457B-A42D-5FC11DBDCBA1}" dt="2026-08-03T10:07:03.309" v="64" actId="167"/>
+      <pc:sldChg chg="addSp delSp modSp mod">
+        <pc:chgData name="Pedro Lucas de Oliveira" userId="decf2ebc-4f1b-4875-9cd3-eb66623e709f" providerId="ADAL" clId="{D4888E3A-4B92-457B-A42D-5FC11DBDCBA1}" dt="2026-10-01T12:45:29.058" v="725"/>
         <pc:sldMkLst>
           <pc:docMk/>
           <pc:sldMk cId="3867239618" sldId="258"/>
         </pc:sldMkLst>
-        <pc:spChg chg="add mod ord">
-          <ac:chgData name="Pedro Lucas de Oliveira" userId="decf2ebc-4f1b-4875-9cd3-eb66623e709f" providerId="ADAL" clId="{D4888E3A-4B92-457B-A42D-5FC11DBDCBA1}" dt="2026-08-03T10:07:03.309" v="64" actId="167"/>
+        <pc:spChg chg="del">
+          <ac:chgData name="Pedro Lucas de Oliveira" userId="decf2ebc-4f1b-4875-9cd3-eb66623e709f" providerId="ADAL" clId="{D4888E3A-4B92-457B-A42D-5FC11DBDCBA1}" dt="2026-10-01T11:38:50.384" v="112" actId="478"/>
           <ac:spMkLst>
             <pc:docMk/>
             <pc:sldMk cId="3867239618" sldId="258"/>
             <ac:spMk id="2" creationId="{1242E65C-ACAB-BA77-5A68-F539C71AE861}"/>
           </ac:spMkLst>
         </pc:spChg>
+        <pc:spChg chg="mod">
+          <ac:chgData name="Pedro Lucas de Oliveira" userId="decf2ebc-4f1b-4875-9cd3-eb66623e709f" providerId="ADAL" clId="{D4888E3A-4B92-457B-A42D-5FC11DBDCBA1}" dt="2026-10-01T12:45:28.206" v="723"/>
+          <ac:spMkLst>
+            <pc:docMk/>
+            <pc:sldMk cId="3867239618" sldId="258"/>
+            <ac:spMk id="3" creationId="{E1E76BC6-A802-6B0E-0989-B6E4A153C435}"/>
+          </ac:spMkLst>
+        </pc:spChg>
+        <pc:spChg chg="mod">
+          <ac:chgData name="Pedro Lucas de Oliveira" userId="decf2ebc-4f1b-4875-9cd3-eb66623e709f" providerId="ADAL" clId="{D4888E3A-4B92-457B-A42D-5FC11DBDCBA1}" dt="2026-10-01T12:45:27.395" v="721"/>
+          <ac:spMkLst>
+            <pc:docMk/>
+            <pc:sldMk cId="3867239618" sldId="258"/>
+            <ac:spMk id="5" creationId="{6CD8C671-1A9B-89AF-B54A-01E24A5F6E69}"/>
+          </ac:spMkLst>
+        </pc:spChg>
+        <pc:spChg chg="mod">
+          <ac:chgData name="Pedro Lucas de Oliveira" userId="decf2ebc-4f1b-4875-9cd3-eb66623e709f" providerId="ADAL" clId="{D4888E3A-4B92-457B-A42D-5FC11DBDCBA1}" dt="2026-10-01T11:42:27.850" v="182"/>
+          <ac:spMkLst>
+            <pc:docMk/>
+            <pc:sldMk cId="3867239618" sldId="258"/>
+            <ac:spMk id="6" creationId="{A40F4BF7-49A3-9A98-2FCF-ACAD3FC2EB68}"/>
+          </ac:spMkLst>
+        </pc:spChg>
+        <pc:spChg chg="mod">
+          <ac:chgData name="Pedro Lucas de Oliveira" userId="decf2ebc-4f1b-4875-9cd3-eb66623e709f" providerId="ADAL" clId="{D4888E3A-4B92-457B-A42D-5FC11DBDCBA1}" dt="2026-10-01T12:45:29.058" v="725"/>
+          <ac:spMkLst>
+            <pc:docMk/>
+            <pc:sldMk cId="3867239618" sldId="258"/>
+            <ac:spMk id="7" creationId="{3DF77D04-A0C9-AA8F-BD1B-84240460EFDA}"/>
+          </ac:spMkLst>
+        </pc:spChg>
+        <pc:spChg chg="mod">
+          <ac:chgData name="Pedro Lucas de Oliveira" userId="decf2ebc-4f1b-4875-9cd3-eb66623e709f" providerId="ADAL" clId="{D4888E3A-4B92-457B-A42D-5FC11DBDCBA1}" dt="2026-10-01T11:42:27.850" v="182"/>
+          <ac:spMkLst>
+            <pc:docMk/>
+            <pc:sldMk cId="3867239618" sldId="258"/>
+            <ac:spMk id="8" creationId="{F8939756-F12E-178B-D15A-2A5F85B7FB66}"/>
+          </ac:spMkLst>
+        </pc:spChg>
+        <pc:spChg chg="mod">
+          <ac:chgData name="Pedro Lucas de Oliveira" userId="decf2ebc-4f1b-4875-9cd3-eb66623e709f" providerId="ADAL" clId="{D4888E3A-4B92-457B-A42D-5FC11DBDCBA1}" dt="2026-10-01T11:42:27.850" v="182"/>
+          <ac:spMkLst>
+            <pc:docMk/>
+            <pc:sldMk cId="3867239618" sldId="258"/>
+            <ac:spMk id="9" creationId="{8ED6F3AB-AF2A-5C86-DFD4-84B61C59ADE7}"/>
+          </ac:spMkLst>
+        </pc:spChg>
+        <pc:spChg chg="add del mod">
+          <ac:chgData name="Pedro Lucas de Oliveira" userId="decf2ebc-4f1b-4875-9cd3-eb66623e709f" providerId="ADAL" clId="{D4888E3A-4B92-457B-A42D-5FC11DBDCBA1}" dt="2026-10-01T12:33:32.011" v="287" actId="478"/>
+          <ac:spMkLst>
+            <pc:docMk/>
+            <pc:sldMk cId="3867239618" sldId="258"/>
+            <ac:spMk id="10" creationId="{0C5E7C0D-7D1D-6E02-B93C-EB6A7B57CAE6}"/>
+          </ac:spMkLst>
+        </pc:spChg>
+        <pc:spChg chg="add del mod">
+          <ac:chgData name="Pedro Lucas de Oliveira" userId="decf2ebc-4f1b-4875-9cd3-eb66623e709f" providerId="ADAL" clId="{D4888E3A-4B92-457B-A42D-5FC11DBDCBA1}" dt="2026-10-01T12:34:03.814" v="300" actId="478"/>
+          <ac:spMkLst>
+            <pc:docMk/>
+            <pc:sldMk cId="3867239618" sldId="258"/>
+            <ac:spMk id="12" creationId="{F4EFC3A1-D2CA-29F6-DCEF-B2DA7219C85D}"/>
+          </ac:spMkLst>
+        </pc:spChg>
+        <pc:spChg chg="add mod">
+          <ac:chgData name="Pedro Lucas de Oliveira" userId="decf2ebc-4f1b-4875-9cd3-eb66623e709f" providerId="ADAL" clId="{D4888E3A-4B92-457B-A42D-5FC11DBDCBA1}" dt="2026-10-01T12:45:22.560" v="715"/>
+          <ac:spMkLst>
+            <pc:docMk/>
+            <pc:sldMk cId="3867239618" sldId="258"/>
+            <ac:spMk id="14" creationId="{E77DB7DA-6DC2-4BDF-AC91-9FB98AF44DF9}"/>
+          </ac:spMkLst>
+        </pc:spChg>
+        <pc:spChg chg="mod">
+          <ac:chgData name="Pedro Lucas de Oliveira" userId="decf2ebc-4f1b-4875-9cd3-eb66623e709f" providerId="ADAL" clId="{D4888E3A-4B92-457B-A42D-5FC11DBDCBA1}" dt="2026-10-01T12:45:24.273" v="717"/>
+          <ac:spMkLst>
+            <pc:docMk/>
+            <pc:sldMk cId="3867239618" sldId="258"/>
+            <ac:spMk id="15" creationId="{D2AC0351-FE53-F828-0169-15ED03262C53}"/>
+          </ac:spMkLst>
+        </pc:spChg>
+        <pc:spChg chg="mod">
+          <ac:chgData name="Pedro Lucas de Oliveira" userId="decf2ebc-4f1b-4875-9cd3-eb66623e709f" providerId="ADAL" clId="{D4888E3A-4B92-457B-A42D-5FC11DBDCBA1}" dt="2026-10-01T12:34:53.024" v="363" actId="164"/>
+          <ac:spMkLst>
+            <pc:docMk/>
+            <pc:sldMk cId="3867239618" sldId="258"/>
+            <ac:spMk id="16" creationId="{BD8457FF-946D-DB0C-018E-EA9F733E28FA}"/>
+          </ac:spMkLst>
+        </pc:spChg>
+        <pc:spChg chg="mod">
+          <ac:chgData name="Pedro Lucas de Oliveira" userId="decf2ebc-4f1b-4875-9cd3-eb66623e709f" providerId="ADAL" clId="{D4888E3A-4B92-457B-A42D-5FC11DBDCBA1}" dt="2026-10-01T12:45:20.124" v="713" actId="108"/>
+          <ac:spMkLst>
+            <pc:docMk/>
+            <pc:sldMk cId="3867239618" sldId="258"/>
+            <ac:spMk id="18" creationId="{DC41A676-D325-E833-A6EC-8117ECF5F043}"/>
+          </ac:spMkLst>
+        </pc:spChg>
+        <pc:spChg chg="del mod">
+          <ac:chgData name="Pedro Lucas de Oliveira" userId="decf2ebc-4f1b-4875-9cd3-eb66623e709f" providerId="ADAL" clId="{D4888E3A-4B92-457B-A42D-5FC11DBDCBA1}" dt="2026-10-01T12:33:03.325" v="276" actId="478"/>
+          <ac:spMkLst>
+            <pc:docMk/>
+            <pc:sldMk cId="3867239618" sldId="258"/>
+            <ac:spMk id="20" creationId="{10112B6D-A183-12BE-22EE-2043C92C1D50}"/>
+          </ac:spMkLst>
+        </pc:spChg>
+        <pc:spChg chg="mod">
+          <ac:chgData name="Pedro Lucas de Oliveira" userId="decf2ebc-4f1b-4875-9cd3-eb66623e709f" providerId="ADAL" clId="{D4888E3A-4B92-457B-A42D-5FC11DBDCBA1}" dt="2026-10-01T12:42:43.783" v="537" actId="1076"/>
+          <ac:spMkLst>
+            <pc:docMk/>
+            <pc:sldMk cId="3867239618" sldId="258"/>
+            <ac:spMk id="33" creationId="{6E9FE4AE-EF0D-3845-D162-FCC64130EB5A}"/>
+          </ac:spMkLst>
+        </pc:spChg>
+        <pc:spChg chg="del">
+          <ac:chgData name="Pedro Lucas de Oliveira" userId="decf2ebc-4f1b-4875-9cd3-eb66623e709f" providerId="ADAL" clId="{D4888E3A-4B92-457B-A42D-5FC11DBDCBA1}" dt="2026-10-01T11:38:51.123" v="113" actId="478"/>
+          <ac:spMkLst>
+            <pc:docMk/>
+            <pc:sldMk cId="3867239618" sldId="258"/>
+            <ac:spMk id="75" creationId="{E4573D8A-BC6C-5F60-5899-79EFD74AF655}"/>
+          </ac:spMkLst>
+        </pc:spChg>
+        <pc:grpChg chg="add mod ord">
+          <ac:chgData name="Pedro Lucas de Oliveira" userId="decf2ebc-4f1b-4875-9cd3-eb66623e709f" providerId="ADAL" clId="{D4888E3A-4B92-457B-A42D-5FC11DBDCBA1}" dt="2026-10-01T11:42:37.616" v="185" actId="167"/>
+          <ac:grpSpMkLst>
+            <pc:docMk/>
+            <pc:sldMk cId="3867239618" sldId="258"/>
+            <ac:grpSpMk id="4" creationId="{92AA1491-53CA-C708-08F6-C7EE1F69A730}"/>
+          </ac:grpSpMkLst>
+        </pc:grpChg>
+        <pc:grpChg chg="add mod">
+          <ac:chgData name="Pedro Lucas de Oliveira" userId="decf2ebc-4f1b-4875-9cd3-eb66623e709f" providerId="ADAL" clId="{D4888E3A-4B92-457B-A42D-5FC11DBDCBA1}" dt="2026-10-01T12:35:04.403" v="366" actId="1076"/>
+          <ac:grpSpMkLst>
+            <pc:docMk/>
+            <pc:sldMk cId="3867239618" sldId="258"/>
+            <ac:grpSpMk id="17" creationId="{C4D7A007-9BFC-7D77-DC99-56B25EDB8689}"/>
+          </ac:grpSpMkLst>
+        </pc:grpChg>
+        <pc:grpChg chg="add mod">
+          <ac:chgData name="Pedro Lucas de Oliveira" userId="decf2ebc-4f1b-4875-9cd3-eb66623e709f" providerId="ADAL" clId="{D4888E3A-4B92-457B-A42D-5FC11DBDCBA1}" dt="2026-10-01T12:35:08.682" v="367" actId="1076"/>
+          <ac:grpSpMkLst>
+            <pc:docMk/>
+            <pc:sldMk cId="3867239618" sldId="258"/>
+            <ac:grpSpMk id="19" creationId="{29BFDA6B-40E0-9FD6-A8F3-516602C20765}"/>
+          </ac:grpSpMkLst>
+        </pc:grpChg>
       </pc:sldChg>
-      <pc:sldChg chg="addSp modSp mod">
-        <pc:chgData name="Pedro Lucas de Oliveira" userId="decf2ebc-4f1b-4875-9cd3-eb66623e709f" providerId="ADAL" clId="{D4888E3A-4B92-457B-A42D-5FC11DBDCBA1}" dt="2026-08-03T10:07:00.709" v="63" actId="167"/>
+      <pc:sldChg chg="addSp delSp modSp mod">
+        <pc:chgData name="Pedro Lucas de Oliveira" userId="decf2ebc-4f1b-4875-9cd3-eb66623e709f" providerId="ADAL" clId="{D4888E3A-4B92-457B-A42D-5FC11DBDCBA1}" dt="2026-10-01T12:45:46.116" v="729" actId="164"/>
         <pc:sldMkLst>
           <pc:docMk/>
           <pc:sldMk cId="2851914526" sldId="259"/>
         </pc:sldMkLst>
-        <pc:spChg chg="add mod ord">
-          <ac:chgData name="Pedro Lucas de Oliveira" userId="decf2ebc-4f1b-4875-9cd3-eb66623e709f" providerId="ADAL" clId="{D4888E3A-4B92-457B-A42D-5FC11DBDCBA1}" dt="2026-08-03T10:07:00.709" v="63" actId="167"/>
+        <pc:spChg chg="del">
+          <ac:chgData name="Pedro Lucas de Oliveira" userId="decf2ebc-4f1b-4875-9cd3-eb66623e709f" providerId="ADAL" clId="{D4888E3A-4B92-457B-A42D-5FC11DBDCBA1}" dt="2026-10-01T11:38:52.781" v="114" actId="478"/>
           <ac:spMkLst>
             <pc:docMk/>
             <pc:sldMk cId="2851914526" sldId="259"/>
@@ -264,7 +560,55 @@
           </ac:spMkLst>
         </pc:spChg>
         <pc:spChg chg="mod">
-          <ac:chgData name="Pedro Lucas de Oliveira" userId="decf2ebc-4f1b-4875-9cd3-eb66623e709f" providerId="ADAL" clId="{D4888E3A-4B92-457B-A42D-5FC11DBDCBA1}" dt="2026-08-03T10:06:29.610" v="58" actId="14100"/>
+          <ac:chgData name="Pedro Lucas de Oliveira" userId="decf2ebc-4f1b-4875-9cd3-eb66623e709f" providerId="ADAL" clId="{D4888E3A-4B92-457B-A42D-5FC11DBDCBA1}" dt="2026-10-01T11:42:29.091" v="183"/>
+          <ac:spMkLst>
+            <pc:docMk/>
+            <pc:sldMk cId="2851914526" sldId="259"/>
+            <ac:spMk id="4" creationId="{B6187A41-7805-115C-C493-F89C987CCD24}"/>
+          </ac:spMkLst>
+        </pc:spChg>
+        <pc:spChg chg="mod">
+          <ac:chgData name="Pedro Lucas de Oliveira" userId="decf2ebc-4f1b-4875-9cd3-eb66623e709f" providerId="ADAL" clId="{D4888E3A-4B92-457B-A42D-5FC11DBDCBA1}" dt="2026-10-01T11:42:29.091" v="183"/>
+          <ac:spMkLst>
+            <pc:docMk/>
+            <pc:sldMk cId="2851914526" sldId="259"/>
+            <ac:spMk id="5" creationId="{84B3FBD7-A63C-8CE1-00B2-87D1B57D512F}"/>
+          </ac:spMkLst>
+        </pc:spChg>
+        <pc:spChg chg="mod">
+          <ac:chgData name="Pedro Lucas de Oliveira" userId="decf2ebc-4f1b-4875-9cd3-eb66623e709f" providerId="ADAL" clId="{D4888E3A-4B92-457B-A42D-5FC11DBDCBA1}" dt="2026-10-01T11:42:29.091" v="183"/>
+          <ac:spMkLst>
+            <pc:docMk/>
+            <pc:sldMk cId="2851914526" sldId="259"/>
+            <ac:spMk id="6" creationId="{DA14B2C4-93D2-E1B0-F10E-814F88B419F3}"/>
+          </ac:spMkLst>
+        </pc:spChg>
+        <pc:spChg chg="add mod">
+          <ac:chgData name="Pedro Lucas de Oliveira" userId="decf2ebc-4f1b-4875-9cd3-eb66623e709f" providerId="ADAL" clId="{D4888E3A-4B92-457B-A42D-5FC11DBDCBA1}" dt="2026-10-01T12:45:37.740" v="727"/>
+          <ac:spMkLst>
+            <pc:docMk/>
+            <pc:sldMk cId="2851914526" sldId="259"/>
+            <ac:spMk id="7" creationId="{937D19D9-72D9-B196-A44B-5BE5F2A54D4C}"/>
+          </ac:spMkLst>
+        </pc:spChg>
+        <pc:spChg chg="mod">
+          <ac:chgData name="Pedro Lucas de Oliveira" userId="decf2ebc-4f1b-4875-9cd3-eb66623e709f" providerId="ADAL" clId="{D4888E3A-4B92-457B-A42D-5FC11DBDCBA1}" dt="2026-10-01T12:45:37.740" v="727"/>
+          <ac:spMkLst>
+            <pc:docMk/>
+            <pc:sldMk cId="2851914526" sldId="259"/>
+            <ac:spMk id="14" creationId="{1E3760D4-8E32-7EAE-4676-5022F41714A0}"/>
+          </ac:spMkLst>
+        </pc:spChg>
+        <pc:spChg chg="mod">
+          <ac:chgData name="Pedro Lucas de Oliveira" userId="decf2ebc-4f1b-4875-9cd3-eb66623e709f" providerId="ADAL" clId="{D4888E3A-4B92-457B-A42D-5FC11DBDCBA1}" dt="2026-10-01T12:45:37.740" v="727"/>
+          <ac:spMkLst>
+            <pc:docMk/>
+            <pc:sldMk cId="2851914526" sldId="259"/>
+            <ac:spMk id="16" creationId="{13B84FED-6890-41A4-F689-F047FC18BCFA}"/>
+          </ac:spMkLst>
+        </pc:spChg>
+        <pc:spChg chg="mod">
+          <ac:chgData name="Pedro Lucas de Oliveira" userId="decf2ebc-4f1b-4875-9cd3-eb66623e709f" providerId="ADAL" clId="{D4888E3A-4B92-457B-A42D-5FC11DBDCBA1}" dt="2026-10-01T12:45:37.740" v="727"/>
           <ac:spMkLst>
             <pc:docMk/>
             <pc:sldMk cId="2851914526" sldId="259"/>
@@ -272,7 +616,31 @@
           </ac:spMkLst>
         </pc:spChg>
         <pc:spChg chg="mod">
-          <ac:chgData name="Pedro Lucas de Oliveira" userId="decf2ebc-4f1b-4875-9cd3-eb66623e709f" providerId="ADAL" clId="{D4888E3A-4B92-457B-A42D-5FC11DBDCBA1}" dt="2026-08-03T10:06:34.322" v="60" actId="14100"/>
+          <ac:chgData name="Pedro Lucas de Oliveira" userId="decf2ebc-4f1b-4875-9cd3-eb66623e709f" providerId="ADAL" clId="{D4888E3A-4B92-457B-A42D-5FC11DBDCBA1}" dt="2026-10-01T12:45:46.116" v="729" actId="164"/>
+          <ac:spMkLst>
+            <pc:docMk/>
+            <pc:sldMk cId="2851914526" sldId="259"/>
+            <ac:spMk id="30" creationId="{B4AC7AB5-5321-BEB2-D87F-3C0E9E03E29F}"/>
+          </ac:spMkLst>
+        </pc:spChg>
+        <pc:spChg chg="mod">
+          <ac:chgData name="Pedro Lucas de Oliveira" userId="decf2ebc-4f1b-4875-9cd3-eb66623e709f" providerId="ADAL" clId="{D4888E3A-4B92-457B-A42D-5FC11DBDCBA1}" dt="2026-10-01T12:42:54.762" v="542" actId="1076"/>
+          <ac:spMkLst>
+            <pc:docMk/>
+            <pc:sldMk cId="2851914526" sldId="259"/>
+            <ac:spMk id="31" creationId="{62EAC0DB-8BEB-9FD1-AE1A-3C35FB90A441}"/>
+          </ac:spMkLst>
+        </pc:spChg>
+        <pc:spChg chg="mod">
+          <ac:chgData name="Pedro Lucas de Oliveira" userId="decf2ebc-4f1b-4875-9cd3-eb66623e709f" providerId="ADAL" clId="{D4888E3A-4B92-457B-A42D-5FC11DBDCBA1}" dt="2026-10-01T12:45:42.137" v="728" actId="164"/>
+          <ac:spMkLst>
+            <pc:docMk/>
+            <pc:sldMk cId="2851914526" sldId="259"/>
+            <ac:spMk id="33" creationId="{67479E83-D2FE-B678-EDAF-34EB3AF901EA}"/>
+          </ac:spMkLst>
+        </pc:spChg>
+        <pc:spChg chg="mod">
+          <ac:chgData name="Pedro Lucas de Oliveira" userId="decf2ebc-4f1b-4875-9cd3-eb66623e709f" providerId="ADAL" clId="{D4888E3A-4B92-457B-A42D-5FC11DBDCBA1}" dt="2026-10-01T12:45:46.116" v="729" actId="164"/>
           <ac:spMkLst>
             <pc:docMk/>
             <pc:sldMk cId="2851914526" sldId="259"/>
@@ -280,13 +648,45 @@
           </ac:spMkLst>
         </pc:spChg>
         <pc:spChg chg="mod">
-          <ac:chgData name="Pedro Lucas de Oliveira" userId="decf2ebc-4f1b-4875-9cd3-eb66623e709f" providerId="ADAL" clId="{D4888E3A-4B92-457B-A42D-5FC11DBDCBA1}" dt="2026-08-03T10:06:34.322" v="60" actId="14100"/>
+          <ac:chgData name="Pedro Lucas de Oliveira" userId="decf2ebc-4f1b-4875-9cd3-eb66623e709f" providerId="ADAL" clId="{D4888E3A-4B92-457B-A42D-5FC11DBDCBA1}" dt="2026-10-01T12:45:42.137" v="728" actId="164"/>
           <ac:spMkLst>
             <pc:docMk/>
             <pc:sldMk cId="2851914526" sldId="259"/>
             <ac:spMk id="45" creationId="{08C3BDF5-0B20-A341-6C94-F24F5C0349B6}"/>
           </ac:spMkLst>
         </pc:spChg>
+        <pc:spChg chg="del">
+          <ac:chgData name="Pedro Lucas de Oliveira" userId="decf2ebc-4f1b-4875-9cd3-eb66623e709f" providerId="ADAL" clId="{D4888E3A-4B92-457B-A42D-5FC11DBDCBA1}" dt="2026-10-01T11:38:53.294" v="115" actId="478"/>
+          <ac:spMkLst>
+            <pc:docMk/>
+            <pc:sldMk cId="2851914526" sldId="259"/>
+            <ac:spMk id="75" creationId="{6FBA34B5-6300-27CA-4688-3A9DAFA28035}"/>
+          </ac:spMkLst>
+        </pc:spChg>
+        <pc:grpChg chg="add mod ord">
+          <ac:chgData name="Pedro Lucas de Oliveira" userId="decf2ebc-4f1b-4875-9cd3-eb66623e709f" providerId="ADAL" clId="{D4888E3A-4B92-457B-A42D-5FC11DBDCBA1}" dt="2026-10-01T12:42:51.266" v="541" actId="1076"/>
+          <ac:grpSpMkLst>
+            <pc:docMk/>
+            <pc:sldMk cId="2851914526" sldId="259"/>
+            <ac:grpSpMk id="3" creationId="{89C6F816-872A-8E14-3DB5-106499F595AE}"/>
+          </ac:grpSpMkLst>
+        </pc:grpChg>
+        <pc:grpChg chg="add mod">
+          <ac:chgData name="Pedro Lucas de Oliveira" userId="decf2ebc-4f1b-4875-9cd3-eb66623e709f" providerId="ADAL" clId="{D4888E3A-4B92-457B-A42D-5FC11DBDCBA1}" dt="2026-10-01T12:45:42.137" v="728" actId="164"/>
+          <ac:grpSpMkLst>
+            <pc:docMk/>
+            <pc:sldMk cId="2851914526" sldId="259"/>
+            <ac:grpSpMk id="8" creationId="{DA458E46-F5B3-C26C-6D26-241567F43B89}"/>
+          </ac:grpSpMkLst>
+        </pc:grpChg>
+        <pc:grpChg chg="add mod">
+          <ac:chgData name="Pedro Lucas de Oliveira" userId="decf2ebc-4f1b-4875-9cd3-eb66623e709f" providerId="ADAL" clId="{D4888E3A-4B92-457B-A42D-5FC11DBDCBA1}" dt="2026-10-01T12:45:46.116" v="729" actId="164"/>
+          <ac:grpSpMkLst>
+            <pc:docMk/>
+            <pc:sldMk cId="2851914526" sldId="259"/>
+            <ac:grpSpMk id="9" creationId="{9428117B-4492-40D4-C30D-8C84D07AB24A}"/>
+          </ac:grpSpMkLst>
+        </pc:grpChg>
       </pc:sldChg>
     </pc:docChg>
   </pc:docChgLst>
@@ -424,7 +824,7 @@
           <a:p>
             <a:fld id="{96BD5E29-0138-401D-91DA-BF5820314BC8}" type="datetimeFigureOut">
               <a:rPr lang="pt-BR" smtClean="0"/>
-              <a:t>03/08/2026</a:t>
+              <a:t>01/10/2026</a:t>
             </a:fld>
             <a:endParaRPr lang="pt-BR"/>
           </a:p>
@@ -594,7 +994,7 @@
           <a:p>
             <a:fld id="{96BD5E29-0138-401D-91DA-BF5820314BC8}" type="datetimeFigureOut">
               <a:rPr lang="pt-BR" smtClean="0"/>
-              <a:t>03/08/2026</a:t>
+              <a:t>01/10/2026</a:t>
             </a:fld>
             <a:endParaRPr lang="pt-BR"/>
           </a:p>
@@ -774,7 +1174,7 @@
           <a:p>
             <a:fld id="{96BD5E29-0138-401D-91DA-BF5820314BC8}" type="datetimeFigureOut">
               <a:rPr lang="pt-BR" smtClean="0"/>
-              <a:t>03/08/2026</a:t>
+              <a:t>01/10/2026</a:t>
             </a:fld>
             <a:endParaRPr lang="pt-BR"/>
           </a:p>
@@ -944,7 +1344,7 @@
           <a:p>
             <a:fld id="{96BD5E29-0138-401D-91DA-BF5820314BC8}" type="datetimeFigureOut">
               <a:rPr lang="pt-BR" smtClean="0"/>
-              <a:t>03/08/2026</a:t>
+              <a:t>01/10/2026</a:t>
             </a:fld>
             <a:endParaRPr lang="pt-BR"/>
           </a:p>
@@ -1190,7 +1590,7 @@
           <a:p>
             <a:fld id="{96BD5E29-0138-401D-91DA-BF5820314BC8}" type="datetimeFigureOut">
               <a:rPr lang="pt-BR" smtClean="0"/>
-              <a:t>03/08/2026</a:t>
+              <a:t>01/10/2026</a:t>
             </a:fld>
             <a:endParaRPr lang="pt-BR"/>
           </a:p>
@@ -1422,7 +1822,7 @@
           <a:p>
             <a:fld id="{96BD5E29-0138-401D-91DA-BF5820314BC8}" type="datetimeFigureOut">
               <a:rPr lang="pt-BR" smtClean="0"/>
-              <a:t>03/08/2026</a:t>
+              <a:t>01/10/2026</a:t>
             </a:fld>
             <a:endParaRPr lang="pt-BR"/>
           </a:p>
@@ -1789,7 +2189,7 @@
           <a:p>
             <a:fld id="{96BD5E29-0138-401D-91DA-BF5820314BC8}" type="datetimeFigureOut">
               <a:rPr lang="pt-BR" smtClean="0"/>
-              <a:t>03/08/2026</a:t>
+              <a:t>01/10/2026</a:t>
             </a:fld>
             <a:endParaRPr lang="pt-BR"/>
           </a:p>
@@ -1907,7 +2307,7 @@
           <a:p>
             <a:fld id="{96BD5E29-0138-401D-91DA-BF5820314BC8}" type="datetimeFigureOut">
               <a:rPr lang="pt-BR" smtClean="0"/>
-              <a:t>03/08/2026</a:t>
+              <a:t>01/10/2026</a:t>
             </a:fld>
             <a:endParaRPr lang="pt-BR"/>
           </a:p>
@@ -2002,7 +2402,7 @@
           <a:p>
             <a:fld id="{96BD5E29-0138-401D-91DA-BF5820314BC8}" type="datetimeFigureOut">
               <a:rPr lang="pt-BR" smtClean="0"/>
-              <a:t>03/08/2026</a:t>
+              <a:t>01/10/2026</a:t>
             </a:fld>
             <a:endParaRPr lang="pt-BR"/>
           </a:p>
@@ -2279,7 +2679,7 @@
           <a:p>
             <a:fld id="{96BD5E29-0138-401D-91DA-BF5820314BC8}" type="datetimeFigureOut">
               <a:rPr lang="pt-BR" smtClean="0"/>
-              <a:t>03/08/2026</a:t>
+              <a:t>01/10/2026</a:t>
             </a:fld>
             <a:endParaRPr lang="pt-BR"/>
           </a:p>
@@ -2536,7 +2936,7 @@
           <a:p>
             <a:fld id="{96BD5E29-0138-401D-91DA-BF5820314BC8}" type="datetimeFigureOut">
               <a:rPr lang="pt-BR" smtClean="0"/>
-              <a:t>03/08/2026</a:t>
+              <a:t>01/10/2026</a:t>
             </a:fld>
             <a:endParaRPr lang="pt-BR"/>
           </a:p>
@@ -2749,7 +3149,7 @@
           <a:p>
             <a:fld id="{96BD5E29-0138-401D-91DA-BF5820314BC8}" type="datetimeFigureOut">
               <a:rPr lang="pt-BR" smtClean="0"/>
-              <a:t>03/08/2026</a:t>
+              <a:t>01/10/2026</a:t>
             </a:fld>
             <a:endParaRPr lang="pt-BR"/>
           </a:p>
@@ -3156,500 +3556,6 @@
       </p:grpSpPr>
       <p:sp>
         <p:nvSpPr>
-          <p:cNvPr id="2" name="Retângulo: Cantos Arredondados 1">
-            <a:extLst>
-              <a:ext uri="{FF2B5EF4-FFF2-40B4-BE49-F238E27FC236}">
-                <a16:creationId xmlns:a16="http://schemas.microsoft.com/office/drawing/2014/main" id="{2AEEE017-526C-DC74-6826-D332EA654FB5}"/>
-              </a:ext>
-            </a:extLst>
-          </p:cNvPr>
-          <p:cNvSpPr/>
-          <p:nvPr/>
-        </p:nvSpPr>
-        <p:spPr>
-          <a:xfrm>
-            <a:off x="5213123" y="-155486"/>
-            <a:ext cx="8875410" cy="1245141"/>
-          </a:xfrm>
-          <a:prstGeom prst="roundRect">
-            <a:avLst>
-              <a:gd name="adj" fmla="val 29904"/>
-            </a:avLst>
-          </a:prstGeom>
-          <a:gradFill flip="none" rotWithShape="1">
-            <a:gsLst>
-              <a:gs pos="0">
-                <a:schemeClr val="accent1">
-                  <a:lumMod val="67000"/>
-                </a:schemeClr>
-              </a:gs>
-              <a:gs pos="48000">
-                <a:schemeClr val="accent1">
-                  <a:lumMod val="97000"/>
-                  <a:lumOff val="3000"/>
-                </a:schemeClr>
-              </a:gs>
-              <a:gs pos="100000">
-                <a:schemeClr val="accent1">
-                  <a:lumMod val="60000"/>
-                  <a:lumOff val="40000"/>
-                </a:schemeClr>
-              </a:gs>
-            </a:gsLst>
-            <a:lin ang="16200000" scaled="1"/>
-            <a:tileRect/>
-          </a:gradFill>
-          <a:ln>
-            <a:noFill/>
-          </a:ln>
-        </p:spPr>
-        <p:style>
-          <a:lnRef idx="0">
-            <a:scrgbClr r="0" g="0" b="0"/>
-          </a:lnRef>
-          <a:fillRef idx="0">
-            <a:scrgbClr r="0" g="0" b="0"/>
-          </a:fillRef>
-          <a:effectRef idx="0">
-            <a:scrgbClr r="0" g="0" b="0"/>
-          </a:effectRef>
-          <a:fontRef idx="minor">
-            <a:schemeClr val="lt1"/>
-          </a:fontRef>
-        </p:style>
-        <p:txBody>
-          <a:bodyPr rtlCol="0" anchor="ctr"/>
-          <a:lstStyle/>
-          <a:p>
-            <a:pPr algn="ctr"/>
-            <a:r>
-              <a:rPr lang="pt-BR" dirty="0"/>
-              <a:t> </a:t>
-            </a:r>
-          </a:p>
-        </p:txBody>
-      </p:sp>
-      <p:sp>
-        <p:nvSpPr>
-          <p:cNvPr id="75" name="Forma Livre: Forma 74">
-            <a:extLst>
-              <a:ext uri="{FF2B5EF4-FFF2-40B4-BE49-F238E27FC236}">
-                <a16:creationId xmlns:a16="http://schemas.microsoft.com/office/drawing/2014/main" id="{304DDFD2-6990-FADA-3D21-ABC3E159D0A5}"/>
-              </a:ext>
-            </a:extLst>
-          </p:cNvPr>
-          <p:cNvSpPr/>
-          <p:nvPr/>
-        </p:nvSpPr>
-        <p:spPr>
-          <a:xfrm>
-            <a:off x="-1688907" y="-1204875"/>
-            <a:ext cx="20745591" cy="12235730"/>
-          </a:xfrm>
-          <a:custGeom>
-            <a:avLst/>
-            <a:gdLst>
-              <a:gd name="csX0" fmla="*/ 7433614 w 20745591"/>
-              <a:gd name="csY0" fmla="*/ 0 h 12235730"/>
-              <a:gd name="csX1" fmla="*/ 20005643 w 20745591"/>
-              <a:gd name="csY1" fmla="*/ 0 h 12235730"/>
-              <a:gd name="csX2" fmla="*/ 20445607 w 20745591"/>
-              <a:gd name="csY2" fmla="*/ 439963 h 12235730"/>
-              <a:gd name="csX3" fmla="*/ 20445607 w 20745591"/>
-              <a:gd name="csY3" fmla="*/ 1014678 h 12235730"/>
-              <a:gd name="csX4" fmla="*/ 20476139 w 20745591"/>
-              <a:gd name="csY4" fmla="*/ 1017757 h 12235730"/>
-              <a:gd name="csX5" fmla="*/ 20734203 w 20745591"/>
-              <a:gd name="csY5" fmla="*/ 1240166 h 12235730"/>
-              <a:gd name="csX6" fmla="*/ 20745591 w 20745591"/>
-              <a:gd name="csY6" fmla="*/ 1304700 h 12235730"/>
-              <a:gd name="csX7" fmla="*/ 7763393 w 20745591"/>
-              <a:gd name="csY7" fmla="*/ 1304700 h 12235730"/>
-              <a:gd name="csX8" fmla="*/ 7561295 w 20745591"/>
-              <a:gd name="csY8" fmla="*/ 1506798 h 12235730"/>
-              <a:gd name="csX9" fmla="*/ 7561295 w 20745591"/>
-              <a:gd name="csY9" fmla="*/ 1952773 h 12235730"/>
-              <a:gd name="csX10" fmla="*/ 7554839 w 20745591"/>
-              <a:gd name="csY10" fmla="*/ 2016809 h 12235730"/>
-              <a:gd name="csX11" fmla="*/ 7212163 w 20745591"/>
-              <a:gd name="csY11" fmla="*/ 2296098 h 12235730"/>
-              <a:gd name="csX12" fmla="*/ 7112004 w 20745591"/>
-              <a:gd name="csY12" fmla="*/ 2296098 h 12235730"/>
-              <a:gd name="csX13" fmla="*/ 2747714 w 20745591"/>
-              <a:gd name="csY13" fmla="*/ 2296098 h 12235730"/>
-              <a:gd name="csX14" fmla="*/ 2747715 w 20745591"/>
-              <a:gd name="csY14" fmla="*/ 2296099 h 12235730"/>
-              <a:gd name="csX15" fmla="*/ 2198812 w 20745591"/>
-              <a:gd name="csY15" fmla="*/ 2296099 h 12235730"/>
-              <a:gd name="csX16" fmla="*/ 1756234 w 20745591"/>
-              <a:gd name="csY16" fmla="*/ 2738677 h 12235730"/>
-              <a:gd name="csX17" fmla="*/ 1756234 w 20745591"/>
-              <a:gd name="csY17" fmla="*/ 11909268 h 12235730"/>
-              <a:gd name="csX18" fmla="*/ 1885862 w 20745591"/>
-              <a:gd name="csY18" fmla="*/ 12222218 h 12235730"/>
-              <a:gd name="csX19" fmla="*/ 1902239 w 20745591"/>
-              <a:gd name="csY19" fmla="*/ 12235730 h 12235730"/>
-              <a:gd name="csX20" fmla="*/ 750402 w 20745591"/>
-              <a:gd name="csY20" fmla="*/ 12235730 h 12235730"/>
-              <a:gd name="csX21" fmla="*/ 0 w 20745591"/>
-              <a:gd name="csY21" fmla="*/ 11485328 h 12235730"/>
-              <a:gd name="csX22" fmla="*/ 0 w 20745591"/>
-              <a:gd name="csY22" fmla="*/ 2395311 h 12235730"/>
-              <a:gd name="csX23" fmla="*/ 15246 w 20745591"/>
-              <a:gd name="csY23" fmla="*/ 2244079 h 12235730"/>
-              <a:gd name="csX24" fmla="*/ 51615 w 20745591"/>
-              <a:gd name="csY24" fmla="*/ 2126917 h 12235730"/>
-              <a:gd name="csX25" fmla="*/ 27488 w 20745591"/>
-              <a:gd name="csY25" fmla="*/ 2082467 h 12235730"/>
-              <a:gd name="csX26" fmla="*/ 0 w 20745591"/>
-              <a:gd name="csY26" fmla="*/ 1946315 h 12235730"/>
-              <a:gd name="csX27" fmla="*/ 0 w 20745591"/>
-              <a:gd name="csY27" fmla="*/ 1360433 h 12235730"/>
-              <a:gd name="csX28" fmla="*/ 349783 w 20745591"/>
-              <a:gd name="csY28" fmla="*/ 1010650 h 12235730"/>
-              <a:gd name="csX29" fmla="*/ 349784 w 20745591"/>
-              <a:gd name="csY29" fmla="*/ 1010650 h 12235730"/>
-              <a:gd name="csX30" fmla="*/ 6993649 w 20745591"/>
-              <a:gd name="csY30" fmla="*/ 1010650 h 12235730"/>
-              <a:gd name="csX31" fmla="*/ 6993649 w 20745591"/>
-              <a:gd name="csY31" fmla="*/ 439963 h 12235730"/>
-              <a:gd name="csX32" fmla="*/ 7433614 w 20745591"/>
-              <a:gd name="csY32" fmla="*/ 0 h 12235730"/>
-            </a:gdLst>
-            <a:ahLst/>
-            <a:cxnLst>
-              <a:cxn ang="0">
-                <a:pos x="csX0" y="csY0"/>
-              </a:cxn>
-              <a:cxn ang="0">
-                <a:pos x="csX1" y="csY1"/>
-              </a:cxn>
-              <a:cxn ang="0">
-                <a:pos x="csX2" y="csY2"/>
-              </a:cxn>
-              <a:cxn ang="0">
-                <a:pos x="csX3" y="csY3"/>
-              </a:cxn>
-              <a:cxn ang="0">
-                <a:pos x="csX4" y="csY4"/>
-              </a:cxn>
-              <a:cxn ang="0">
-                <a:pos x="csX5" y="csY5"/>
-              </a:cxn>
-              <a:cxn ang="0">
-                <a:pos x="csX6" y="csY6"/>
-              </a:cxn>
-              <a:cxn ang="0">
-                <a:pos x="csX7" y="csY7"/>
-              </a:cxn>
-              <a:cxn ang="0">
-                <a:pos x="csX8" y="csY8"/>
-              </a:cxn>
-              <a:cxn ang="0">
-                <a:pos x="csX9" y="csY9"/>
-              </a:cxn>
-              <a:cxn ang="0">
-                <a:pos x="csX10" y="csY10"/>
-              </a:cxn>
-              <a:cxn ang="0">
-                <a:pos x="csX11" y="csY11"/>
-              </a:cxn>
-              <a:cxn ang="0">
-                <a:pos x="csX12" y="csY12"/>
-              </a:cxn>
-              <a:cxn ang="0">
-                <a:pos x="csX13" y="csY13"/>
-              </a:cxn>
-              <a:cxn ang="0">
-                <a:pos x="csX14" y="csY14"/>
-              </a:cxn>
-              <a:cxn ang="0">
-                <a:pos x="csX15" y="csY15"/>
-              </a:cxn>
-              <a:cxn ang="0">
-                <a:pos x="csX16" y="csY16"/>
-              </a:cxn>
-              <a:cxn ang="0">
-                <a:pos x="csX17" y="csY17"/>
-              </a:cxn>
-              <a:cxn ang="0">
-                <a:pos x="csX18" y="csY18"/>
-              </a:cxn>
-              <a:cxn ang="0">
-                <a:pos x="csX19" y="csY19"/>
-              </a:cxn>
-              <a:cxn ang="0">
-                <a:pos x="csX20" y="csY20"/>
-              </a:cxn>
-              <a:cxn ang="0">
-                <a:pos x="csX21" y="csY21"/>
-              </a:cxn>
-              <a:cxn ang="0">
-                <a:pos x="csX22" y="csY22"/>
-              </a:cxn>
-              <a:cxn ang="0">
-                <a:pos x="csX23" y="csY23"/>
-              </a:cxn>
-              <a:cxn ang="0">
-                <a:pos x="csX24" y="csY24"/>
-              </a:cxn>
-              <a:cxn ang="0">
-                <a:pos x="csX25" y="csY25"/>
-              </a:cxn>
-              <a:cxn ang="0">
-                <a:pos x="csX26" y="csY26"/>
-              </a:cxn>
-              <a:cxn ang="0">
-                <a:pos x="csX27" y="csY27"/>
-              </a:cxn>
-              <a:cxn ang="0">
-                <a:pos x="csX28" y="csY28"/>
-              </a:cxn>
-              <a:cxn ang="0">
-                <a:pos x="csX29" y="csY29"/>
-              </a:cxn>
-              <a:cxn ang="0">
-                <a:pos x="csX30" y="csY30"/>
-              </a:cxn>
-              <a:cxn ang="0">
-                <a:pos x="csX31" y="csY31"/>
-              </a:cxn>
-              <a:cxn ang="0">
-                <a:pos x="csX32" y="csY32"/>
-              </a:cxn>
-            </a:cxnLst>
-            <a:rect l="l" t="t" r="r" b="b"/>
-            <a:pathLst>
-              <a:path w="20745591" h="12235730">
-                <a:moveTo>
-                  <a:pt x="7433614" y="0"/>
-                </a:moveTo>
-                <a:lnTo>
-                  <a:pt x="20005643" y="0"/>
-                </a:lnTo>
-                <a:cubicBezTo>
-                  <a:pt x="20248627" y="0"/>
-                  <a:pt x="20445607" y="196978"/>
-                  <a:pt x="20445607" y="439963"/>
-                </a:cubicBezTo>
-                <a:lnTo>
-                  <a:pt x="20445607" y="1014678"/>
-                </a:lnTo>
-                <a:lnTo>
-                  <a:pt x="20476139" y="1017757"/>
-                </a:lnTo>
-                <a:cubicBezTo>
-                  <a:pt x="20595683" y="1042218"/>
-                  <a:pt x="20693011" y="1127663"/>
-                  <a:pt x="20734203" y="1240166"/>
-                </a:cubicBezTo>
-                <a:lnTo>
-                  <a:pt x="20745591" y="1304700"/>
-                </a:lnTo>
-                <a:lnTo>
-                  <a:pt x="7763393" y="1304700"/>
-                </a:lnTo>
-                <a:cubicBezTo>
-                  <a:pt x="7651776" y="1304700"/>
-                  <a:pt x="7561295" y="1395182"/>
-                  <a:pt x="7561295" y="1506798"/>
-                </a:cubicBezTo>
-                <a:lnTo>
-                  <a:pt x="7561295" y="1952773"/>
-                </a:lnTo>
-                <a:lnTo>
-                  <a:pt x="7554839" y="2016809"/>
-                </a:lnTo>
-                <a:cubicBezTo>
-                  <a:pt x="7522224" y="2176199"/>
-                  <a:pt x="7381196" y="2296098"/>
-                  <a:pt x="7212163" y="2296098"/>
-                </a:cubicBezTo>
-                <a:lnTo>
-                  <a:pt x="7112004" y="2296098"/>
-                </a:lnTo>
-                <a:lnTo>
-                  <a:pt x="2747714" y="2296098"/>
-                </a:lnTo>
-                <a:lnTo>
-                  <a:pt x="2747715" y="2296099"/>
-                </a:lnTo>
-                <a:lnTo>
-                  <a:pt x="2198812" y="2296099"/>
-                </a:lnTo>
-                <a:cubicBezTo>
-                  <a:pt x="1954383" y="2296099"/>
-                  <a:pt x="1756234" y="2494248"/>
-                  <a:pt x="1756234" y="2738677"/>
-                </a:cubicBezTo>
-                <a:lnTo>
-                  <a:pt x="1756234" y="11909268"/>
-                </a:lnTo>
-                <a:cubicBezTo>
-                  <a:pt x="1756234" y="12031483"/>
-                  <a:pt x="1805772" y="12142127"/>
-                  <a:pt x="1885862" y="12222218"/>
-                </a:cubicBezTo>
-                <a:lnTo>
-                  <a:pt x="1902239" y="12235730"/>
-                </a:lnTo>
-                <a:lnTo>
-                  <a:pt x="750402" y="12235730"/>
-                </a:lnTo>
-                <a:cubicBezTo>
-                  <a:pt x="335966" y="12235730"/>
-                  <a:pt x="0" y="11899764"/>
-                  <a:pt x="0" y="11485328"/>
-                </a:cubicBezTo>
-                <a:lnTo>
-                  <a:pt x="0" y="2395311"/>
-                </a:lnTo>
-                <a:cubicBezTo>
-                  <a:pt x="0" y="2343507"/>
-                  <a:pt x="5250" y="2292928"/>
-                  <a:pt x="15246" y="2244079"/>
-                </a:cubicBezTo>
-                <a:lnTo>
-                  <a:pt x="51615" y="2126917"/>
-                </a:lnTo>
-                <a:lnTo>
-                  <a:pt x="27488" y="2082467"/>
-                </a:lnTo>
-                <a:cubicBezTo>
-                  <a:pt x="9789" y="2040619"/>
-                  <a:pt x="0" y="1994610"/>
-                  <a:pt x="0" y="1946315"/>
-                </a:cubicBezTo>
-                <a:lnTo>
-                  <a:pt x="0" y="1360433"/>
-                </a:lnTo>
-                <a:cubicBezTo>
-                  <a:pt x="0" y="1167253"/>
-                  <a:pt x="156603" y="1010650"/>
-                  <a:pt x="349783" y="1010650"/>
-                </a:cubicBezTo>
-                <a:lnTo>
-                  <a:pt x="349784" y="1010650"/>
-                </a:lnTo>
-                <a:lnTo>
-                  <a:pt x="6993649" y="1010650"/>
-                </a:lnTo>
-                <a:lnTo>
-                  <a:pt x="6993649" y="439963"/>
-                </a:lnTo>
-                <a:cubicBezTo>
-                  <a:pt x="6993649" y="196978"/>
-                  <a:pt x="7190628" y="0"/>
-                  <a:pt x="7433614" y="0"/>
-                </a:cubicBezTo>
-                <a:close/>
-              </a:path>
-            </a:pathLst>
-          </a:custGeom>
-          <a:gradFill flip="none" rotWithShape="1">
-            <a:gsLst>
-              <a:gs pos="0">
-                <a:schemeClr val="accent1">
-                  <a:lumMod val="67000"/>
-                </a:schemeClr>
-              </a:gs>
-              <a:gs pos="48000">
-                <a:schemeClr val="accent1">
-                  <a:lumMod val="97000"/>
-                  <a:lumOff val="3000"/>
-                </a:schemeClr>
-              </a:gs>
-              <a:gs pos="100000">
-                <a:schemeClr val="accent1">
-                  <a:lumMod val="60000"/>
-                  <a:lumOff val="40000"/>
-                </a:schemeClr>
-              </a:gs>
-            </a:gsLst>
-            <a:lin ang="16200000" scaled="1"/>
-            <a:tileRect/>
-          </a:gradFill>
-          <a:ln>
-            <a:noFill/>
-          </a:ln>
-        </p:spPr>
-        <p:style>
-          <a:lnRef idx="0">
-            <a:scrgbClr r="0" g="0" b="0"/>
-          </a:lnRef>
-          <a:fillRef idx="0">
-            <a:scrgbClr r="0" g="0" b="0"/>
-          </a:fillRef>
-          <a:effectRef idx="0">
-            <a:scrgbClr r="0" g="0" b="0"/>
-          </a:effectRef>
-          <a:fontRef idx="minor">
-            <a:schemeClr val="lt1"/>
-          </a:fontRef>
-        </p:style>
-        <p:txBody>
-          <a:bodyPr wrap="square" rtlCol="0" anchor="ctr">
-            <a:noAutofit/>
-          </a:bodyPr>
-          <a:lstStyle/>
-          <a:p>
-            <a:pPr algn="ctr"/>
-            <a:endParaRPr lang="pt-BR" dirty="0"/>
-          </a:p>
-        </p:txBody>
-      </p:sp>
-      <p:sp>
-        <p:nvSpPr>
-          <p:cNvPr id="26" name="Retângulo 25">
-            <a:extLst>
-              <a:ext uri="{FF2B5EF4-FFF2-40B4-BE49-F238E27FC236}">
-                <a16:creationId xmlns:a16="http://schemas.microsoft.com/office/drawing/2014/main" id="{E3F63FFE-1804-D7BF-8EC8-0403B865DADA}"/>
-              </a:ext>
-            </a:extLst>
-          </p:cNvPr>
-          <p:cNvSpPr/>
-          <p:nvPr/>
-        </p:nvSpPr>
-        <p:spPr>
-          <a:xfrm>
-            <a:off x="72570" y="72570"/>
-            <a:ext cx="4889500" cy="769441"/>
-          </a:xfrm>
-          <a:prstGeom prst="rect">
-            <a:avLst/>
-          </a:prstGeom>
-          <a:noFill/>
-        </p:spPr>
-        <p:txBody>
-          <a:bodyPr wrap="square" lIns="91440" tIns="45720" rIns="91440" bIns="45720">
-            <a:spAutoFit/>
-          </a:bodyPr>
-          <a:lstStyle/>
-          <a:p>
-            <a:r>
-              <a:rPr lang="pt-BR" sz="4400" b="1" cap="none" spc="50" dirty="0">
-                <a:ln w="0"/>
-                <a:solidFill>
-                  <a:schemeClr val="bg1"/>
-                </a:solidFill>
-                <a:effectLst>
-                  <a:innerShdw blurRad="63500" dist="50800" dir="13500000">
-                    <a:srgbClr val="000000">
-                      <a:alpha val="50000"/>
-                    </a:srgbClr>
-                  </a:innerShdw>
-                </a:effectLst>
-                <a:latin typeface="Calibri" panose="020F0502020204030204" pitchFamily="34" charset="0"/>
-                <a:ea typeface="Calibri" panose="020F0502020204030204" pitchFamily="34" charset="0"/>
-                <a:cs typeface="Calibri" panose="020F0502020204030204" pitchFamily="34" charset="0"/>
-              </a:rPr>
-              <a:t>Resumo Executivo</a:t>
-            </a:r>
-          </a:p>
-        </p:txBody>
-      </p:sp>
-      <p:sp>
-        <p:nvSpPr>
           <p:cNvPr id="3" name="Retângulo: Cantos Arredondados 2">
             <a:extLst>
               <a:ext uri="{FF2B5EF4-FFF2-40B4-BE49-F238E27FC236}">
@@ -3663,7 +3569,7 @@
         <p:spPr>
           <a:xfrm>
             <a:off x="4556761" y="1315453"/>
-            <a:ext cx="9127156" cy="5069305"/>
+            <a:ext cx="8587739" cy="5069305"/>
           </a:xfrm>
           <a:prstGeom prst="roundRect">
             <a:avLst>
@@ -3677,9 +3583,9 @@
             <a:noFill/>
           </a:ln>
           <a:effectLst>
-            <a:outerShdw blurRad="63500" sx="101000" sy="101000" algn="ctr" rotWithShape="0">
+            <a:outerShdw blurRad="63500" dist="88900" dir="2820000" algn="ctr" rotWithShape="0">
               <a:prstClr val="black">
-                <a:alpha val="18000"/>
+                <a:alpha val="20000"/>
               </a:prstClr>
             </a:outerShdw>
           </a:effectLst>
@@ -3738,9 +3644,9 @@
             <a:noFill/>
           </a:ln>
           <a:effectLst>
-            <a:outerShdw blurRad="63500" sx="101000" sy="101000" algn="ctr" rotWithShape="0">
+            <a:outerShdw blurRad="63500" dist="88900" dir="2820000" algn="ctr" rotWithShape="0">
               <a:prstClr val="black">
-                <a:alpha val="18000"/>
+                <a:alpha val="20000"/>
               </a:prstClr>
             </a:outerShdw>
           </a:effectLst>
@@ -3784,8 +3690,8 @@
         </p:nvSpPr>
         <p:spPr>
           <a:xfrm>
-            <a:off x="13924546" y="1315453"/>
-            <a:ext cx="3962399" cy="5069305"/>
+            <a:off x="13388246" y="1315453"/>
+            <a:ext cx="4498699" cy="5069305"/>
           </a:xfrm>
           <a:prstGeom prst="roundRect">
             <a:avLst>
@@ -3799,9 +3705,9 @@
             <a:noFill/>
           </a:ln>
           <a:effectLst>
-            <a:outerShdw blurRad="63500" sx="101000" sy="101000" algn="ctr" rotWithShape="0">
+            <a:outerShdw blurRad="63500" dist="88900" dir="2820000" algn="ctr" rotWithShape="0">
               <a:prstClr val="black">
-                <a:alpha val="18000"/>
+                <a:alpha val="20000"/>
               </a:prstClr>
             </a:outerShdw>
           </a:effectLst>
@@ -3845,8 +3751,8 @@
         </p:nvSpPr>
         <p:spPr>
           <a:xfrm>
-            <a:off x="350619" y="1329212"/>
-            <a:ext cx="3962399" cy="5069305"/>
+            <a:off x="350615" y="1377386"/>
+            <a:ext cx="3962399" cy="1523267"/>
           </a:xfrm>
           <a:prstGeom prst="roundRect">
             <a:avLst>
@@ -3860,9 +3766,469 @@
             <a:noFill/>
           </a:ln>
           <a:effectLst>
-            <a:outerShdw blurRad="63500" sx="101000" sy="101000" algn="ctr" rotWithShape="0">
+            <a:outerShdw blurRad="63500" dist="88900" dir="2820000" algn="ctr" rotWithShape="0">
               <a:prstClr val="black">
-                <a:alpha val="18000"/>
+                <a:alpha val="20000"/>
+              </a:prstClr>
+            </a:outerShdw>
+          </a:effectLst>
+        </p:spPr>
+        <p:style>
+          <a:lnRef idx="2">
+            <a:schemeClr val="accent1">
+              <a:shade val="15000"/>
+            </a:schemeClr>
+          </a:lnRef>
+          <a:fillRef idx="1">
+            <a:schemeClr val="accent1"/>
+          </a:fillRef>
+          <a:effectRef idx="0">
+            <a:schemeClr val="accent1"/>
+          </a:effectRef>
+          <a:fontRef idx="minor">
+            <a:schemeClr val="lt1"/>
+          </a:fontRef>
+        </p:style>
+        <p:txBody>
+          <a:bodyPr rtlCol="0" anchor="ctr"/>
+          <a:lstStyle/>
+          <a:p>
+            <a:pPr algn="ctr"/>
+            <a:endParaRPr lang="pt-BR"/>
+          </a:p>
+        </p:txBody>
+      </p:sp>
+      <p:grpSp>
+        <p:nvGrpSpPr>
+          <p:cNvPr id="14" name="Agrupar 13">
+            <a:extLst>
+              <a:ext uri="{FF2B5EF4-FFF2-40B4-BE49-F238E27FC236}">
+                <a16:creationId xmlns:a16="http://schemas.microsoft.com/office/drawing/2014/main" id="{BD9CC499-AE4B-6B1B-C793-E0F1445793A2}"/>
+              </a:ext>
+            </a:extLst>
+          </p:cNvPr>
+          <p:cNvGrpSpPr/>
+          <p:nvPr/>
+        </p:nvGrpSpPr>
+        <p:grpSpPr>
+          <a:xfrm>
+            <a:off x="0" y="5293"/>
+            <a:ext cx="18103850" cy="1188508"/>
+            <a:chOff x="0" y="5293"/>
+            <a:chExt cx="18103850" cy="1188508"/>
+          </a:xfrm>
+        </p:grpSpPr>
+        <p:sp>
+          <p:nvSpPr>
+            <p:cNvPr id="13" name="Retângulo 12">
+              <a:extLst>
+                <a:ext uri="{FF2B5EF4-FFF2-40B4-BE49-F238E27FC236}">
+                  <a16:creationId xmlns:a16="http://schemas.microsoft.com/office/drawing/2014/main" id="{8D7E6951-012E-140E-CEB9-083D3FD8E9D9}"/>
+                </a:ext>
+              </a:extLst>
+            </p:cNvPr>
+            <p:cNvSpPr/>
+            <p:nvPr/>
+          </p:nvSpPr>
+          <p:spPr>
+            <a:xfrm>
+              <a:off x="6099145" y="1033463"/>
+              <a:ext cx="233395" cy="126999"/>
+            </a:xfrm>
+            <a:custGeom>
+              <a:avLst/>
+              <a:gdLst>
+                <a:gd name="csX0" fmla="*/ 0 w 233395"/>
+                <a:gd name="csY0" fmla="*/ 0 h 126999"/>
+                <a:gd name="csX1" fmla="*/ 233395 w 233395"/>
+                <a:gd name="csY1" fmla="*/ 0 h 126999"/>
+                <a:gd name="csX2" fmla="*/ 104808 w 233395"/>
+                <a:gd name="csY2" fmla="*/ 69849 h 126999"/>
+                <a:gd name="csX3" fmla="*/ 0 w 233395"/>
+                <a:gd name="csY3" fmla="*/ 126999 h 126999"/>
+                <a:gd name="csX4" fmla="*/ 0 w 233395"/>
+                <a:gd name="csY4" fmla="*/ 0 h 126999"/>
+              </a:gdLst>
+              <a:ahLst/>
+              <a:cxnLst>
+                <a:cxn ang="0">
+                  <a:pos x="csX0" y="csY0"/>
+                </a:cxn>
+                <a:cxn ang="0">
+                  <a:pos x="csX1" y="csY1"/>
+                </a:cxn>
+                <a:cxn ang="0">
+                  <a:pos x="csX2" y="csY2"/>
+                </a:cxn>
+                <a:cxn ang="0">
+                  <a:pos x="csX3" y="csY3"/>
+                </a:cxn>
+                <a:cxn ang="0">
+                  <a:pos x="csX4" y="csY4"/>
+                </a:cxn>
+              </a:cxnLst>
+              <a:rect l="l" t="t" r="r" b="b"/>
+              <a:pathLst>
+                <a:path w="233395" h="126999">
+                  <a:moveTo>
+                    <a:pt x="0" y="0"/>
+                  </a:moveTo>
+                  <a:lnTo>
+                    <a:pt x="233395" y="0"/>
+                  </a:lnTo>
+                  <a:lnTo>
+                    <a:pt x="104808" y="69849"/>
+                  </a:lnTo>
+                  <a:lnTo>
+                    <a:pt x="0" y="126999"/>
+                  </a:lnTo>
+                  <a:lnTo>
+                    <a:pt x="0" y="0"/>
+                  </a:lnTo>
+                  <a:close/>
+                </a:path>
+              </a:pathLst>
+            </a:custGeom>
+            <a:solidFill>
+              <a:schemeClr val="accent4">
+                <a:lumMod val="75000"/>
+              </a:schemeClr>
+            </a:solidFill>
+            <a:ln>
+              <a:noFill/>
+            </a:ln>
+          </p:spPr>
+          <p:style>
+            <a:lnRef idx="2">
+              <a:schemeClr val="accent1">
+                <a:shade val="15000"/>
+              </a:schemeClr>
+            </a:lnRef>
+            <a:fillRef idx="1">
+              <a:schemeClr val="accent1"/>
+            </a:fillRef>
+            <a:effectRef idx="0">
+              <a:schemeClr val="accent1"/>
+            </a:effectRef>
+            <a:fontRef idx="minor">
+              <a:schemeClr val="lt1"/>
+            </a:fontRef>
+          </p:style>
+          <p:txBody>
+            <a:bodyPr rtlCol="0" anchor="ctr"/>
+            <a:lstStyle/>
+            <a:p>
+              <a:pPr algn="ctr"/>
+              <a:endParaRPr lang="pt-BR" dirty="0"/>
+            </a:p>
+          </p:txBody>
+        </p:sp>
+        <p:sp>
+          <p:nvSpPr>
+            <p:cNvPr id="11" name="Retângulo 10">
+              <a:extLst>
+                <a:ext uri="{FF2B5EF4-FFF2-40B4-BE49-F238E27FC236}">
+                  <a16:creationId xmlns:a16="http://schemas.microsoft.com/office/drawing/2014/main" id="{7AAFB90D-7F3C-CD1F-9143-5139A53DDCE2}"/>
+                </a:ext>
+              </a:extLst>
+            </p:cNvPr>
+            <p:cNvSpPr/>
+            <p:nvPr/>
+          </p:nvSpPr>
+          <p:spPr>
+            <a:xfrm>
+              <a:off x="6092793" y="5293"/>
+              <a:ext cx="12011057" cy="1048378"/>
+            </a:xfrm>
+            <a:prstGeom prst="rect">
+              <a:avLst/>
+            </a:prstGeom>
+            <a:solidFill>
+              <a:schemeClr val="accent1">
+                <a:lumMod val="60000"/>
+                <a:lumOff val="40000"/>
+              </a:schemeClr>
+            </a:solidFill>
+            <a:ln>
+              <a:noFill/>
+            </a:ln>
+          </p:spPr>
+          <p:style>
+            <a:lnRef idx="2">
+              <a:schemeClr val="accent1">
+                <a:shade val="15000"/>
+              </a:schemeClr>
+            </a:lnRef>
+            <a:fillRef idx="1">
+              <a:schemeClr val="accent1"/>
+            </a:fillRef>
+            <a:effectRef idx="0">
+              <a:schemeClr val="accent1"/>
+            </a:effectRef>
+            <a:fontRef idx="minor">
+              <a:schemeClr val="lt1"/>
+            </a:fontRef>
+          </p:style>
+          <p:txBody>
+            <a:bodyPr rtlCol="0" anchor="ctr"/>
+            <a:lstStyle/>
+            <a:p>
+              <a:pPr algn="ctr"/>
+              <a:endParaRPr lang="pt-BR"/>
+            </a:p>
+          </p:txBody>
+        </p:sp>
+        <p:sp>
+          <p:nvSpPr>
+            <p:cNvPr id="6" name="Retângulo 5">
+              <a:extLst>
+                <a:ext uri="{FF2B5EF4-FFF2-40B4-BE49-F238E27FC236}">
+                  <a16:creationId xmlns:a16="http://schemas.microsoft.com/office/drawing/2014/main" id="{7589B568-7B70-492E-3E14-191EC8EB5EEF}"/>
+                </a:ext>
+              </a:extLst>
+            </p:cNvPr>
+            <p:cNvSpPr/>
+            <p:nvPr/>
+          </p:nvSpPr>
+          <p:spPr>
+            <a:xfrm>
+              <a:off x="0" y="5293"/>
+              <a:ext cx="7414358" cy="1188508"/>
+            </a:xfrm>
+            <a:custGeom>
+              <a:avLst/>
+              <a:gdLst>
+                <a:gd name="csX0" fmla="*/ 0 w 6202680"/>
+                <a:gd name="csY0" fmla="*/ 0 h 1075896"/>
+                <a:gd name="csX1" fmla="*/ 6202680 w 6202680"/>
+                <a:gd name="csY1" fmla="*/ 0 h 1075896"/>
+                <a:gd name="csX2" fmla="*/ 5105400 w 6202680"/>
+                <a:gd name="csY2" fmla="*/ 1045416 h 1075896"/>
+                <a:gd name="csX3" fmla="*/ 0 w 6202680"/>
+                <a:gd name="csY3" fmla="*/ 1075896 h 1075896"/>
+                <a:gd name="csX4" fmla="*/ 0 w 6202680"/>
+                <a:gd name="csY4" fmla="*/ 0 h 1075896"/>
+              </a:gdLst>
+              <a:ahLst/>
+              <a:cxnLst>
+                <a:cxn ang="0">
+                  <a:pos x="csX0" y="csY0"/>
+                </a:cxn>
+                <a:cxn ang="0">
+                  <a:pos x="csX1" y="csY1"/>
+                </a:cxn>
+                <a:cxn ang="0">
+                  <a:pos x="csX2" y="csY2"/>
+                </a:cxn>
+                <a:cxn ang="0">
+                  <a:pos x="csX3" y="csY3"/>
+                </a:cxn>
+                <a:cxn ang="0">
+                  <a:pos x="csX4" y="csY4"/>
+                </a:cxn>
+              </a:cxnLst>
+              <a:rect l="l" t="t" r="r" b="b"/>
+              <a:pathLst>
+                <a:path w="6202680" h="1075896">
+                  <a:moveTo>
+                    <a:pt x="0" y="0"/>
+                  </a:moveTo>
+                  <a:lnTo>
+                    <a:pt x="6202680" y="0"/>
+                  </a:lnTo>
+                  <a:cubicBezTo>
+                    <a:pt x="5836920" y="348472"/>
+                    <a:pt x="5156200" y="102584"/>
+                    <a:pt x="5105400" y="1045416"/>
+                  </a:cubicBezTo>
+                  <a:lnTo>
+                    <a:pt x="0" y="1075896"/>
+                  </a:lnTo>
+                  <a:lnTo>
+                    <a:pt x="0" y="0"/>
+                  </a:lnTo>
+                  <a:close/>
+                </a:path>
+              </a:pathLst>
+            </a:custGeom>
+            <a:solidFill>
+              <a:schemeClr val="accent1">
+                <a:lumMod val="75000"/>
+              </a:schemeClr>
+            </a:solidFill>
+            <a:ln>
+              <a:noFill/>
+            </a:ln>
+          </p:spPr>
+          <p:style>
+            <a:lnRef idx="2">
+              <a:schemeClr val="accent1">
+                <a:shade val="15000"/>
+              </a:schemeClr>
+            </a:lnRef>
+            <a:fillRef idx="1">
+              <a:schemeClr val="accent1"/>
+            </a:fillRef>
+            <a:effectRef idx="0">
+              <a:schemeClr val="accent1"/>
+            </a:effectRef>
+            <a:fontRef idx="minor">
+              <a:schemeClr val="lt1"/>
+            </a:fontRef>
+          </p:style>
+          <p:txBody>
+            <a:bodyPr rtlCol="0" anchor="ctr"/>
+            <a:lstStyle/>
+            <a:p>
+              <a:pPr algn="ctr"/>
+              <a:endParaRPr lang="pt-BR"/>
+            </a:p>
+          </p:txBody>
+        </p:sp>
+      </p:grpSp>
+      <p:sp>
+        <p:nvSpPr>
+          <p:cNvPr id="26" name="Retângulo 25">
+            <a:extLst>
+              <a:ext uri="{FF2B5EF4-FFF2-40B4-BE49-F238E27FC236}">
+                <a16:creationId xmlns:a16="http://schemas.microsoft.com/office/drawing/2014/main" id="{E3F63FFE-1804-D7BF-8EC8-0403B865DADA}"/>
+              </a:ext>
+            </a:extLst>
+          </p:cNvPr>
+          <p:cNvSpPr/>
+          <p:nvPr/>
+        </p:nvSpPr>
+        <p:spPr>
+          <a:xfrm>
+            <a:off x="350619" y="139468"/>
+            <a:ext cx="4889500" cy="769441"/>
+          </a:xfrm>
+          <a:prstGeom prst="rect">
+            <a:avLst/>
+          </a:prstGeom>
+          <a:noFill/>
+        </p:spPr>
+        <p:txBody>
+          <a:bodyPr wrap="square" lIns="91440" tIns="45720" rIns="91440" bIns="45720">
+            <a:spAutoFit/>
+          </a:bodyPr>
+          <a:lstStyle/>
+          <a:p>
+            <a:r>
+              <a:rPr lang="pt-BR" sz="4400" b="1" cap="none" spc="50" dirty="0">
+                <a:ln w="0"/>
+                <a:solidFill>
+                  <a:schemeClr val="bg1"/>
+                </a:solidFill>
+                <a:effectLst>
+                  <a:innerShdw blurRad="63500" dist="50800" dir="13500000">
+                    <a:srgbClr val="000000">
+                      <a:alpha val="50000"/>
+                    </a:srgbClr>
+                  </a:innerShdw>
+                </a:effectLst>
+                <a:latin typeface="Calibri" panose="020F0502020204030204" pitchFamily="34" charset="0"/>
+                <a:ea typeface="Calibri" panose="020F0502020204030204" pitchFamily="34" charset="0"/>
+                <a:cs typeface="Calibri" panose="020F0502020204030204" pitchFamily="34" charset="0"/>
+              </a:rPr>
+              <a:t>Resumo Geral</a:t>
+            </a:r>
+          </a:p>
+        </p:txBody>
+      </p:sp>
+      <p:sp>
+        <p:nvSpPr>
+          <p:cNvPr id="16" name="Retângulo: Cantos Arredondados 15">
+            <a:extLst>
+              <a:ext uri="{FF2B5EF4-FFF2-40B4-BE49-F238E27FC236}">
+                <a16:creationId xmlns:a16="http://schemas.microsoft.com/office/drawing/2014/main" id="{CA19C9A3-47EF-0AD2-7853-A627BCE48330}"/>
+              </a:ext>
+            </a:extLst>
+          </p:cNvPr>
+          <p:cNvSpPr/>
+          <p:nvPr/>
+        </p:nvSpPr>
+        <p:spPr>
+          <a:xfrm>
+            <a:off x="350615" y="3084239"/>
+            <a:ext cx="3962399" cy="1523267"/>
+          </a:xfrm>
+          <a:prstGeom prst="roundRect">
+            <a:avLst>
+              <a:gd name="adj" fmla="val 4686"/>
+            </a:avLst>
+          </a:prstGeom>
+          <a:solidFill>
+            <a:schemeClr val="bg1"/>
+          </a:solidFill>
+          <a:ln>
+            <a:noFill/>
+          </a:ln>
+          <a:effectLst>
+            <a:outerShdw blurRad="63500" dist="88900" dir="2820000" algn="ctr" rotWithShape="0">
+              <a:prstClr val="black">
+                <a:alpha val="20000"/>
+              </a:prstClr>
+            </a:outerShdw>
+          </a:effectLst>
+        </p:spPr>
+        <p:style>
+          <a:lnRef idx="2">
+            <a:schemeClr val="accent1">
+              <a:shade val="15000"/>
+            </a:schemeClr>
+          </a:lnRef>
+          <a:fillRef idx="1">
+            <a:schemeClr val="accent1"/>
+          </a:fillRef>
+          <a:effectRef idx="0">
+            <a:schemeClr val="accent1"/>
+          </a:effectRef>
+          <a:fontRef idx="minor">
+            <a:schemeClr val="lt1"/>
+          </a:fontRef>
+        </p:style>
+        <p:txBody>
+          <a:bodyPr rtlCol="0" anchor="ctr"/>
+          <a:lstStyle/>
+          <a:p>
+            <a:pPr algn="ctr"/>
+            <a:endParaRPr lang="pt-BR"/>
+          </a:p>
+        </p:txBody>
+      </p:sp>
+      <p:sp>
+        <p:nvSpPr>
+          <p:cNvPr id="18" name="Retângulo: Cantos Arredondados 17">
+            <a:extLst>
+              <a:ext uri="{FF2B5EF4-FFF2-40B4-BE49-F238E27FC236}">
+                <a16:creationId xmlns:a16="http://schemas.microsoft.com/office/drawing/2014/main" id="{EC4DC8D0-1EF9-76DF-DD53-5066E8826863}"/>
+              </a:ext>
+            </a:extLst>
+          </p:cNvPr>
+          <p:cNvSpPr/>
+          <p:nvPr/>
+        </p:nvSpPr>
+        <p:spPr>
+          <a:xfrm>
+            <a:off x="350616" y="4861958"/>
+            <a:ext cx="3962399" cy="1522800"/>
+          </a:xfrm>
+          <a:prstGeom prst="roundRect">
+            <a:avLst>
+              <a:gd name="adj" fmla="val 4686"/>
+            </a:avLst>
+          </a:prstGeom>
+          <a:solidFill>
+            <a:schemeClr val="bg1"/>
+          </a:solidFill>
+          <a:ln>
+            <a:noFill/>
+          </a:ln>
+          <a:effectLst>
+            <a:outerShdw blurRad="63500" dist="88900" dir="2820000" algn="ctr" rotWithShape="0">
+              <a:prstClr val="black">
+                <a:alpha val="20000"/>
               </a:prstClr>
             </a:outerShdw>
           </a:effectLst>
@@ -3928,450 +4294,294 @@
           <a:chExt cx="0" cy="0"/>
         </a:xfrm>
       </p:grpSpPr>
-      <p:sp>
-        <p:nvSpPr>
-          <p:cNvPr id="2" name="Retângulo: Cantos Arredondados 1">
+      <p:grpSp>
+        <p:nvGrpSpPr>
+          <p:cNvPr id="4" name="Agrupar 3">
             <a:extLst>
               <a:ext uri="{FF2B5EF4-FFF2-40B4-BE49-F238E27FC236}">
-                <a16:creationId xmlns:a16="http://schemas.microsoft.com/office/drawing/2014/main" id="{9B5B2356-5C4E-3E92-7500-11E01D85C8FC}"/>
+                <a16:creationId xmlns:a16="http://schemas.microsoft.com/office/drawing/2014/main" id="{DE18E8E2-06C0-6B3C-650E-7D7E20B6BAC2}"/>
               </a:ext>
             </a:extLst>
           </p:cNvPr>
-          <p:cNvSpPr/>
+          <p:cNvGrpSpPr/>
           <p:nvPr/>
-        </p:nvSpPr>
-        <p:spPr>
+        </p:nvGrpSpPr>
+        <p:grpSpPr>
           <a:xfrm>
-            <a:off x="5213123" y="-155486"/>
-            <a:ext cx="8875410" cy="1245141"/>
+            <a:off x="0" y="5293"/>
+            <a:ext cx="18103850" cy="1188508"/>
+            <a:chOff x="0" y="5293"/>
+            <a:chExt cx="18103850" cy="1188508"/>
           </a:xfrm>
-          <a:prstGeom prst="roundRect">
-            <a:avLst>
-              <a:gd name="adj" fmla="val 29904"/>
-            </a:avLst>
-          </a:prstGeom>
-          <a:gradFill flip="none" rotWithShape="1">
-            <a:gsLst>
-              <a:gs pos="0">
-                <a:schemeClr val="accent1">
-                  <a:lumMod val="67000"/>
-                </a:schemeClr>
-              </a:gs>
-              <a:gs pos="48000">
-                <a:schemeClr val="accent1">
-                  <a:lumMod val="97000"/>
-                  <a:lumOff val="3000"/>
-                </a:schemeClr>
-              </a:gs>
-              <a:gs pos="100000">
-                <a:schemeClr val="accent1">
-                  <a:lumMod val="60000"/>
-                  <a:lumOff val="40000"/>
-                </a:schemeClr>
-              </a:gs>
-            </a:gsLst>
-            <a:lin ang="16200000" scaled="1"/>
-            <a:tileRect/>
-          </a:gradFill>
-          <a:ln>
-            <a:noFill/>
-          </a:ln>
-        </p:spPr>
-        <p:style>
-          <a:lnRef idx="0">
-            <a:scrgbClr r="0" g="0" b="0"/>
-          </a:lnRef>
-          <a:fillRef idx="0">
-            <a:scrgbClr r="0" g="0" b="0"/>
-          </a:fillRef>
-          <a:effectRef idx="0">
-            <a:scrgbClr r="0" g="0" b="0"/>
-          </a:effectRef>
-          <a:fontRef idx="minor">
-            <a:schemeClr val="lt1"/>
-          </a:fontRef>
-        </p:style>
-        <p:txBody>
-          <a:bodyPr rtlCol="0" anchor="ctr"/>
-          <a:lstStyle/>
-          <a:p>
-            <a:pPr algn="ctr"/>
-            <a:r>
-              <a:rPr lang="pt-BR" dirty="0"/>
-              <a:t> </a:t>
-            </a:r>
-          </a:p>
-        </p:txBody>
-      </p:sp>
-      <p:sp>
-        <p:nvSpPr>
-          <p:cNvPr id="75" name="Forma Livre: Forma 74">
-            <a:extLst>
-              <a:ext uri="{FF2B5EF4-FFF2-40B4-BE49-F238E27FC236}">
-                <a16:creationId xmlns:a16="http://schemas.microsoft.com/office/drawing/2014/main" id="{292C0DCC-6C67-D103-618D-603AA8238AF5}"/>
-              </a:ext>
-            </a:extLst>
-          </p:cNvPr>
-          <p:cNvSpPr/>
-          <p:nvPr/>
-        </p:nvSpPr>
-        <p:spPr>
-          <a:xfrm>
-            <a:off x="-1717767" y="-1204875"/>
-            <a:ext cx="20745591" cy="12235730"/>
-          </a:xfrm>
-          <a:custGeom>
-            <a:avLst/>
-            <a:gdLst>
-              <a:gd name="csX0" fmla="*/ 7433614 w 20745591"/>
-              <a:gd name="csY0" fmla="*/ 0 h 12235730"/>
-              <a:gd name="csX1" fmla="*/ 20005643 w 20745591"/>
-              <a:gd name="csY1" fmla="*/ 0 h 12235730"/>
-              <a:gd name="csX2" fmla="*/ 20445607 w 20745591"/>
-              <a:gd name="csY2" fmla="*/ 439963 h 12235730"/>
-              <a:gd name="csX3" fmla="*/ 20445607 w 20745591"/>
-              <a:gd name="csY3" fmla="*/ 1014678 h 12235730"/>
-              <a:gd name="csX4" fmla="*/ 20476139 w 20745591"/>
-              <a:gd name="csY4" fmla="*/ 1017757 h 12235730"/>
-              <a:gd name="csX5" fmla="*/ 20734203 w 20745591"/>
-              <a:gd name="csY5" fmla="*/ 1240166 h 12235730"/>
-              <a:gd name="csX6" fmla="*/ 20745591 w 20745591"/>
-              <a:gd name="csY6" fmla="*/ 1304700 h 12235730"/>
-              <a:gd name="csX7" fmla="*/ 7763393 w 20745591"/>
-              <a:gd name="csY7" fmla="*/ 1304700 h 12235730"/>
-              <a:gd name="csX8" fmla="*/ 7561295 w 20745591"/>
-              <a:gd name="csY8" fmla="*/ 1506798 h 12235730"/>
-              <a:gd name="csX9" fmla="*/ 7561295 w 20745591"/>
-              <a:gd name="csY9" fmla="*/ 1952773 h 12235730"/>
-              <a:gd name="csX10" fmla="*/ 7554839 w 20745591"/>
-              <a:gd name="csY10" fmla="*/ 2016809 h 12235730"/>
-              <a:gd name="csX11" fmla="*/ 7212163 w 20745591"/>
-              <a:gd name="csY11" fmla="*/ 2296098 h 12235730"/>
-              <a:gd name="csX12" fmla="*/ 7112004 w 20745591"/>
-              <a:gd name="csY12" fmla="*/ 2296098 h 12235730"/>
-              <a:gd name="csX13" fmla="*/ 2747714 w 20745591"/>
-              <a:gd name="csY13" fmla="*/ 2296098 h 12235730"/>
-              <a:gd name="csX14" fmla="*/ 2747715 w 20745591"/>
-              <a:gd name="csY14" fmla="*/ 2296099 h 12235730"/>
-              <a:gd name="csX15" fmla="*/ 2198812 w 20745591"/>
-              <a:gd name="csY15" fmla="*/ 2296099 h 12235730"/>
-              <a:gd name="csX16" fmla="*/ 1756234 w 20745591"/>
-              <a:gd name="csY16" fmla="*/ 2738677 h 12235730"/>
-              <a:gd name="csX17" fmla="*/ 1756234 w 20745591"/>
-              <a:gd name="csY17" fmla="*/ 11909268 h 12235730"/>
-              <a:gd name="csX18" fmla="*/ 1885862 w 20745591"/>
-              <a:gd name="csY18" fmla="*/ 12222218 h 12235730"/>
-              <a:gd name="csX19" fmla="*/ 1902239 w 20745591"/>
-              <a:gd name="csY19" fmla="*/ 12235730 h 12235730"/>
-              <a:gd name="csX20" fmla="*/ 750402 w 20745591"/>
-              <a:gd name="csY20" fmla="*/ 12235730 h 12235730"/>
-              <a:gd name="csX21" fmla="*/ 0 w 20745591"/>
-              <a:gd name="csY21" fmla="*/ 11485328 h 12235730"/>
-              <a:gd name="csX22" fmla="*/ 0 w 20745591"/>
-              <a:gd name="csY22" fmla="*/ 2395311 h 12235730"/>
-              <a:gd name="csX23" fmla="*/ 15246 w 20745591"/>
-              <a:gd name="csY23" fmla="*/ 2244079 h 12235730"/>
-              <a:gd name="csX24" fmla="*/ 51615 w 20745591"/>
-              <a:gd name="csY24" fmla="*/ 2126917 h 12235730"/>
-              <a:gd name="csX25" fmla="*/ 27488 w 20745591"/>
-              <a:gd name="csY25" fmla="*/ 2082467 h 12235730"/>
-              <a:gd name="csX26" fmla="*/ 0 w 20745591"/>
-              <a:gd name="csY26" fmla="*/ 1946315 h 12235730"/>
-              <a:gd name="csX27" fmla="*/ 0 w 20745591"/>
-              <a:gd name="csY27" fmla="*/ 1360433 h 12235730"/>
-              <a:gd name="csX28" fmla="*/ 349783 w 20745591"/>
-              <a:gd name="csY28" fmla="*/ 1010650 h 12235730"/>
-              <a:gd name="csX29" fmla="*/ 349784 w 20745591"/>
-              <a:gd name="csY29" fmla="*/ 1010650 h 12235730"/>
-              <a:gd name="csX30" fmla="*/ 6993649 w 20745591"/>
-              <a:gd name="csY30" fmla="*/ 1010650 h 12235730"/>
-              <a:gd name="csX31" fmla="*/ 6993649 w 20745591"/>
-              <a:gd name="csY31" fmla="*/ 439963 h 12235730"/>
-              <a:gd name="csX32" fmla="*/ 7433614 w 20745591"/>
-              <a:gd name="csY32" fmla="*/ 0 h 12235730"/>
-            </a:gdLst>
-            <a:ahLst/>
-            <a:cxnLst>
-              <a:cxn ang="0">
-                <a:pos x="csX0" y="csY0"/>
-              </a:cxn>
-              <a:cxn ang="0">
-                <a:pos x="csX1" y="csY1"/>
-              </a:cxn>
-              <a:cxn ang="0">
-                <a:pos x="csX2" y="csY2"/>
-              </a:cxn>
-              <a:cxn ang="0">
-                <a:pos x="csX3" y="csY3"/>
-              </a:cxn>
-              <a:cxn ang="0">
-                <a:pos x="csX4" y="csY4"/>
-              </a:cxn>
-              <a:cxn ang="0">
-                <a:pos x="csX5" y="csY5"/>
-              </a:cxn>
-              <a:cxn ang="0">
-                <a:pos x="csX6" y="csY6"/>
-              </a:cxn>
-              <a:cxn ang="0">
-                <a:pos x="csX7" y="csY7"/>
-              </a:cxn>
-              <a:cxn ang="0">
-                <a:pos x="csX8" y="csY8"/>
-              </a:cxn>
-              <a:cxn ang="0">
-                <a:pos x="csX9" y="csY9"/>
-              </a:cxn>
-              <a:cxn ang="0">
-                <a:pos x="csX10" y="csY10"/>
-              </a:cxn>
-              <a:cxn ang="0">
-                <a:pos x="csX11" y="csY11"/>
-              </a:cxn>
-              <a:cxn ang="0">
-                <a:pos x="csX12" y="csY12"/>
-              </a:cxn>
-              <a:cxn ang="0">
-                <a:pos x="csX13" y="csY13"/>
-              </a:cxn>
-              <a:cxn ang="0">
-                <a:pos x="csX14" y="csY14"/>
-              </a:cxn>
-              <a:cxn ang="0">
-                <a:pos x="csX15" y="csY15"/>
-              </a:cxn>
-              <a:cxn ang="0">
-                <a:pos x="csX16" y="csY16"/>
-              </a:cxn>
-              <a:cxn ang="0">
-                <a:pos x="csX17" y="csY17"/>
-              </a:cxn>
-              <a:cxn ang="0">
-                <a:pos x="csX18" y="csY18"/>
-              </a:cxn>
-              <a:cxn ang="0">
-                <a:pos x="csX19" y="csY19"/>
-              </a:cxn>
-              <a:cxn ang="0">
-                <a:pos x="csX20" y="csY20"/>
-              </a:cxn>
-              <a:cxn ang="0">
-                <a:pos x="csX21" y="csY21"/>
-              </a:cxn>
-              <a:cxn ang="0">
-                <a:pos x="csX22" y="csY22"/>
-              </a:cxn>
-              <a:cxn ang="0">
-                <a:pos x="csX23" y="csY23"/>
-              </a:cxn>
-              <a:cxn ang="0">
-                <a:pos x="csX24" y="csY24"/>
-              </a:cxn>
-              <a:cxn ang="0">
-                <a:pos x="csX25" y="csY25"/>
-              </a:cxn>
-              <a:cxn ang="0">
-                <a:pos x="csX26" y="csY26"/>
-              </a:cxn>
-              <a:cxn ang="0">
-                <a:pos x="csX27" y="csY27"/>
-              </a:cxn>
-              <a:cxn ang="0">
-                <a:pos x="csX28" y="csY28"/>
-              </a:cxn>
-              <a:cxn ang="0">
-                <a:pos x="csX29" y="csY29"/>
-              </a:cxn>
-              <a:cxn ang="0">
-                <a:pos x="csX30" y="csY30"/>
-              </a:cxn>
-              <a:cxn ang="0">
-                <a:pos x="csX31" y="csY31"/>
-              </a:cxn>
-              <a:cxn ang="0">
-                <a:pos x="csX32" y="csY32"/>
-              </a:cxn>
-            </a:cxnLst>
-            <a:rect l="l" t="t" r="r" b="b"/>
-            <a:pathLst>
-              <a:path w="20745591" h="12235730">
-                <a:moveTo>
-                  <a:pt x="7433614" y="0"/>
-                </a:moveTo>
-                <a:lnTo>
-                  <a:pt x="20005643" y="0"/>
-                </a:lnTo>
-                <a:cubicBezTo>
-                  <a:pt x="20248627" y="0"/>
-                  <a:pt x="20445607" y="196978"/>
-                  <a:pt x="20445607" y="439963"/>
-                </a:cubicBezTo>
-                <a:lnTo>
-                  <a:pt x="20445607" y="1014678"/>
-                </a:lnTo>
-                <a:lnTo>
-                  <a:pt x="20476139" y="1017757"/>
-                </a:lnTo>
-                <a:cubicBezTo>
-                  <a:pt x="20595683" y="1042218"/>
-                  <a:pt x="20693011" y="1127663"/>
-                  <a:pt x="20734203" y="1240166"/>
-                </a:cubicBezTo>
-                <a:lnTo>
-                  <a:pt x="20745591" y="1304700"/>
-                </a:lnTo>
-                <a:lnTo>
-                  <a:pt x="7763393" y="1304700"/>
-                </a:lnTo>
-                <a:cubicBezTo>
-                  <a:pt x="7651776" y="1304700"/>
-                  <a:pt x="7561295" y="1395182"/>
-                  <a:pt x="7561295" y="1506798"/>
-                </a:cubicBezTo>
-                <a:lnTo>
-                  <a:pt x="7561295" y="1952773"/>
-                </a:lnTo>
-                <a:lnTo>
-                  <a:pt x="7554839" y="2016809"/>
-                </a:lnTo>
-                <a:cubicBezTo>
-                  <a:pt x="7522224" y="2176199"/>
-                  <a:pt x="7381196" y="2296098"/>
-                  <a:pt x="7212163" y="2296098"/>
-                </a:cubicBezTo>
-                <a:lnTo>
-                  <a:pt x="7112004" y="2296098"/>
-                </a:lnTo>
-                <a:lnTo>
-                  <a:pt x="2747714" y="2296098"/>
-                </a:lnTo>
-                <a:lnTo>
-                  <a:pt x="2747715" y="2296099"/>
-                </a:lnTo>
-                <a:lnTo>
-                  <a:pt x="2198812" y="2296099"/>
-                </a:lnTo>
-                <a:cubicBezTo>
-                  <a:pt x="1954383" y="2296099"/>
-                  <a:pt x="1756234" y="2494248"/>
-                  <a:pt x="1756234" y="2738677"/>
-                </a:cubicBezTo>
-                <a:lnTo>
-                  <a:pt x="1756234" y="11909268"/>
-                </a:lnTo>
-                <a:cubicBezTo>
-                  <a:pt x="1756234" y="12031483"/>
-                  <a:pt x="1805772" y="12142127"/>
-                  <a:pt x="1885862" y="12222218"/>
-                </a:cubicBezTo>
-                <a:lnTo>
-                  <a:pt x="1902239" y="12235730"/>
-                </a:lnTo>
-                <a:lnTo>
-                  <a:pt x="750402" y="12235730"/>
-                </a:lnTo>
-                <a:cubicBezTo>
-                  <a:pt x="335966" y="12235730"/>
-                  <a:pt x="0" y="11899764"/>
-                  <a:pt x="0" y="11485328"/>
-                </a:cubicBezTo>
-                <a:lnTo>
-                  <a:pt x="0" y="2395311"/>
-                </a:lnTo>
-                <a:cubicBezTo>
-                  <a:pt x="0" y="2343507"/>
-                  <a:pt x="5250" y="2292928"/>
-                  <a:pt x="15246" y="2244079"/>
-                </a:cubicBezTo>
-                <a:lnTo>
-                  <a:pt x="51615" y="2126917"/>
-                </a:lnTo>
-                <a:lnTo>
-                  <a:pt x="27488" y="2082467"/>
-                </a:lnTo>
-                <a:cubicBezTo>
-                  <a:pt x="9789" y="2040619"/>
-                  <a:pt x="0" y="1994610"/>
-                  <a:pt x="0" y="1946315"/>
-                </a:cubicBezTo>
-                <a:lnTo>
-                  <a:pt x="0" y="1360433"/>
-                </a:lnTo>
-                <a:cubicBezTo>
-                  <a:pt x="0" y="1167253"/>
-                  <a:pt x="156603" y="1010650"/>
-                  <a:pt x="349783" y="1010650"/>
-                </a:cubicBezTo>
-                <a:lnTo>
-                  <a:pt x="349784" y="1010650"/>
-                </a:lnTo>
-                <a:lnTo>
-                  <a:pt x="6993649" y="1010650"/>
-                </a:lnTo>
-                <a:lnTo>
-                  <a:pt x="6993649" y="439963"/>
-                </a:lnTo>
-                <a:cubicBezTo>
-                  <a:pt x="6993649" y="196978"/>
-                  <a:pt x="7190628" y="0"/>
-                  <a:pt x="7433614" y="0"/>
-                </a:cubicBezTo>
-                <a:close/>
-              </a:path>
-            </a:pathLst>
-          </a:custGeom>
-          <a:gradFill flip="none" rotWithShape="1">
-            <a:gsLst>
-              <a:gs pos="0">
-                <a:schemeClr val="accent1">
-                  <a:lumMod val="67000"/>
-                </a:schemeClr>
-              </a:gs>
-              <a:gs pos="48000">
-                <a:schemeClr val="accent1">
-                  <a:lumMod val="97000"/>
-                  <a:lumOff val="3000"/>
-                </a:schemeClr>
-              </a:gs>
-              <a:gs pos="100000">
-                <a:schemeClr val="accent1">
-                  <a:lumMod val="60000"/>
-                  <a:lumOff val="40000"/>
-                </a:schemeClr>
-              </a:gs>
-            </a:gsLst>
-            <a:lin ang="16200000" scaled="1"/>
-            <a:tileRect/>
-          </a:gradFill>
-          <a:ln>
-            <a:noFill/>
-          </a:ln>
-        </p:spPr>
-        <p:style>
-          <a:lnRef idx="0">
-            <a:scrgbClr r="0" g="0" b="0"/>
-          </a:lnRef>
-          <a:fillRef idx="0">
-            <a:scrgbClr r="0" g="0" b="0"/>
-          </a:fillRef>
-          <a:effectRef idx="0">
-            <a:scrgbClr r="0" g="0" b="0"/>
-          </a:effectRef>
-          <a:fontRef idx="minor">
-            <a:schemeClr val="lt1"/>
-          </a:fontRef>
-        </p:style>
-        <p:txBody>
-          <a:bodyPr wrap="square" rtlCol="0" anchor="ctr">
-            <a:noAutofit/>
-          </a:bodyPr>
-          <a:lstStyle/>
-          <a:p>
-            <a:pPr algn="ctr"/>
-            <a:endParaRPr lang="pt-BR" dirty="0"/>
-          </a:p>
-        </p:txBody>
-      </p:sp>
+        </p:grpSpPr>
+        <p:sp>
+          <p:nvSpPr>
+            <p:cNvPr id="6" name="Retângulo 12">
+              <a:extLst>
+                <a:ext uri="{FF2B5EF4-FFF2-40B4-BE49-F238E27FC236}">
+                  <a16:creationId xmlns:a16="http://schemas.microsoft.com/office/drawing/2014/main" id="{3F120648-1438-B22A-D83A-614FBFB3A4CC}"/>
+                </a:ext>
+              </a:extLst>
+            </p:cNvPr>
+            <p:cNvSpPr/>
+            <p:nvPr/>
+          </p:nvSpPr>
+          <p:spPr>
+            <a:xfrm>
+              <a:off x="6099145" y="1033463"/>
+              <a:ext cx="233395" cy="126999"/>
+            </a:xfrm>
+            <a:custGeom>
+              <a:avLst/>
+              <a:gdLst>
+                <a:gd name="csX0" fmla="*/ 0 w 233395"/>
+                <a:gd name="csY0" fmla="*/ 0 h 126999"/>
+                <a:gd name="csX1" fmla="*/ 233395 w 233395"/>
+                <a:gd name="csY1" fmla="*/ 0 h 126999"/>
+                <a:gd name="csX2" fmla="*/ 104808 w 233395"/>
+                <a:gd name="csY2" fmla="*/ 69849 h 126999"/>
+                <a:gd name="csX3" fmla="*/ 0 w 233395"/>
+                <a:gd name="csY3" fmla="*/ 126999 h 126999"/>
+                <a:gd name="csX4" fmla="*/ 0 w 233395"/>
+                <a:gd name="csY4" fmla="*/ 0 h 126999"/>
+              </a:gdLst>
+              <a:ahLst/>
+              <a:cxnLst>
+                <a:cxn ang="0">
+                  <a:pos x="csX0" y="csY0"/>
+                </a:cxn>
+                <a:cxn ang="0">
+                  <a:pos x="csX1" y="csY1"/>
+                </a:cxn>
+                <a:cxn ang="0">
+                  <a:pos x="csX2" y="csY2"/>
+                </a:cxn>
+                <a:cxn ang="0">
+                  <a:pos x="csX3" y="csY3"/>
+                </a:cxn>
+                <a:cxn ang="0">
+                  <a:pos x="csX4" y="csY4"/>
+                </a:cxn>
+              </a:cxnLst>
+              <a:rect l="l" t="t" r="r" b="b"/>
+              <a:pathLst>
+                <a:path w="233395" h="126999">
+                  <a:moveTo>
+                    <a:pt x="0" y="0"/>
+                  </a:moveTo>
+                  <a:lnTo>
+                    <a:pt x="233395" y="0"/>
+                  </a:lnTo>
+                  <a:lnTo>
+                    <a:pt x="104808" y="69849"/>
+                  </a:lnTo>
+                  <a:lnTo>
+                    <a:pt x="0" y="126999"/>
+                  </a:lnTo>
+                  <a:lnTo>
+                    <a:pt x="0" y="0"/>
+                  </a:lnTo>
+                  <a:close/>
+                </a:path>
+              </a:pathLst>
+            </a:custGeom>
+            <a:solidFill>
+              <a:schemeClr val="accent4">
+                <a:lumMod val="75000"/>
+              </a:schemeClr>
+            </a:solidFill>
+            <a:ln>
+              <a:noFill/>
+            </a:ln>
+          </p:spPr>
+          <p:style>
+            <a:lnRef idx="2">
+              <a:schemeClr val="accent1">
+                <a:shade val="15000"/>
+              </a:schemeClr>
+            </a:lnRef>
+            <a:fillRef idx="1">
+              <a:schemeClr val="accent1"/>
+            </a:fillRef>
+            <a:effectRef idx="0">
+              <a:schemeClr val="accent1"/>
+            </a:effectRef>
+            <a:fontRef idx="minor">
+              <a:schemeClr val="lt1"/>
+            </a:fontRef>
+          </p:style>
+          <p:txBody>
+            <a:bodyPr rtlCol="0" anchor="ctr"/>
+            <a:lstStyle/>
+            <a:p>
+              <a:pPr algn="ctr"/>
+              <a:endParaRPr lang="pt-BR" dirty="0"/>
+            </a:p>
+          </p:txBody>
+        </p:sp>
+        <p:sp>
+          <p:nvSpPr>
+            <p:cNvPr id="8" name="Retângulo 7">
+              <a:extLst>
+                <a:ext uri="{FF2B5EF4-FFF2-40B4-BE49-F238E27FC236}">
+                  <a16:creationId xmlns:a16="http://schemas.microsoft.com/office/drawing/2014/main" id="{8388B717-2703-90B6-D900-70C8D2C79ADB}"/>
+                </a:ext>
+              </a:extLst>
+            </p:cNvPr>
+            <p:cNvSpPr/>
+            <p:nvPr/>
+          </p:nvSpPr>
+          <p:spPr>
+            <a:xfrm>
+              <a:off x="6092793" y="5293"/>
+              <a:ext cx="12011057" cy="1048378"/>
+            </a:xfrm>
+            <a:prstGeom prst="rect">
+              <a:avLst/>
+            </a:prstGeom>
+            <a:solidFill>
+              <a:schemeClr val="accent1">
+                <a:lumMod val="60000"/>
+                <a:lumOff val="40000"/>
+              </a:schemeClr>
+            </a:solidFill>
+            <a:ln>
+              <a:noFill/>
+            </a:ln>
+          </p:spPr>
+          <p:style>
+            <a:lnRef idx="2">
+              <a:schemeClr val="accent1">
+                <a:shade val="15000"/>
+              </a:schemeClr>
+            </a:lnRef>
+            <a:fillRef idx="1">
+              <a:schemeClr val="accent1"/>
+            </a:fillRef>
+            <a:effectRef idx="0">
+              <a:schemeClr val="accent1"/>
+            </a:effectRef>
+            <a:fontRef idx="minor">
+              <a:schemeClr val="lt1"/>
+            </a:fontRef>
+          </p:style>
+          <p:txBody>
+            <a:bodyPr rtlCol="0" anchor="ctr"/>
+            <a:lstStyle/>
+            <a:p>
+              <a:pPr algn="ctr"/>
+              <a:endParaRPr lang="pt-BR"/>
+            </a:p>
+          </p:txBody>
+        </p:sp>
+        <p:sp>
+          <p:nvSpPr>
+            <p:cNvPr id="10" name="Retângulo 5">
+              <a:extLst>
+                <a:ext uri="{FF2B5EF4-FFF2-40B4-BE49-F238E27FC236}">
+                  <a16:creationId xmlns:a16="http://schemas.microsoft.com/office/drawing/2014/main" id="{72E67AA6-47A1-534A-DBF6-3BEE14262E04}"/>
+                </a:ext>
+              </a:extLst>
+            </p:cNvPr>
+            <p:cNvSpPr/>
+            <p:nvPr/>
+          </p:nvSpPr>
+          <p:spPr>
+            <a:xfrm>
+              <a:off x="0" y="5293"/>
+              <a:ext cx="7414358" cy="1188508"/>
+            </a:xfrm>
+            <a:custGeom>
+              <a:avLst/>
+              <a:gdLst>
+                <a:gd name="csX0" fmla="*/ 0 w 6202680"/>
+                <a:gd name="csY0" fmla="*/ 0 h 1075896"/>
+                <a:gd name="csX1" fmla="*/ 6202680 w 6202680"/>
+                <a:gd name="csY1" fmla="*/ 0 h 1075896"/>
+                <a:gd name="csX2" fmla="*/ 5105400 w 6202680"/>
+                <a:gd name="csY2" fmla="*/ 1045416 h 1075896"/>
+                <a:gd name="csX3" fmla="*/ 0 w 6202680"/>
+                <a:gd name="csY3" fmla="*/ 1075896 h 1075896"/>
+                <a:gd name="csX4" fmla="*/ 0 w 6202680"/>
+                <a:gd name="csY4" fmla="*/ 0 h 1075896"/>
+              </a:gdLst>
+              <a:ahLst/>
+              <a:cxnLst>
+                <a:cxn ang="0">
+                  <a:pos x="csX0" y="csY0"/>
+                </a:cxn>
+                <a:cxn ang="0">
+                  <a:pos x="csX1" y="csY1"/>
+                </a:cxn>
+                <a:cxn ang="0">
+                  <a:pos x="csX2" y="csY2"/>
+                </a:cxn>
+                <a:cxn ang="0">
+                  <a:pos x="csX3" y="csY3"/>
+                </a:cxn>
+                <a:cxn ang="0">
+                  <a:pos x="csX4" y="csY4"/>
+                </a:cxn>
+              </a:cxnLst>
+              <a:rect l="l" t="t" r="r" b="b"/>
+              <a:pathLst>
+                <a:path w="6202680" h="1075896">
+                  <a:moveTo>
+                    <a:pt x="0" y="0"/>
+                  </a:moveTo>
+                  <a:lnTo>
+                    <a:pt x="6202680" y="0"/>
+                  </a:lnTo>
+                  <a:cubicBezTo>
+                    <a:pt x="5836920" y="348472"/>
+                    <a:pt x="5156200" y="102584"/>
+                    <a:pt x="5105400" y="1045416"/>
+                  </a:cubicBezTo>
+                  <a:lnTo>
+                    <a:pt x="0" y="1075896"/>
+                  </a:lnTo>
+                  <a:lnTo>
+                    <a:pt x="0" y="0"/>
+                  </a:lnTo>
+                  <a:close/>
+                </a:path>
+              </a:pathLst>
+            </a:custGeom>
+            <a:solidFill>
+              <a:schemeClr val="accent1">
+                <a:lumMod val="75000"/>
+              </a:schemeClr>
+            </a:solidFill>
+            <a:ln>
+              <a:noFill/>
+            </a:ln>
+          </p:spPr>
+          <p:style>
+            <a:lnRef idx="2">
+              <a:schemeClr val="accent1">
+                <a:shade val="15000"/>
+              </a:schemeClr>
+            </a:lnRef>
+            <a:fillRef idx="1">
+              <a:schemeClr val="accent1"/>
+            </a:fillRef>
+            <a:effectRef idx="0">
+              <a:schemeClr val="accent1"/>
+            </a:effectRef>
+            <a:fontRef idx="minor">
+              <a:schemeClr val="lt1"/>
+            </a:fontRef>
+          </p:style>
+          <p:txBody>
+            <a:bodyPr rtlCol="0" anchor="ctr"/>
+            <a:lstStyle/>
+            <a:p>
+              <a:pPr algn="ctr"/>
+              <a:endParaRPr lang="pt-BR"/>
+            </a:p>
+          </p:txBody>
+        </p:sp>
+      </p:grpSp>
       <p:sp>
         <p:nvSpPr>
           <p:cNvPr id="29" name="Retângulo 28">
@@ -4386,7 +4596,7 @@
         </p:nvSpPr>
         <p:spPr>
           <a:xfrm>
-            <a:off x="95250" y="95250"/>
+            <a:off x="373301" y="186899"/>
             <a:ext cx="4889500" cy="769441"/>
           </a:xfrm>
           <a:prstGeom prst="rect">
@@ -4452,8 +4662,8 @@
         </p:nvSpPr>
         <p:spPr>
           <a:xfrm>
-            <a:off x="373301" y="2545080"/>
-            <a:ext cx="5091491" cy="3117784"/>
+            <a:off x="373301" y="2949911"/>
+            <a:ext cx="5091491" cy="2712954"/>
           </a:xfrm>
           <a:prstGeom prst="roundRect">
             <a:avLst>
@@ -4467,9 +4677,9 @@
             <a:noFill/>
           </a:ln>
           <a:effectLst>
-            <a:outerShdw blurRad="63500" sx="102000" sy="102000" algn="ctr" rotWithShape="0">
+            <a:outerShdw blurRad="63500" dist="88900" dir="2820000" algn="ctr" rotWithShape="0">
               <a:prstClr val="black">
-                <a:alpha val="18000"/>
+                <a:alpha val="20000"/>
               </a:prstClr>
             </a:outerShdw>
           </a:effectLst>
@@ -4528,9 +4738,9 @@
             <a:noFill/>
           </a:ln>
           <a:effectLst>
-            <a:outerShdw blurRad="63500" sx="102000" sy="102000" algn="ctr" rotWithShape="0">
+            <a:outerShdw blurRad="63500" dist="88900" dir="2820000" algn="ctr" rotWithShape="0">
               <a:prstClr val="black">
-                <a:alpha val="18000"/>
+                <a:alpha val="20000"/>
               </a:prstClr>
             </a:outerShdw>
           </a:effectLst>
@@ -4574,8 +4784,8 @@
         </p:nvSpPr>
         <p:spPr>
           <a:xfrm>
-            <a:off x="5770859" y="1617994"/>
-            <a:ext cx="4611449" cy="4044870"/>
+            <a:off x="5770859" y="1356802"/>
+            <a:ext cx="4611449" cy="4306062"/>
           </a:xfrm>
           <a:prstGeom prst="roundRect">
             <a:avLst>
@@ -4589,9 +4799,9 @@
             <a:noFill/>
           </a:ln>
           <a:effectLst>
-            <a:outerShdw blurRad="63500" sx="102000" sy="102000" algn="ctr" rotWithShape="0">
+            <a:outerShdw blurRad="63500" dist="88900" dir="2820000" algn="ctr" rotWithShape="0">
               <a:prstClr val="black">
-                <a:alpha val="18000"/>
+                <a:alpha val="20000"/>
               </a:prstClr>
             </a:outerShdw>
           </a:effectLst>
@@ -4635,8 +4845,8 @@
         </p:nvSpPr>
         <p:spPr>
           <a:xfrm>
-            <a:off x="10688375" y="1617994"/>
-            <a:ext cx="3396594" cy="4044870"/>
+            <a:off x="10688375" y="1356802"/>
+            <a:ext cx="3396594" cy="4306062"/>
           </a:xfrm>
           <a:prstGeom prst="roundRect">
             <a:avLst>
@@ -4650,9 +4860,9 @@
             <a:noFill/>
           </a:ln>
           <a:effectLst>
-            <a:outerShdw blurRad="63500" sx="102000" sy="102000" algn="ctr" rotWithShape="0">
+            <a:outerShdw blurRad="63500" dist="88900" dir="2820000" algn="ctr" rotWithShape="0">
               <a:prstClr val="black">
-                <a:alpha val="18000"/>
+                <a:alpha val="20000"/>
               </a:prstClr>
             </a:outerShdw>
           </a:effectLst>
@@ -4696,8 +4906,8 @@
         </p:nvSpPr>
         <p:spPr>
           <a:xfrm>
-            <a:off x="14391036" y="1617994"/>
-            <a:ext cx="3396594" cy="4044870"/>
+            <a:off x="14391036" y="1356802"/>
+            <a:ext cx="3396594" cy="4306062"/>
           </a:xfrm>
           <a:prstGeom prst="roundRect">
             <a:avLst>
@@ -4711,9 +4921,9 @@
             <a:noFill/>
           </a:ln>
           <a:effectLst>
-            <a:outerShdw blurRad="63500" sx="102000" sy="102000" algn="ctr" rotWithShape="0">
+            <a:outerShdw blurRad="63500" dist="88900" dir="2820000" algn="ctr" rotWithShape="0">
               <a:prstClr val="black">
-                <a:alpha val="18000"/>
+                <a:alpha val="20000"/>
               </a:prstClr>
             </a:outerShdw>
           </a:effectLst>
@@ -4772,9 +4982,70 @@
             <a:noFill/>
           </a:ln>
           <a:effectLst>
-            <a:outerShdw blurRad="63500" sx="102000" sy="102000" algn="ctr" rotWithShape="0">
+            <a:outerShdw blurRad="63500" dist="88900" dir="2820000" algn="ctr" rotWithShape="0">
               <a:prstClr val="black">
-                <a:alpha val="18000"/>
+                <a:alpha val="20000"/>
+              </a:prstClr>
+            </a:outerShdw>
+          </a:effectLst>
+        </p:spPr>
+        <p:style>
+          <a:lnRef idx="2">
+            <a:schemeClr val="accent1">
+              <a:shade val="15000"/>
+            </a:schemeClr>
+          </a:lnRef>
+          <a:fillRef idx="1">
+            <a:schemeClr val="accent1"/>
+          </a:fillRef>
+          <a:effectRef idx="0">
+            <a:schemeClr val="accent1"/>
+          </a:effectRef>
+          <a:fontRef idx="minor">
+            <a:schemeClr val="lt1"/>
+          </a:fontRef>
+        </p:style>
+        <p:txBody>
+          <a:bodyPr rtlCol="0" anchor="ctr"/>
+          <a:lstStyle/>
+          <a:p>
+            <a:pPr algn="ctr"/>
+            <a:endParaRPr lang="pt-BR"/>
+          </a:p>
+        </p:txBody>
+      </p:sp>
+      <p:sp>
+        <p:nvSpPr>
+          <p:cNvPr id="14" name="Retângulo: Cantos Arredondados 13">
+            <a:extLst>
+              <a:ext uri="{FF2B5EF4-FFF2-40B4-BE49-F238E27FC236}">
+                <a16:creationId xmlns:a16="http://schemas.microsoft.com/office/drawing/2014/main" id="{008B230A-9A30-AB27-4FC9-68E83FE503B8}"/>
+              </a:ext>
+            </a:extLst>
+          </p:cNvPr>
+          <p:cNvSpPr/>
+          <p:nvPr/>
+        </p:nvSpPr>
+        <p:spPr>
+          <a:xfrm>
+            <a:off x="373302" y="1356802"/>
+            <a:ext cx="5091490" cy="1298588"/>
+          </a:xfrm>
+          <a:prstGeom prst="roundRect">
+            <a:avLst>
+              <a:gd name="adj" fmla="val 4686"/>
+            </a:avLst>
+          </a:prstGeom>
+          <a:solidFill>
+            <a:schemeClr val="bg1"/>
+          </a:solidFill>
+          <a:ln>
+            <a:noFill/>
+          </a:ln>
+          <a:effectLst>
+            <a:outerShdw blurRad="63500" dist="88900" dir="2820000" algn="ctr" rotWithShape="0">
+              <a:prstClr val="black">
+                <a:alpha val="20000"/>
               </a:prstClr>
             </a:outerShdw>
           </a:effectLst>
@@ -4840,450 +5111,294 @@
           <a:chExt cx="0" cy="0"/>
         </a:xfrm>
       </p:grpSpPr>
-      <p:sp>
-        <p:nvSpPr>
-          <p:cNvPr id="2" name="Retângulo: Cantos Arredondados 1">
+      <p:grpSp>
+        <p:nvGrpSpPr>
+          <p:cNvPr id="4" name="Agrupar 3">
             <a:extLst>
               <a:ext uri="{FF2B5EF4-FFF2-40B4-BE49-F238E27FC236}">
-                <a16:creationId xmlns:a16="http://schemas.microsoft.com/office/drawing/2014/main" id="{1242E65C-ACAB-BA77-5A68-F539C71AE861}"/>
+                <a16:creationId xmlns:a16="http://schemas.microsoft.com/office/drawing/2014/main" id="{92AA1491-53CA-C708-08F6-C7EE1F69A730}"/>
               </a:ext>
             </a:extLst>
           </p:cNvPr>
-          <p:cNvSpPr/>
+          <p:cNvGrpSpPr/>
           <p:nvPr/>
-        </p:nvSpPr>
-        <p:spPr>
+        </p:nvGrpSpPr>
+        <p:grpSpPr>
           <a:xfrm>
-            <a:off x="5213123" y="-155486"/>
-            <a:ext cx="8875410" cy="1245141"/>
+            <a:off x="0" y="5293"/>
+            <a:ext cx="18103850" cy="1188508"/>
+            <a:chOff x="0" y="5293"/>
+            <a:chExt cx="18103850" cy="1188508"/>
           </a:xfrm>
-          <a:prstGeom prst="roundRect">
-            <a:avLst>
-              <a:gd name="adj" fmla="val 29904"/>
-            </a:avLst>
-          </a:prstGeom>
-          <a:gradFill flip="none" rotWithShape="1">
-            <a:gsLst>
-              <a:gs pos="0">
-                <a:schemeClr val="accent1">
-                  <a:lumMod val="67000"/>
-                </a:schemeClr>
-              </a:gs>
-              <a:gs pos="48000">
-                <a:schemeClr val="accent1">
-                  <a:lumMod val="97000"/>
-                  <a:lumOff val="3000"/>
-                </a:schemeClr>
-              </a:gs>
-              <a:gs pos="100000">
-                <a:schemeClr val="accent1">
-                  <a:lumMod val="60000"/>
-                  <a:lumOff val="40000"/>
-                </a:schemeClr>
-              </a:gs>
-            </a:gsLst>
-            <a:lin ang="16200000" scaled="1"/>
-            <a:tileRect/>
-          </a:gradFill>
-          <a:ln>
-            <a:noFill/>
-          </a:ln>
-        </p:spPr>
-        <p:style>
-          <a:lnRef idx="0">
-            <a:scrgbClr r="0" g="0" b="0"/>
-          </a:lnRef>
-          <a:fillRef idx="0">
-            <a:scrgbClr r="0" g="0" b="0"/>
-          </a:fillRef>
-          <a:effectRef idx="0">
-            <a:scrgbClr r="0" g="0" b="0"/>
-          </a:effectRef>
-          <a:fontRef idx="minor">
-            <a:schemeClr val="lt1"/>
-          </a:fontRef>
-        </p:style>
-        <p:txBody>
-          <a:bodyPr rtlCol="0" anchor="ctr"/>
-          <a:lstStyle/>
-          <a:p>
-            <a:pPr algn="ctr"/>
-            <a:r>
-              <a:rPr lang="pt-BR" dirty="0"/>
-              <a:t> </a:t>
-            </a:r>
-          </a:p>
-        </p:txBody>
-      </p:sp>
-      <p:sp>
-        <p:nvSpPr>
-          <p:cNvPr id="75" name="Forma Livre: Forma 74">
-            <a:extLst>
-              <a:ext uri="{FF2B5EF4-FFF2-40B4-BE49-F238E27FC236}">
-                <a16:creationId xmlns:a16="http://schemas.microsoft.com/office/drawing/2014/main" id="{E4573D8A-BC6C-5F60-5899-79EFD74AF655}"/>
-              </a:ext>
-            </a:extLst>
-          </p:cNvPr>
-          <p:cNvSpPr/>
-          <p:nvPr/>
-        </p:nvSpPr>
-        <p:spPr>
-          <a:xfrm>
-            <a:off x="-1611087" y="-1204875"/>
-            <a:ext cx="20745591" cy="12235730"/>
-          </a:xfrm>
-          <a:custGeom>
-            <a:avLst/>
-            <a:gdLst>
-              <a:gd name="csX0" fmla="*/ 7433614 w 20745591"/>
-              <a:gd name="csY0" fmla="*/ 0 h 12235730"/>
-              <a:gd name="csX1" fmla="*/ 20005643 w 20745591"/>
-              <a:gd name="csY1" fmla="*/ 0 h 12235730"/>
-              <a:gd name="csX2" fmla="*/ 20445607 w 20745591"/>
-              <a:gd name="csY2" fmla="*/ 439963 h 12235730"/>
-              <a:gd name="csX3" fmla="*/ 20445607 w 20745591"/>
-              <a:gd name="csY3" fmla="*/ 1014678 h 12235730"/>
-              <a:gd name="csX4" fmla="*/ 20476139 w 20745591"/>
-              <a:gd name="csY4" fmla="*/ 1017757 h 12235730"/>
-              <a:gd name="csX5" fmla="*/ 20734203 w 20745591"/>
-              <a:gd name="csY5" fmla="*/ 1240166 h 12235730"/>
-              <a:gd name="csX6" fmla="*/ 20745591 w 20745591"/>
-              <a:gd name="csY6" fmla="*/ 1304700 h 12235730"/>
-              <a:gd name="csX7" fmla="*/ 7763393 w 20745591"/>
-              <a:gd name="csY7" fmla="*/ 1304700 h 12235730"/>
-              <a:gd name="csX8" fmla="*/ 7561295 w 20745591"/>
-              <a:gd name="csY8" fmla="*/ 1506798 h 12235730"/>
-              <a:gd name="csX9" fmla="*/ 7561295 w 20745591"/>
-              <a:gd name="csY9" fmla="*/ 1952773 h 12235730"/>
-              <a:gd name="csX10" fmla="*/ 7554839 w 20745591"/>
-              <a:gd name="csY10" fmla="*/ 2016809 h 12235730"/>
-              <a:gd name="csX11" fmla="*/ 7212163 w 20745591"/>
-              <a:gd name="csY11" fmla="*/ 2296098 h 12235730"/>
-              <a:gd name="csX12" fmla="*/ 7112004 w 20745591"/>
-              <a:gd name="csY12" fmla="*/ 2296098 h 12235730"/>
-              <a:gd name="csX13" fmla="*/ 2747714 w 20745591"/>
-              <a:gd name="csY13" fmla="*/ 2296098 h 12235730"/>
-              <a:gd name="csX14" fmla="*/ 2747715 w 20745591"/>
-              <a:gd name="csY14" fmla="*/ 2296099 h 12235730"/>
-              <a:gd name="csX15" fmla="*/ 2198812 w 20745591"/>
-              <a:gd name="csY15" fmla="*/ 2296099 h 12235730"/>
-              <a:gd name="csX16" fmla="*/ 1756234 w 20745591"/>
-              <a:gd name="csY16" fmla="*/ 2738677 h 12235730"/>
-              <a:gd name="csX17" fmla="*/ 1756234 w 20745591"/>
-              <a:gd name="csY17" fmla="*/ 11909268 h 12235730"/>
-              <a:gd name="csX18" fmla="*/ 1885862 w 20745591"/>
-              <a:gd name="csY18" fmla="*/ 12222218 h 12235730"/>
-              <a:gd name="csX19" fmla="*/ 1902239 w 20745591"/>
-              <a:gd name="csY19" fmla="*/ 12235730 h 12235730"/>
-              <a:gd name="csX20" fmla="*/ 750402 w 20745591"/>
-              <a:gd name="csY20" fmla="*/ 12235730 h 12235730"/>
-              <a:gd name="csX21" fmla="*/ 0 w 20745591"/>
-              <a:gd name="csY21" fmla="*/ 11485328 h 12235730"/>
-              <a:gd name="csX22" fmla="*/ 0 w 20745591"/>
-              <a:gd name="csY22" fmla="*/ 2395311 h 12235730"/>
-              <a:gd name="csX23" fmla="*/ 15246 w 20745591"/>
-              <a:gd name="csY23" fmla="*/ 2244079 h 12235730"/>
-              <a:gd name="csX24" fmla="*/ 51615 w 20745591"/>
-              <a:gd name="csY24" fmla="*/ 2126917 h 12235730"/>
-              <a:gd name="csX25" fmla="*/ 27488 w 20745591"/>
-              <a:gd name="csY25" fmla="*/ 2082467 h 12235730"/>
-              <a:gd name="csX26" fmla="*/ 0 w 20745591"/>
-              <a:gd name="csY26" fmla="*/ 1946315 h 12235730"/>
-              <a:gd name="csX27" fmla="*/ 0 w 20745591"/>
-              <a:gd name="csY27" fmla="*/ 1360433 h 12235730"/>
-              <a:gd name="csX28" fmla="*/ 349783 w 20745591"/>
-              <a:gd name="csY28" fmla="*/ 1010650 h 12235730"/>
-              <a:gd name="csX29" fmla="*/ 349784 w 20745591"/>
-              <a:gd name="csY29" fmla="*/ 1010650 h 12235730"/>
-              <a:gd name="csX30" fmla="*/ 6993649 w 20745591"/>
-              <a:gd name="csY30" fmla="*/ 1010650 h 12235730"/>
-              <a:gd name="csX31" fmla="*/ 6993649 w 20745591"/>
-              <a:gd name="csY31" fmla="*/ 439963 h 12235730"/>
-              <a:gd name="csX32" fmla="*/ 7433614 w 20745591"/>
-              <a:gd name="csY32" fmla="*/ 0 h 12235730"/>
-            </a:gdLst>
-            <a:ahLst/>
-            <a:cxnLst>
-              <a:cxn ang="0">
-                <a:pos x="csX0" y="csY0"/>
-              </a:cxn>
-              <a:cxn ang="0">
-                <a:pos x="csX1" y="csY1"/>
-              </a:cxn>
-              <a:cxn ang="0">
-                <a:pos x="csX2" y="csY2"/>
-              </a:cxn>
-              <a:cxn ang="0">
-                <a:pos x="csX3" y="csY3"/>
-              </a:cxn>
-              <a:cxn ang="0">
-                <a:pos x="csX4" y="csY4"/>
-              </a:cxn>
-              <a:cxn ang="0">
-                <a:pos x="csX5" y="csY5"/>
-              </a:cxn>
-              <a:cxn ang="0">
-                <a:pos x="csX6" y="csY6"/>
-              </a:cxn>
-              <a:cxn ang="0">
-                <a:pos x="csX7" y="csY7"/>
-              </a:cxn>
-              <a:cxn ang="0">
-                <a:pos x="csX8" y="csY8"/>
-              </a:cxn>
-              <a:cxn ang="0">
-                <a:pos x="csX9" y="csY9"/>
-              </a:cxn>
-              <a:cxn ang="0">
-                <a:pos x="csX10" y="csY10"/>
-              </a:cxn>
-              <a:cxn ang="0">
-                <a:pos x="csX11" y="csY11"/>
-              </a:cxn>
-              <a:cxn ang="0">
-                <a:pos x="csX12" y="csY12"/>
-              </a:cxn>
-              <a:cxn ang="0">
-                <a:pos x="csX13" y="csY13"/>
-              </a:cxn>
-              <a:cxn ang="0">
-                <a:pos x="csX14" y="csY14"/>
-              </a:cxn>
-              <a:cxn ang="0">
-                <a:pos x="csX15" y="csY15"/>
-              </a:cxn>
-              <a:cxn ang="0">
-                <a:pos x="csX16" y="csY16"/>
-              </a:cxn>
-              <a:cxn ang="0">
-                <a:pos x="csX17" y="csY17"/>
-              </a:cxn>
-              <a:cxn ang="0">
-                <a:pos x="csX18" y="csY18"/>
-              </a:cxn>
-              <a:cxn ang="0">
-                <a:pos x="csX19" y="csY19"/>
-              </a:cxn>
-              <a:cxn ang="0">
-                <a:pos x="csX20" y="csY20"/>
-              </a:cxn>
-              <a:cxn ang="0">
-                <a:pos x="csX21" y="csY21"/>
-              </a:cxn>
-              <a:cxn ang="0">
-                <a:pos x="csX22" y="csY22"/>
-              </a:cxn>
-              <a:cxn ang="0">
-                <a:pos x="csX23" y="csY23"/>
-              </a:cxn>
-              <a:cxn ang="0">
-                <a:pos x="csX24" y="csY24"/>
-              </a:cxn>
-              <a:cxn ang="0">
-                <a:pos x="csX25" y="csY25"/>
-              </a:cxn>
-              <a:cxn ang="0">
-                <a:pos x="csX26" y="csY26"/>
-              </a:cxn>
-              <a:cxn ang="0">
-                <a:pos x="csX27" y="csY27"/>
-              </a:cxn>
-              <a:cxn ang="0">
-                <a:pos x="csX28" y="csY28"/>
-              </a:cxn>
-              <a:cxn ang="0">
-                <a:pos x="csX29" y="csY29"/>
-              </a:cxn>
-              <a:cxn ang="0">
-                <a:pos x="csX30" y="csY30"/>
-              </a:cxn>
-              <a:cxn ang="0">
-                <a:pos x="csX31" y="csY31"/>
-              </a:cxn>
-              <a:cxn ang="0">
-                <a:pos x="csX32" y="csY32"/>
-              </a:cxn>
-            </a:cxnLst>
-            <a:rect l="l" t="t" r="r" b="b"/>
-            <a:pathLst>
-              <a:path w="20745591" h="12235730">
-                <a:moveTo>
-                  <a:pt x="7433614" y="0"/>
-                </a:moveTo>
-                <a:lnTo>
-                  <a:pt x="20005643" y="0"/>
-                </a:lnTo>
-                <a:cubicBezTo>
-                  <a:pt x="20248627" y="0"/>
-                  <a:pt x="20445607" y="196978"/>
-                  <a:pt x="20445607" y="439963"/>
-                </a:cubicBezTo>
-                <a:lnTo>
-                  <a:pt x="20445607" y="1014678"/>
-                </a:lnTo>
-                <a:lnTo>
-                  <a:pt x="20476139" y="1017757"/>
-                </a:lnTo>
-                <a:cubicBezTo>
-                  <a:pt x="20595683" y="1042218"/>
-                  <a:pt x="20693011" y="1127663"/>
-                  <a:pt x="20734203" y="1240166"/>
-                </a:cubicBezTo>
-                <a:lnTo>
-                  <a:pt x="20745591" y="1304700"/>
-                </a:lnTo>
-                <a:lnTo>
-                  <a:pt x="7763393" y="1304700"/>
-                </a:lnTo>
-                <a:cubicBezTo>
-                  <a:pt x="7651776" y="1304700"/>
-                  <a:pt x="7561295" y="1395182"/>
-                  <a:pt x="7561295" y="1506798"/>
-                </a:cubicBezTo>
-                <a:lnTo>
-                  <a:pt x="7561295" y="1952773"/>
-                </a:lnTo>
-                <a:lnTo>
-                  <a:pt x="7554839" y="2016809"/>
-                </a:lnTo>
-                <a:cubicBezTo>
-                  <a:pt x="7522224" y="2176199"/>
-                  <a:pt x="7381196" y="2296098"/>
-                  <a:pt x="7212163" y="2296098"/>
-                </a:cubicBezTo>
-                <a:lnTo>
-                  <a:pt x="7112004" y="2296098"/>
-                </a:lnTo>
-                <a:lnTo>
-                  <a:pt x="2747714" y="2296098"/>
-                </a:lnTo>
-                <a:lnTo>
-                  <a:pt x="2747715" y="2296099"/>
-                </a:lnTo>
-                <a:lnTo>
-                  <a:pt x="2198812" y="2296099"/>
-                </a:lnTo>
-                <a:cubicBezTo>
-                  <a:pt x="1954383" y="2296099"/>
-                  <a:pt x="1756234" y="2494248"/>
-                  <a:pt x="1756234" y="2738677"/>
-                </a:cubicBezTo>
-                <a:lnTo>
-                  <a:pt x="1756234" y="11909268"/>
-                </a:lnTo>
-                <a:cubicBezTo>
-                  <a:pt x="1756234" y="12031483"/>
-                  <a:pt x="1805772" y="12142127"/>
-                  <a:pt x="1885862" y="12222218"/>
-                </a:cubicBezTo>
-                <a:lnTo>
-                  <a:pt x="1902239" y="12235730"/>
-                </a:lnTo>
-                <a:lnTo>
-                  <a:pt x="750402" y="12235730"/>
-                </a:lnTo>
-                <a:cubicBezTo>
-                  <a:pt x="335966" y="12235730"/>
-                  <a:pt x="0" y="11899764"/>
-                  <a:pt x="0" y="11485328"/>
-                </a:cubicBezTo>
-                <a:lnTo>
-                  <a:pt x="0" y="2395311"/>
-                </a:lnTo>
-                <a:cubicBezTo>
-                  <a:pt x="0" y="2343507"/>
-                  <a:pt x="5250" y="2292928"/>
-                  <a:pt x="15246" y="2244079"/>
-                </a:cubicBezTo>
-                <a:lnTo>
-                  <a:pt x="51615" y="2126917"/>
-                </a:lnTo>
-                <a:lnTo>
-                  <a:pt x="27488" y="2082467"/>
-                </a:lnTo>
-                <a:cubicBezTo>
-                  <a:pt x="9789" y="2040619"/>
-                  <a:pt x="0" y="1994610"/>
-                  <a:pt x="0" y="1946315"/>
-                </a:cubicBezTo>
-                <a:lnTo>
-                  <a:pt x="0" y="1360433"/>
-                </a:lnTo>
-                <a:cubicBezTo>
-                  <a:pt x="0" y="1167253"/>
-                  <a:pt x="156603" y="1010650"/>
-                  <a:pt x="349783" y="1010650"/>
-                </a:cubicBezTo>
-                <a:lnTo>
-                  <a:pt x="349784" y="1010650"/>
-                </a:lnTo>
-                <a:lnTo>
-                  <a:pt x="6993649" y="1010650"/>
-                </a:lnTo>
-                <a:lnTo>
-                  <a:pt x="6993649" y="439963"/>
-                </a:lnTo>
-                <a:cubicBezTo>
-                  <a:pt x="6993649" y="196978"/>
-                  <a:pt x="7190628" y="0"/>
-                  <a:pt x="7433614" y="0"/>
-                </a:cubicBezTo>
-                <a:close/>
-              </a:path>
-            </a:pathLst>
-          </a:custGeom>
-          <a:gradFill flip="none" rotWithShape="1">
-            <a:gsLst>
-              <a:gs pos="0">
-                <a:schemeClr val="accent1">
-                  <a:lumMod val="67000"/>
-                </a:schemeClr>
-              </a:gs>
-              <a:gs pos="48000">
-                <a:schemeClr val="accent1">
-                  <a:lumMod val="97000"/>
-                  <a:lumOff val="3000"/>
-                </a:schemeClr>
-              </a:gs>
-              <a:gs pos="100000">
-                <a:schemeClr val="accent1">
-                  <a:lumMod val="60000"/>
-                  <a:lumOff val="40000"/>
-                </a:schemeClr>
-              </a:gs>
-            </a:gsLst>
-            <a:lin ang="16200000" scaled="1"/>
-            <a:tileRect/>
-          </a:gradFill>
-          <a:ln>
-            <a:noFill/>
-          </a:ln>
-        </p:spPr>
-        <p:style>
-          <a:lnRef idx="0">
-            <a:scrgbClr r="0" g="0" b="0"/>
-          </a:lnRef>
-          <a:fillRef idx="0">
-            <a:scrgbClr r="0" g="0" b="0"/>
-          </a:fillRef>
-          <a:effectRef idx="0">
-            <a:scrgbClr r="0" g="0" b="0"/>
-          </a:effectRef>
-          <a:fontRef idx="minor">
-            <a:schemeClr val="lt1"/>
-          </a:fontRef>
-        </p:style>
-        <p:txBody>
-          <a:bodyPr wrap="square" rtlCol="0" anchor="ctr">
-            <a:noAutofit/>
-          </a:bodyPr>
-          <a:lstStyle/>
-          <a:p>
-            <a:pPr algn="ctr"/>
-            <a:endParaRPr lang="pt-BR" dirty="0"/>
-          </a:p>
-        </p:txBody>
-      </p:sp>
+        </p:grpSpPr>
+        <p:sp>
+          <p:nvSpPr>
+            <p:cNvPr id="6" name="Retângulo 12">
+              <a:extLst>
+                <a:ext uri="{FF2B5EF4-FFF2-40B4-BE49-F238E27FC236}">
+                  <a16:creationId xmlns:a16="http://schemas.microsoft.com/office/drawing/2014/main" id="{A40F4BF7-49A3-9A98-2FCF-ACAD3FC2EB68}"/>
+                </a:ext>
+              </a:extLst>
+            </p:cNvPr>
+            <p:cNvSpPr/>
+            <p:nvPr/>
+          </p:nvSpPr>
+          <p:spPr>
+            <a:xfrm>
+              <a:off x="6099145" y="1033463"/>
+              <a:ext cx="233395" cy="126999"/>
+            </a:xfrm>
+            <a:custGeom>
+              <a:avLst/>
+              <a:gdLst>
+                <a:gd name="csX0" fmla="*/ 0 w 233395"/>
+                <a:gd name="csY0" fmla="*/ 0 h 126999"/>
+                <a:gd name="csX1" fmla="*/ 233395 w 233395"/>
+                <a:gd name="csY1" fmla="*/ 0 h 126999"/>
+                <a:gd name="csX2" fmla="*/ 104808 w 233395"/>
+                <a:gd name="csY2" fmla="*/ 69849 h 126999"/>
+                <a:gd name="csX3" fmla="*/ 0 w 233395"/>
+                <a:gd name="csY3" fmla="*/ 126999 h 126999"/>
+                <a:gd name="csX4" fmla="*/ 0 w 233395"/>
+                <a:gd name="csY4" fmla="*/ 0 h 126999"/>
+              </a:gdLst>
+              <a:ahLst/>
+              <a:cxnLst>
+                <a:cxn ang="0">
+                  <a:pos x="csX0" y="csY0"/>
+                </a:cxn>
+                <a:cxn ang="0">
+                  <a:pos x="csX1" y="csY1"/>
+                </a:cxn>
+                <a:cxn ang="0">
+                  <a:pos x="csX2" y="csY2"/>
+                </a:cxn>
+                <a:cxn ang="0">
+                  <a:pos x="csX3" y="csY3"/>
+                </a:cxn>
+                <a:cxn ang="0">
+                  <a:pos x="csX4" y="csY4"/>
+                </a:cxn>
+              </a:cxnLst>
+              <a:rect l="l" t="t" r="r" b="b"/>
+              <a:pathLst>
+                <a:path w="233395" h="126999">
+                  <a:moveTo>
+                    <a:pt x="0" y="0"/>
+                  </a:moveTo>
+                  <a:lnTo>
+                    <a:pt x="233395" y="0"/>
+                  </a:lnTo>
+                  <a:lnTo>
+                    <a:pt x="104808" y="69849"/>
+                  </a:lnTo>
+                  <a:lnTo>
+                    <a:pt x="0" y="126999"/>
+                  </a:lnTo>
+                  <a:lnTo>
+                    <a:pt x="0" y="0"/>
+                  </a:lnTo>
+                  <a:close/>
+                </a:path>
+              </a:pathLst>
+            </a:custGeom>
+            <a:solidFill>
+              <a:schemeClr val="accent4">
+                <a:lumMod val="75000"/>
+              </a:schemeClr>
+            </a:solidFill>
+            <a:ln>
+              <a:noFill/>
+            </a:ln>
+          </p:spPr>
+          <p:style>
+            <a:lnRef idx="2">
+              <a:schemeClr val="accent1">
+                <a:shade val="15000"/>
+              </a:schemeClr>
+            </a:lnRef>
+            <a:fillRef idx="1">
+              <a:schemeClr val="accent1"/>
+            </a:fillRef>
+            <a:effectRef idx="0">
+              <a:schemeClr val="accent1"/>
+            </a:effectRef>
+            <a:fontRef idx="minor">
+              <a:schemeClr val="lt1"/>
+            </a:fontRef>
+          </p:style>
+          <p:txBody>
+            <a:bodyPr rtlCol="0" anchor="ctr"/>
+            <a:lstStyle/>
+            <a:p>
+              <a:pPr algn="ctr"/>
+              <a:endParaRPr lang="pt-BR" dirty="0"/>
+            </a:p>
+          </p:txBody>
+        </p:sp>
+        <p:sp>
+          <p:nvSpPr>
+            <p:cNvPr id="8" name="Retângulo 7">
+              <a:extLst>
+                <a:ext uri="{FF2B5EF4-FFF2-40B4-BE49-F238E27FC236}">
+                  <a16:creationId xmlns:a16="http://schemas.microsoft.com/office/drawing/2014/main" id="{F8939756-F12E-178B-D15A-2A5F85B7FB66}"/>
+                </a:ext>
+              </a:extLst>
+            </p:cNvPr>
+            <p:cNvSpPr/>
+            <p:nvPr/>
+          </p:nvSpPr>
+          <p:spPr>
+            <a:xfrm>
+              <a:off x="6092793" y="5293"/>
+              <a:ext cx="12011057" cy="1048378"/>
+            </a:xfrm>
+            <a:prstGeom prst="rect">
+              <a:avLst/>
+            </a:prstGeom>
+            <a:solidFill>
+              <a:schemeClr val="accent1">
+                <a:lumMod val="60000"/>
+                <a:lumOff val="40000"/>
+              </a:schemeClr>
+            </a:solidFill>
+            <a:ln>
+              <a:noFill/>
+            </a:ln>
+          </p:spPr>
+          <p:style>
+            <a:lnRef idx="2">
+              <a:schemeClr val="accent1">
+                <a:shade val="15000"/>
+              </a:schemeClr>
+            </a:lnRef>
+            <a:fillRef idx="1">
+              <a:schemeClr val="accent1"/>
+            </a:fillRef>
+            <a:effectRef idx="0">
+              <a:schemeClr val="accent1"/>
+            </a:effectRef>
+            <a:fontRef idx="minor">
+              <a:schemeClr val="lt1"/>
+            </a:fontRef>
+          </p:style>
+          <p:txBody>
+            <a:bodyPr rtlCol="0" anchor="ctr"/>
+            <a:lstStyle/>
+            <a:p>
+              <a:pPr algn="ctr"/>
+              <a:endParaRPr lang="pt-BR"/>
+            </a:p>
+          </p:txBody>
+        </p:sp>
+        <p:sp>
+          <p:nvSpPr>
+            <p:cNvPr id="9" name="Retângulo 5">
+              <a:extLst>
+                <a:ext uri="{FF2B5EF4-FFF2-40B4-BE49-F238E27FC236}">
+                  <a16:creationId xmlns:a16="http://schemas.microsoft.com/office/drawing/2014/main" id="{8ED6F3AB-AF2A-5C86-DFD4-84B61C59ADE7}"/>
+                </a:ext>
+              </a:extLst>
+            </p:cNvPr>
+            <p:cNvSpPr/>
+            <p:nvPr/>
+          </p:nvSpPr>
+          <p:spPr>
+            <a:xfrm>
+              <a:off x="0" y="5293"/>
+              <a:ext cx="7414358" cy="1188508"/>
+            </a:xfrm>
+            <a:custGeom>
+              <a:avLst/>
+              <a:gdLst>
+                <a:gd name="csX0" fmla="*/ 0 w 6202680"/>
+                <a:gd name="csY0" fmla="*/ 0 h 1075896"/>
+                <a:gd name="csX1" fmla="*/ 6202680 w 6202680"/>
+                <a:gd name="csY1" fmla="*/ 0 h 1075896"/>
+                <a:gd name="csX2" fmla="*/ 5105400 w 6202680"/>
+                <a:gd name="csY2" fmla="*/ 1045416 h 1075896"/>
+                <a:gd name="csX3" fmla="*/ 0 w 6202680"/>
+                <a:gd name="csY3" fmla="*/ 1075896 h 1075896"/>
+                <a:gd name="csX4" fmla="*/ 0 w 6202680"/>
+                <a:gd name="csY4" fmla="*/ 0 h 1075896"/>
+              </a:gdLst>
+              <a:ahLst/>
+              <a:cxnLst>
+                <a:cxn ang="0">
+                  <a:pos x="csX0" y="csY0"/>
+                </a:cxn>
+                <a:cxn ang="0">
+                  <a:pos x="csX1" y="csY1"/>
+                </a:cxn>
+                <a:cxn ang="0">
+                  <a:pos x="csX2" y="csY2"/>
+                </a:cxn>
+                <a:cxn ang="0">
+                  <a:pos x="csX3" y="csY3"/>
+                </a:cxn>
+                <a:cxn ang="0">
+                  <a:pos x="csX4" y="csY4"/>
+                </a:cxn>
+              </a:cxnLst>
+              <a:rect l="l" t="t" r="r" b="b"/>
+              <a:pathLst>
+                <a:path w="6202680" h="1075896">
+                  <a:moveTo>
+                    <a:pt x="0" y="0"/>
+                  </a:moveTo>
+                  <a:lnTo>
+                    <a:pt x="6202680" y="0"/>
+                  </a:lnTo>
+                  <a:cubicBezTo>
+                    <a:pt x="5836920" y="348472"/>
+                    <a:pt x="5156200" y="102584"/>
+                    <a:pt x="5105400" y="1045416"/>
+                  </a:cubicBezTo>
+                  <a:lnTo>
+                    <a:pt x="0" y="1075896"/>
+                  </a:lnTo>
+                  <a:lnTo>
+                    <a:pt x="0" y="0"/>
+                  </a:lnTo>
+                  <a:close/>
+                </a:path>
+              </a:pathLst>
+            </a:custGeom>
+            <a:solidFill>
+              <a:schemeClr val="accent1">
+                <a:lumMod val="75000"/>
+              </a:schemeClr>
+            </a:solidFill>
+            <a:ln>
+              <a:noFill/>
+            </a:ln>
+          </p:spPr>
+          <p:style>
+            <a:lnRef idx="2">
+              <a:schemeClr val="accent1">
+                <a:shade val="15000"/>
+              </a:schemeClr>
+            </a:lnRef>
+            <a:fillRef idx="1">
+              <a:schemeClr val="accent1"/>
+            </a:fillRef>
+            <a:effectRef idx="0">
+              <a:schemeClr val="accent1"/>
+            </a:effectRef>
+            <a:fontRef idx="minor">
+              <a:schemeClr val="lt1"/>
+            </a:fontRef>
+          </p:style>
+          <p:txBody>
+            <a:bodyPr rtlCol="0" anchor="ctr"/>
+            <a:lstStyle/>
+            <a:p>
+              <a:pPr algn="ctr"/>
+              <a:endParaRPr lang="pt-BR"/>
+            </a:p>
+          </p:txBody>
+        </p:sp>
+      </p:grpSp>
       <p:sp>
         <p:nvSpPr>
           <p:cNvPr id="33" name="Retângulo 32">
@@ -5298,7 +5413,7 @@
         </p:nvSpPr>
         <p:spPr>
           <a:xfrm>
-            <a:off x="0" y="95250"/>
+            <a:off x="291347" y="187424"/>
             <a:ext cx="5994400" cy="769441"/>
           </a:xfrm>
           <a:prstGeom prst="rect">
@@ -5364,8 +5479,8 @@
         </p:nvSpPr>
         <p:spPr>
           <a:xfrm>
-            <a:off x="373301" y="2730674"/>
-            <a:ext cx="5776978" cy="7437612"/>
+            <a:off x="6180140" y="1223842"/>
+            <a:ext cx="5005138" cy="8853722"/>
           </a:xfrm>
           <a:prstGeom prst="roundRect">
             <a:avLst>
@@ -5379,9 +5494,9 @@
             <a:noFill/>
           </a:ln>
           <a:effectLst>
-            <a:outerShdw blurRad="63500" sx="102000" sy="102000" algn="ctr" rotWithShape="0">
+            <a:outerShdw blurRad="63500" dist="88900" dir="2820000" algn="ctr" rotWithShape="0">
               <a:prstClr val="black">
-                <a:alpha val="18000"/>
+                <a:alpha val="20000"/>
               </a:prstClr>
             </a:outerShdw>
           </a:effectLst>
@@ -5407,7 +5522,7 @@
           <a:lstStyle/>
           <a:p>
             <a:pPr algn="ctr"/>
-            <a:endParaRPr lang="pt-BR"/>
+            <a:endParaRPr lang="pt-BR" dirty="0"/>
           </a:p>
         </p:txBody>
       </p:sp>
@@ -5425,8 +5540,8 @@
         </p:nvSpPr>
         <p:spPr>
           <a:xfrm>
-            <a:off x="11552740" y="1189973"/>
-            <a:ext cx="6378228" cy="4393787"/>
+            <a:off x="11552740" y="1223841"/>
+            <a:ext cx="6378228" cy="4320000"/>
           </a:xfrm>
           <a:prstGeom prst="roundRect">
             <a:avLst>
@@ -5440,9 +5555,9 @@
             <a:noFill/>
           </a:ln>
           <a:effectLst>
-            <a:outerShdw blurRad="63500" sx="102000" sy="102000" algn="ctr" rotWithShape="0">
+            <a:outerShdw blurRad="63500" dist="88900" dir="2820000" algn="ctr" rotWithShape="0">
               <a:prstClr val="black">
-                <a:alpha val="18000"/>
+                <a:alpha val="20000"/>
               </a:prstClr>
             </a:outerShdw>
           </a:effectLst>
@@ -5486,8 +5601,8 @@
         </p:nvSpPr>
         <p:spPr>
           <a:xfrm>
-            <a:off x="11552740" y="5774499"/>
-            <a:ext cx="6378228" cy="4393787"/>
+            <a:off x="11552740" y="5757563"/>
+            <a:ext cx="6378228" cy="4320000"/>
           </a:xfrm>
           <a:prstGeom prst="roundRect">
             <a:avLst>
@@ -5501,9 +5616,9 @@
             <a:noFill/>
           </a:ln>
           <a:effectLst>
-            <a:outerShdw blurRad="63500" sx="102000" sy="102000" algn="ctr" rotWithShape="0">
+            <a:outerShdw blurRad="63500" dist="88900" dir="2820000" algn="ctr" rotWithShape="0">
               <a:prstClr val="black">
-                <a:alpha val="18000"/>
+                <a:alpha val="20000"/>
               </a:prstClr>
             </a:outerShdw>
           </a:effectLst>
@@ -5533,446 +5648,488 @@
           </a:p>
         </p:txBody>
       </p:sp>
-      <p:sp>
-        <p:nvSpPr>
-          <p:cNvPr id="16" name="Forma Livre: Forma 15">
+      <p:grpSp>
+        <p:nvGrpSpPr>
+          <p:cNvPr id="17" name="Agrupar 16">
             <a:extLst>
               <a:ext uri="{FF2B5EF4-FFF2-40B4-BE49-F238E27FC236}">
-                <a16:creationId xmlns:a16="http://schemas.microsoft.com/office/drawing/2014/main" id="{BD8457FF-946D-DB0C-018E-EA9F733E28FA}"/>
+                <a16:creationId xmlns:a16="http://schemas.microsoft.com/office/drawing/2014/main" id="{C4D7A007-9BFC-7D77-DC99-56B25EDB8689}"/>
               </a:ext>
             </a:extLst>
           </p:cNvPr>
-          <p:cNvSpPr/>
+          <p:cNvGrpSpPr/>
           <p:nvPr/>
-        </p:nvSpPr>
-        <p:spPr>
+        </p:nvGrpSpPr>
+        <p:grpSpPr>
           <a:xfrm>
-            <a:off x="6365341" y="1732546"/>
-            <a:ext cx="2360908" cy="1129807"/>
+            <a:off x="291347" y="5940295"/>
+            <a:ext cx="5521331" cy="4137268"/>
+            <a:chOff x="295269" y="5940295"/>
+            <a:chExt cx="5521331" cy="4137268"/>
           </a:xfrm>
-          <a:custGeom>
-            <a:avLst/>
-            <a:gdLst>
-              <a:gd name="csX0" fmla="*/ 133353 w 2360908"/>
-              <a:gd name="csY0" fmla="*/ 0 h 1095484"/>
-              <a:gd name="csX1" fmla="*/ 2227555 w 2360908"/>
-              <a:gd name="csY1" fmla="*/ 0 h 1095484"/>
-              <a:gd name="csX2" fmla="*/ 2360908 w 2360908"/>
-              <a:gd name="csY2" fmla="*/ 133353 h 1095484"/>
-              <a:gd name="csX3" fmla="*/ 2360908 w 2360908"/>
-              <a:gd name="csY3" fmla="*/ 962131 h 1095484"/>
-              <a:gd name="csX4" fmla="*/ 2227555 w 2360908"/>
-              <a:gd name="csY4" fmla="*/ 1095484 h 1095484"/>
-              <a:gd name="csX5" fmla="*/ 133353 w 2360908"/>
-              <a:gd name="csY5" fmla="*/ 1095484 h 1095484"/>
-              <a:gd name="csX6" fmla="*/ 0 w 2360908"/>
-              <a:gd name="csY6" fmla="*/ 962131 h 1095484"/>
-              <a:gd name="csX7" fmla="*/ 0 w 2360908"/>
-              <a:gd name="csY7" fmla="*/ 133353 h 1095484"/>
-              <a:gd name="csX8" fmla="*/ 133353 w 2360908"/>
-              <a:gd name="csY8" fmla="*/ 0 h 1095484"/>
-            </a:gdLst>
-            <a:ahLst/>
-            <a:cxnLst>
-              <a:cxn ang="0">
-                <a:pos x="csX0" y="csY0"/>
-              </a:cxn>
-              <a:cxn ang="0">
-                <a:pos x="csX1" y="csY1"/>
-              </a:cxn>
-              <a:cxn ang="0">
-                <a:pos x="csX2" y="csY2"/>
-              </a:cxn>
-              <a:cxn ang="0">
-                <a:pos x="csX3" y="csY3"/>
-              </a:cxn>
-              <a:cxn ang="0">
-                <a:pos x="csX4" y="csY4"/>
-              </a:cxn>
-              <a:cxn ang="0">
-                <a:pos x="csX5" y="csY5"/>
-              </a:cxn>
-              <a:cxn ang="0">
-                <a:pos x="csX6" y="csY6"/>
-              </a:cxn>
-              <a:cxn ang="0">
-                <a:pos x="csX7" y="csY7"/>
-              </a:cxn>
-              <a:cxn ang="0">
-                <a:pos x="csX8" y="csY8"/>
-              </a:cxn>
-            </a:cxnLst>
-            <a:rect l="l" t="t" r="r" b="b"/>
-            <a:pathLst>
-              <a:path w="2360908" h="1095484">
-                <a:moveTo>
-                  <a:pt x="133353" y="0"/>
-                </a:moveTo>
-                <a:lnTo>
-                  <a:pt x="2227555" y="0"/>
-                </a:lnTo>
-                <a:cubicBezTo>
-                  <a:pt x="2301204" y="0"/>
-                  <a:pt x="2360908" y="59704"/>
-                  <a:pt x="2360908" y="133353"/>
-                </a:cubicBezTo>
-                <a:lnTo>
-                  <a:pt x="2360908" y="962131"/>
-                </a:lnTo>
-                <a:cubicBezTo>
-                  <a:pt x="2360908" y="1035780"/>
-                  <a:pt x="2301204" y="1095484"/>
-                  <a:pt x="2227555" y="1095484"/>
-                </a:cubicBezTo>
-                <a:lnTo>
-                  <a:pt x="133353" y="1095484"/>
-                </a:lnTo>
-                <a:cubicBezTo>
-                  <a:pt x="59704" y="1095484"/>
-                  <a:pt x="0" y="1035780"/>
-                  <a:pt x="0" y="962131"/>
-                </a:cubicBezTo>
-                <a:lnTo>
-                  <a:pt x="0" y="133353"/>
-                </a:lnTo>
-                <a:cubicBezTo>
-                  <a:pt x="0" y="59704"/>
-                  <a:pt x="59704" y="0"/>
-                  <a:pt x="133353" y="0"/>
-                </a:cubicBezTo>
-                <a:close/>
-              </a:path>
-            </a:pathLst>
-          </a:custGeom>
-          <a:gradFill>
-            <a:gsLst>
-              <a:gs pos="0">
-                <a:schemeClr val="accent1">
-                  <a:satMod val="103000"/>
-                  <a:lumMod val="102000"/>
-                  <a:tint val="94000"/>
-                </a:schemeClr>
-              </a:gs>
-              <a:gs pos="100000">
-                <a:schemeClr val="accent1">
-                  <a:lumMod val="99000"/>
-                  <a:satMod val="120000"/>
-                  <a:shade val="78000"/>
-                </a:schemeClr>
-              </a:gs>
-            </a:gsLst>
-          </a:gradFill>
-          <a:ln/>
-          <a:effectLst>
-            <a:outerShdw blurRad="63500" sx="102000" sy="102000" algn="ctr" rotWithShape="0">
-              <a:prstClr val="black">
-                <a:alpha val="40000"/>
-              </a:prstClr>
-            </a:outerShdw>
-          </a:effectLst>
-        </p:spPr>
-        <p:style>
-          <a:lnRef idx="0">
-            <a:schemeClr val="accent1"/>
-          </a:lnRef>
-          <a:fillRef idx="3">
-            <a:schemeClr val="accent1"/>
-          </a:fillRef>
-          <a:effectRef idx="3">
-            <a:schemeClr val="accent1"/>
-          </a:effectRef>
-          <a:fontRef idx="minor">
-            <a:schemeClr val="lt1"/>
-          </a:fontRef>
-        </p:style>
-        <p:txBody>
-          <a:bodyPr wrap="square" rtlCol="0" anchor="ctr">
-            <a:noAutofit/>
-          </a:bodyPr>
-          <a:lstStyle/>
-          <a:p>
-            <a:pPr algn="ctr"/>
-            <a:endParaRPr lang="pt-BR"/>
-          </a:p>
-        </p:txBody>
-      </p:sp>
-      <p:sp>
-        <p:nvSpPr>
-          <p:cNvPr id="15" name="Retângulo: Cantos Arredondados 14">
+        </p:grpSpPr>
+        <p:sp>
+          <p:nvSpPr>
+            <p:cNvPr id="16" name="Forma Livre: Forma 15">
+              <a:extLst>
+                <a:ext uri="{FF2B5EF4-FFF2-40B4-BE49-F238E27FC236}">
+                  <a16:creationId xmlns:a16="http://schemas.microsoft.com/office/drawing/2014/main" id="{BD8457FF-946D-DB0C-018E-EA9F733E28FA}"/>
+                </a:ext>
+              </a:extLst>
+            </p:cNvPr>
+            <p:cNvSpPr/>
+            <p:nvPr/>
+          </p:nvSpPr>
+          <p:spPr>
+            <a:xfrm>
+              <a:off x="385115" y="5940295"/>
+              <a:ext cx="2360908" cy="1129807"/>
+            </a:xfrm>
+            <a:custGeom>
+              <a:avLst/>
+              <a:gdLst>
+                <a:gd name="csX0" fmla="*/ 133353 w 2360908"/>
+                <a:gd name="csY0" fmla="*/ 0 h 1095484"/>
+                <a:gd name="csX1" fmla="*/ 2227555 w 2360908"/>
+                <a:gd name="csY1" fmla="*/ 0 h 1095484"/>
+                <a:gd name="csX2" fmla="*/ 2360908 w 2360908"/>
+                <a:gd name="csY2" fmla="*/ 133353 h 1095484"/>
+                <a:gd name="csX3" fmla="*/ 2360908 w 2360908"/>
+                <a:gd name="csY3" fmla="*/ 962131 h 1095484"/>
+                <a:gd name="csX4" fmla="*/ 2227555 w 2360908"/>
+                <a:gd name="csY4" fmla="*/ 1095484 h 1095484"/>
+                <a:gd name="csX5" fmla="*/ 133353 w 2360908"/>
+                <a:gd name="csY5" fmla="*/ 1095484 h 1095484"/>
+                <a:gd name="csX6" fmla="*/ 0 w 2360908"/>
+                <a:gd name="csY6" fmla="*/ 962131 h 1095484"/>
+                <a:gd name="csX7" fmla="*/ 0 w 2360908"/>
+                <a:gd name="csY7" fmla="*/ 133353 h 1095484"/>
+                <a:gd name="csX8" fmla="*/ 133353 w 2360908"/>
+                <a:gd name="csY8" fmla="*/ 0 h 1095484"/>
+              </a:gdLst>
+              <a:ahLst/>
+              <a:cxnLst>
+                <a:cxn ang="0">
+                  <a:pos x="csX0" y="csY0"/>
+                </a:cxn>
+                <a:cxn ang="0">
+                  <a:pos x="csX1" y="csY1"/>
+                </a:cxn>
+                <a:cxn ang="0">
+                  <a:pos x="csX2" y="csY2"/>
+                </a:cxn>
+                <a:cxn ang="0">
+                  <a:pos x="csX3" y="csY3"/>
+                </a:cxn>
+                <a:cxn ang="0">
+                  <a:pos x="csX4" y="csY4"/>
+                </a:cxn>
+                <a:cxn ang="0">
+                  <a:pos x="csX5" y="csY5"/>
+                </a:cxn>
+                <a:cxn ang="0">
+                  <a:pos x="csX6" y="csY6"/>
+                </a:cxn>
+                <a:cxn ang="0">
+                  <a:pos x="csX7" y="csY7"/>
+                </a:cxn>
+                <a:cxn ang="0">
+                  <a:pos x="csX8" y="csY8"/>
+                </a:cxn>
+              </a:cxnLst>
+              <a:rect l="l" t="t" r="r" b="b"/>
+              <a:pathLst>
+                <a:path w="2360908" h="1095484">
+                  <a:moveTo>
+                    <a:pt x="133353" y="0"/>
+                  </a:moveTo>
+                  <a:lnTo>
+                    <a:pt x="2227555" y="0"/>
+                  </a:lnTo>
+                  <a:cubicBezTo>
+                    <a:pt x="2301204" y="0"/>
+                    <a:pt x="2360908" y="59704"/>
+                    <a:pt x="2360908" y="133353"/>
+                  </a:cubicBezTo>
+                  <a:lnTo>
+                    <a:pt x="2360908" y="962131"/>
+                  </a:lnTo>
+                  <a:cubicBezTo>
+                    <a:pt x="2360908" y="1035780"/>
+                    <a:pt x="2301204" y="1095484"/>
+                    <a:pt x="2227555" y="1095484"/>
+                  </a:cubicBezTo>
+                  <a:lnTo>
+                    <a:pt x="133353" y="1095484"/>
+                  </a:lnTo>
+                  <a:cubicBezTo>
+                    <a:pt x="59704" y="1095484"/>
+                    <a:pt x="0" y="1035780"/>
+                    <a:pt x="0" y="962131"/>
+                  </a:cubicBezTo>
+                  <a:lnTo>
+                    <a:pt x="0" y="133353"/>
+                  </a:lnTo>
+                  <a:cubicBezTo>
+                    <a:pt x="0" y="59704"/>
+                    <a:pt x="59704" y="0"/>
+                    <a:pt x="133353" y="0"/>
+                  </a:cubicBezTo>
+                  <a:close/>
+                </a:path>
+              </a:pathLst>
+            </a:custGeom>
+            <a:gradFill>
+              <a:gsLst>
+                <a:gs pos="0">
+                  <a:schemeClr val="accent1">
+                    <a:satMod val="103000"/>
+                    <a:lumMod val="102000"/>
+                    <a:tint val="94000"/>
+                  </a:schemeClr>
+                </a:gs>
+                <a:gs pos="100000">
+                  <a:schemeClr val="accent1">
+                    <a:lumMod val="99000"/>
+                    <a:satMod val="120000"/>
+                    <a:shade val="78000"/>
+                  </a:schemeClr>
+                </a:gs>
+              </a:gsLst>
+            </a:gradFill>
+            <a:ln/>
+            <a:effectLst>
+              <a:outerShdw blurRad="63500" sx="102000" sy="102000" algn="ctr" rotWithShape="0">
+                <a:prstClr val="black">
+                  <a:alpha val="40000"/>
+                </a:prstClr>
+              </a:outerShdw>
+            </a:effectLst>
+          </p:spPr>
+          <p:style>
+            <a:lnRef idx="0">
+              <a:schemeClr val="accent1"/>
+            </a:lnRef>
+            <a:fillRef idx="3">
+              <a:schemeClr val="accent1"/>
+            </a:fillRef>
+            <a:effectRef idx="3">
+              <a:schemeClr val="accent1"/>
+            </a:effectRef>
+            <a:fontRef idx="minor">
+              <a:schemeClr val="lt1"/>
+            </a:fontRef>
+          </p:style>
+          <p:txBody>
+            <a:bodyPr wrap="square" rtlCol="0" anchor="ctr">
+              <a:noAutofit/>
+            </a:bodyPr>
+            <a:lstStyle/>
+            <a:p>
+              <a:pPr algn="ctr"/>
+              <a:endParaRPr lang="pt-BR"/>
+            </a:p>
+          </p:txBody>
+        </p:sp>
+        <p:sp>
+          <p:nvSpPr>
+            <p:cNvPr id="15" name="Retângulo: Cantos Arredondados 14">
+              <a:extLst>
+                <a:ext uri="{FF2B5EF4-FFF2-40B4-BE49-F238E27FC236}">
+                  <a16:creationId xmlns:a16="http://schemas.microsoft.com/office/drawing/2014/main" id="{D2AC0351-FE53-F828-0169-15ED03262C53}"/>
+                </a:ext>
+              </a:extLst>
+            </p:cNvPr>
+            <p:cNvSpPr/>
+            <p:nvPr/>
+          </p:nvSpPr>
+          <p:spPr>
+            <a:xfrm>
+              <a:off x="295269" y="6543299"/>
+              <a:ext cx="5521331" cy="3534264"/>
+            </a:xfrm>
+            <a:prstGeom prst="roundRect">
+              <a:avLst>
+                <a:gd name="adj" fmla="val 5770"/>
+              </a:avLst>
+            </a:prstGeom>
+            <a:solidFill>
+              <a:schemeClr val="bg1"/>
+            </a:solidFill>
+            <a:ln>
+              <a:noFill/>
+            </a:ln>
+            <a:effectLst>
+              <a:outerShdw blurRad="63500" sx="102000" sy="102000" algn="ctr" rotWithShape="0">
+                <a:prstClr val="black">
+                  <a:alpha val="18000"/>
+                </a:prstClr>
+              </a:outerShdw>
+            </a:effectLst>
+          </p:spPr>
+          <p:style>
+            <a:lnRef idx="2">
+              <a:schemeClr val="accent1">
+                <a:shade val="15000"/>
+              </a:schemeClr>
+            </a:lnRef>
+            <a:fillRef idx="1">
+              <a:schemeClr val="accent1"/>
+            </a:fillRef>
+            <a:effectRef idx="0">
+              <a:schemeClr val="accent1"/>
+            </a:effectRef>
+            <a:fontRef idx="minor">
+              <a:schemeClr val="lt1"/>
+            </a:fontRef>
+          </p:style>
+          <p:txBody>
+            <a:bodyPr rtlCol="0" anchor="ctr"/>
+            <a:lstStyle/>
+            <a:p>
+              <a:pPr algn="ctr"/>
+              <a:endParaRPr lang="pt-BR" dirty="0"/>
+            </a:p>
+          </p:txBody>
+        </p:sp>
+      </p:grpSp>
+      <p:grpSp>
+        <p:nvGrpSpPr>
+          <p:cNvPr id="19" name="Agrupar 18">
             <a:extLst>
               <a:ext uri="{FF2B5EF4-FFF2-40B4-BE49-F238E27FC236}">
-                <a16:creationId xmlns:a16="http://schemas.microsoft.com/office/drawing/2014/main" id="{D2AC0351-FE53-F828-0169-15ED03262C53}"/>
+                <a16:creationId xmlns:a16="http://schemas.microsoft.com/office/drawing/2014/main" id="{29BFDA6B-40E0-9FD6-A8F3-516602C20765}"/>
               </a:ext>
             </a:extLst>
           </p:cNvPr>
-          <p:cNvSpPr/>
+          <p:cNvGrpSpPr/>
           <p:nvPr/>
-        </p:nvSpPr>
-        <p:spPr>
+        </p:nvGrpSpPr>
+        <p:grpSpPr>
           <a:xfrm>
-            <a:off x="6323819" y="2329812"/>
-            <a:ext cx="2437889" cy="7838473"/>
+            <a:off x="291347" y="1513435"/>
+            <a:ext cx="5521331" cy="4137268"/>
+            <a:chOff x="295269" y="1406935"/>
+            <a:chExt cx="5521331" cy="4137268"/>
           </a:xfrm>
-          <a:prstGeom prst="roundRect">
-            <a:avLst>
-              <a:gd name="adj" fmla="val 5770"/>
-            </a:avLst>
-          </a:prstGeom>
-          <a:solidFill>
-            <a:schemeClr val="bg1"/>
-          </a:solidFill>
-          <a:ln>
-            <a:noFill/>
-          </a:ln>
-          <a:effectLst>
-            <a:outerShdw blurRad="63500" sx="102000" sy="102000" algn="ctr" rotWithShape="0">
-              <a:prstClr val="black">
-                <a:alpha val="18000"/>
-              </a:prstClr>
-            </a:outerShdw>
-          </a:effectLst>
-        </p:spPr>
-        <p:style>
-          <a:lnRef idx="2">
-            <a:schemeClr val="accent1">
-              <a:shade val="15000"/>
-            </a:schemeClr>
-          </a:lnRef>
-          <a:fillRef idx="1">
-            <a:schemeClr val="accent1"/>
-          </a:fillRef>
-          <a:effectRef idx="0">
-            <a:schemeClr val="accent1"/>
-          </a:effectRef>
-          <a:fontRef idx="minor">
-            <a:schemeClr val="lt1"/>
-          </a:fontRef>
-        </p:style>
-        <p:txBody>
-          <a:bodyPr rtlCol="0" anchor="ctr"/>
-          <a:lstStyle/>
-          <a:p>
-            <a:pPr algn="ctr"/>
-            <a:endParaRPr lang="pt-BR"/>
-          </a:p>
-        </p:txBody>
-      </p:sp>
-      <p:sp>
-        <p:nvSpPr>
-          <p:cNvPr id="18" name="Forma Livre: Forma 17">
-            <a:extLst>
-              <a:ext uri="{FF2B5EF4-FFF2-40B4-BE49-F238E27FC236}">
-                <a16:creationId xmlns:a16="http://schemas.microsoft.com/office/drawing/2014/main" id="{DC41A676-D325-E833-A6EC-8117ECF5F043}"/>
-              </a:ext>
-            </a:extLst>
-          </p:cNvPr>
-          <p:cNvSpPr/>
-          <p:nvPr/>
-        </p:nvSpPr>
-        <p:spPr>
-          <a:xfrm>
-            <a:off x="8976770" y="1732546"/>
-            <a:ext cx="2360908" cy="1129807"/>
-          </a:xfrm>
-          <a:custGeom>
-            <a:avLst/>
-            <a:gdLst>
-              <a:gd name="csX0" fmla="*/ 133353 w 2360908"/>
-              <a:gd name="csY0" fmla="*/ 0 h 1095484"/>
-              <a:gd name="csX1" fmla="*/ 2227555 w 2360908"/>
-              <a:gd name="csY1" fmla="*/ 0 h 1095484"/>
-              <a:gd name="csX2" fmla="*/ 2360908 w 2360908"/>
-              <a:gd name="csY2" fmla="*/ 133353 h 1095484"/>
-              <a:gd name="csX3" fmla="*/ 2360908 w 2360908"/>
-              <a:gd name="csY3" fmla="*/ 962131 h 1095484"/>
-              <a:gd name="csX4" fmla="*/ 2227555 w 2360908"/>
-              <a:gd name="csY4" fmla="*/ 1095484 h 1095484"/>
-              <a:gd name="csX5" fmla="*/ 133353 w 2360908"/>
-              <a:gd name="csY5" fmla="*/ 1095484 h 1095484"/>
-              <a:gd name="csX6" fmla="*/ 0 w 2360908"/>
-              <a:gd name="csY6" fmla="*/ 962131 h 1095484"/>
-              <a:gd name="csX7" fmla="*/ 0 w 2360908"/>
-              <a:gd name="csY7" fmla="*/ 133353 h 1095484"/>
-              <a:gd name="csX8" fmla="*/ 133353 w 2360908"/>
-              <a:gd name="csY8" fmla="*/ 0 h 1095484"/>
-            </a:gdLst>
-            <a:ahLst/>
-            <a:cxnLst>
-              <a:cxn ang="0">
-                <a:pos x="csX0" y="csY0"/>
-              </a:cxn>
-              <a:cxn ang="0">
-                <a:pos x="csX1" y="csY1"/>
-              </a:cxn>
-              <a:cxn ang="0">
-                <a:pos x="csX2" y="csY2"/>
-              </a:cxn>
-              <a:cxn ang="0">
-                <a:pos x="csX3" y="csY3"/>
-              </a:cxn>
-              <a:cxn ang="0">
-                <a:pos x="csX4" y="csY4"/>
-              </a:cxn>
-              <a:cxn ang="0">
-                <a:pos x="csX5" y="csY5"/>
-              </a:cxn>
-              <a:cxn ang="0">
-                <a:pos x="csX6" y="csY6"/>
-              </a:cxn>
-              <a:cxn ang="0">
-                <a:pos x="csX7" y="csY7"/>
-              </a:cxn>
-              <a:cxn ang="0">
-                <a:pos x="csX8" y="csY8"/>
-              </a:cxn>
-            </a:cxnLst>
-            <a:rect l="l" t="t" r="r" b="b"/>
-            <a:pathLst>
-              <a:path w="2360908" h="1095484">
-                <a:moveTo>
-                  <a:pt x="133353" y="0"/>
-                </a:moveTo>
-                <a:lnTo>
-                  <a:pt x="2227555" y="0"/>
-                </a:lnTo>
-                <a:cubicBezTo>
-                  <a:pt x="2301204" y="0"/>
-                  <a:pt x="2360908" y="59704"/>
-                  <a:pt x="2360908" y="133353"/>
-                </a:cubicBezTo>
-                <a:lnTo>
-                  <a:pt x="2360908" y="962131"/>
-                </a:lnTo>
-                <a:cubicBezTo>
-                  <a:pt x="2360908" y="1035780"/>
-                  <a:pt x="2301204" y="1095484"/>
-                  <a:pt x="2227555" y="1095484"/>
-                </a:cubicBezTo>
-                <a:lnTo>
-                  <a:pt x="133353" y="1095484"/>
-                </a:lnTo>
-                <a:cubicBezTo>
-                  <a:pt x="59704" y="1095484"/>
-                  <a:pt x="0" y="1035780"/>
-                  <a:pt x="0" y="962131"/>
-                </a:cubicBezTo>
-                <a:lnTo>
-                  <a:pt x="0" y="133353"/>
-                </a:lnTo>
-                <a:cubicBezTo>
-                  <a:pt x="0" y="59704"/>
-                  <a:pt x="59704" y="0"/>
-                  <a:pt x="133353" y="0"/>
-                </a:cubicBezTo>
-                <a:close/>
-              </a:path>
-            </a:pathLst>
-          </a:custGeom>
-          <a:gradFill>
-            <a:gsLst>
-              <a:gs pos="0">
-                <a:srgbClr val="FFC000"/>
-              </a:gs>
-              <a:gs pos="100000">
-                <a:srgbClr val="DFDA00"/>
-              </a:gs>
-            </a:gsLst>
-          </a:gradFill>
-          <a:ln/>
-          <a:effectLst>
-            <a:outerShdw blurRad="63500" sx="102000" sy="102000" algn="ctr" rotWithShape="0">
-              <a:prstClr val="black">
-                <a:alpha val="40000"/>
-              </a:prstClr>
-            </a:outerShdw>
-          </a:effectLst>
-        </p:spPr>
-        <p:style>
-          <a:lnRef idx="0">
-            <a:schemeClr val="accent1"/>
-          </a:lnRef>
-          <a:fillRef idx="3">
-            <a:schemeClr val="accent1"/>
-          </a:fillRef>
-          <a:effectRef idx="3">
-            <a:schemeClr val="accent1"/>
-          </a:effectRef>
-          <a:fontRef idx="minor">
-            <a:schemeClr val="lt1"/>
-          </a:fontRef>
-        </p:style>
-        <p:txBody>
-          <a:bodyPr wrap="square" rtlCol="0" anchor="ctr">
-            <a:noAutofit/>
-          </a:bodyPr>
-          <a:lstStyle/>
-          <a:p>
-            <a:pPr algn="ctr"/>
-            <a:endParaRPr lang="pt-BR"/>
-          </a:p>
-        </p:txBody>
-      </p:sp>
-      <p:sp>
-        <p:nvSpPr>
-          <p:cNvPr id="20" name="Retângulo: Cantos Arredondados 19">
-            <a:extLst>
-              <a:ext uri="{FF2B5EF4-FFF2-40B4-BE49-F238E27FC236}">
-                <a16:creationId xmlns:a16="http://schemas.microsoft.com/office/drawing/2014/main" id="{10112B6D-A183-12BE-22EE-2043C92C1D50}"/>
-              </a:ext>
-            </a:extLst>
-          </p:cNvPr>
-          <p:cNvSpPr/>
-          <p:nvPr/>
-        </p:nvSpPr>
-        <p:spPr>
-          <a:xfrm>
-            <a:off x="8935248" y="2329812"/>
-            <a:ext cx="2437889" cy="7838473"/>
-          </a:xfrm>
-          <a:prstGeom prst="roundRect">
-            <a:avLst>
-              <a:gd name="adj" fmla="val 5770"/>
-            </a:avLst>
-          </a:prstGeom>
-          <a:solidFill>
-            <a:schemeClr val="bg1"/>
-          </a:solidFill>
-          <a:ln>
-            <a:noFill/>
-          </a:ln>
-          <a:effectLst>
-            <a:outerShdw blurRad="63500" sx="102000" sy="102000" algn="ctr" rotWithShape="0">
-              <a:prstClr val="black">
-                <a:alpha val="18000"/>
-              </a:prstClr>
-            </a:outerShdw>
-          </a:effectLst>
-        </p:spPr>
-        <p:style>
-          <a:lnRef idx="2">
-            <a:schemeClr val="accent1">
-              <a:shade val="15000"/>
-            </a:schemeClr>
-          </a:lnRef>
-          <a:fillRef idx="1">
-            <a:schemeClr val="accent1"/>
-          </a:fillRef>
-          <a:effectRef idx="0">
-            <a:schemeClr val="accent1"/>
-          </a:effectRef>
-          <a:fontRef idx="minor">
-            <a:schemeClr val="lt1"/>
-          </a:fontRef>
-        </p:style>
-        <p:txBody>
-          <a:bodyPr rtlCol="0" anchor="ctr"/>
-          <a:lstStyle/>
-          <a:p>
-            <a:pPr algn="ctr"/>
-            <a:endParaRPr lang="pt-BR"/>
-          </a:p>
-        </p:txBody>
-      </p:sp>
+        </p:grpSpPr>
+        <p:sp>
+          <p:nvSpPr>
+            <p:cNvPr id="18" name="Forma Livre: Forma 17">
+              <a:extLst>
+                <a:ext uri="{FF2B5EF4-FFF2-40B4-BE49-F238E27FC236}">
+                  <a16:creationId xmlns:a16="http://schemas.microsoft.com/office/drawing/2014/main" id="{DC41A676-D325-E833-A6EC-8117ECF5F043}"/>
+                </a:ext>
+              </a:extLst>
+            </p:cNvPr>
+            <p:cNvSpPr/>
+            <p:nvPr/>
+          </p:nvSpPr>
+          <p:spPr>
+            <a:xfrm>
+              <a:off x="3392192" y="1406935"/>
+              <a:ext cx="2360908" cy="1129807"/>
+            </a:xfrm>
+            <a:custGeom>
+              <a:avLst/>
+              <a:gdLst>
+                <a:gd name="csX0" fmla="*/ 133353 w 2360908"/>
+                <a:gd name="csY0" fmla="*/ 0 h 1095484"/>
+                <a:gd name="csX1" fmla="*/ 2227555 w 2360908"/>
+                <a:gd name="csY1" fmla="*/ 0 h 1095484"/>
+                <a:gd name="csX2" fmla="*/ 2360908 w 2360908"/>
+                <a:gd name="csY2" fmla="*/ 133353 h 1095484"/>
+                <a:gd name="csX3" fmla="*/ 2360908 w 2360908"/>
+                <a:gd name="csY3" fmla="*/ 962131 h 1095484"/>
+                <a:gd name="csX4" fmla="*/ 2227555 w 2360908"/>
+                <a:gd name="csY4" fmla="*/ 1095484 h 1095484"/>
+                <a:gd name="csX5" fmla="*/ 133353 w 2360908"/>
+                <a:gd name="csY5" fmla="*/ 1095484 h 1095484"/>
+                <a:gd name="csX6" fmla="*/ 0 w 2360908"/>
+                <a:gd name="csY6" fmla="*/ 962131 h 1095484"/>
+                <a:gd name="csX7" fmla="*/ 0 w 2360908"/>
+                <a:gd name="csY7" fmla="*/ 133353 h 1095484"/>
+                <a:gd name="csX8" fmla="*/ 133353 w 2360908"/>
+                <a:gd name="csY8" fmla="*/ 0 h 1095484"/>
+              </a:gdLst>
+              <a:ahLst/>
+              <a:cxnLst>
+                <a:cxn ang="0">
+                  <a:pos x="csX0" y="csY0"/>
+                </a:cxn>
+                <a:cxn ang="0">
+                  <a:pos x="csX1" y="csY1"/>
+                </a:cxn>
+                <a:cxn ang="0">
+                  <a:pos x="csX2" y="csY2"/>
+                </a:cxn>
+                <a:cxn ang="0">
+                  <a:pos x="csX3" y="csY3"/>
+                </a:cxn>
+                <a:cxn ang="0">
+                  <a:pos x="csX4" y="csY4"/>
+                </a:cxn>
+                <a:cxn ang="0">
+                  <a:pos x="csX5" y="csY5"/>
+                </a:cxn>
+                <a:cxn ang="0">
+                  <a:pos x="csX6" y="csY6"/>
+                </a:cxn>
+                <a:cxn ang="0">
+                  <a:pos x="csX7" y="csY7"/>
+                </a:cxn>
+                <a:cxn ang="0">
+                  <a:pos x="csX8" y="csY8"/>
+                </a:cxn>
+              </a:cxnLst>
+              <a:rect l="l" t="t" r="r" b="b"/>
+              <a:pathLst>
+                <a:path w="2360908" h="1095484">
+                  <a:moveTo>
+                    <a:pt x="133353" y="0"/>
+                  </a:moveTo>
+                  <a:lnTo>
+                    <a:pt x="2227555" y="0"/>
+                  </a:lnTo>
+                  <a:cubicBezTo>
+                    <a:pt x="2301204" y="0"/>
+                    <a:pt x="2360908" y="59704"/>
+                    <a:pt x="2360908" y="133353"/>
+                  </a:cubicBezTo>
+                  <a:lnTo>
+                    <a:pt x="2360908" y="962131"/>
+                  </a:lnTo>
+                  <a:cubicBezTo>
+                    <a:pt x="2360908" y="1035780"/>
+                    <a:pt x="2301204" y="1095484"/>
+                    <a:pt x="2227555" y="1095484"/>
+                  </a:cubicBezTo>
+                  <a:lnTo>
+                    <a:pt x="133353" y="1095484"/>
+                  </a:lnTo>
+                  <a:cubicBezTo>
+                    <a:pt x="59704" y="1095484"/>
+                    <a:pt x="0" y="1035780"/>
+                    <a:pt x="0" y="962131"/>
+                  </a:cubicBezTo>
+                  <a:lnTo>
+                    <a:pt x="0" y="133353"/>
+                  </a:lnTo>
+                  <a:cubicBezTo>
+                    <a:pt x="0" y="59704"/>
+                    <a:pt x="59704" y="0"/>
+                    <a:pt x="133353" y="0"/>
+                  </a:cubicBezTo>
+                  <a:close/>
+                </a:path>
+              </a:pathLst>
+            </a:custGeom>
+            <a:gradFill>
+              <a:gsLst>
+                <a:gs pos="0">
+                  <a:srgbClr val="FFC000"/>
+                </a:gs>
+                <a:gs pos="100000">
+                  <a:srgbClr val="DFDA00"/>
+                </a:gs>
+              </a:gsLst>
+            </a:gradFill>
+            <a:ln/>
+            <a:effectLst>
+              <a:outerShdw blurRad="63500" sx="102000" sy="102000" algn="ctr" rotWithShape="0">
+                <a:prstClr val="black">
+                  <a:alpha val="40000"/>
+                </a:prstClr>
+              </a:outerShdw>
+            </a:effectLst>
+          </p:spPr>
+          <p:style>
+            <a:lnRef idx="0">
+              <a:schemeClr val="accent1"/>
+            </a:lnRef>
+            <a:fillRef idx="3">
+              <a:schemeClr val="accent1"/>
+            </a:fillRef>
+            <a:effectRef idx="3">
+              <a:schemeClr val="accent1"/>
+            </a:effectRef>
+            <a:fontRef idx="minor">
+              <a:schemeClr val="lt1"/>
+            </a:fontRef>
+          </p:style>
+          <p:txBody>
+            <a:bodyPr wrap="square" rtlCol="0" anchor="ctr">
+              <a:noAutofit/>
+            </a:bodyPr>
+            <a:lstStyle/>
+            <a:p>
+              <a:pPr algn="ctr"/>
+              <a:endParaRPr lang="pt-BR"/>
+            </a:p>
+          </p:txBody>
+        </p:sp>
+        <p:sp>
+          <p:nvSpPr>
+            <p:cNvPr id="14" name="Retângulo: Cantos Arredondados 13">
+              <a:extLst>
+                <a:ext uri="{FF2B5EF4-FFF2-40B4-BE49-F238E27FC236}">
+                  <a16:creationId xmlns:a16="http://schemas.microsoft.com/office/drawing/2014/main" id="{E77DB7DA-6DC2-4BDF-AC91-9FB98AF44DF9}"/>
+                </a:ext>
+              </a:extLst>
+            </p:cNvPr>
+            <p:cNvSpPr/>
+            <p:nvPr/>
+          </p:nvSpPr>
+          <p:spPr>
+            <a:xfrm>
+              <a:off x="295269" y="2009939"/>
+              <a:ext cx="5521331" cy="3534264"/>
+            </a:xfrm>
+            <a:prstGeom prst="roundRect">
+              <a:avLst>
+                <a:gd name="adj" fmla="val 5770"/>
+              </a:avLst>
+            </a:prstGeom>
+            <a:solidFill>
+              <a:schemeClr val="bg1"/>
+            </a:solidFill>
+            <a:ln>
+              <a:noFill/>
+            </a:ln>
+            <a:effectLst>
+              <a:outerShdw blurRad="63500" dist="88900" dir="2820000" algn="ctr" rotWithShape="0">
+                <a:prstClr val="black">
+                  <a:alpha val="20000"/>
+                </a:prstClr>
+              </a:outerShdw>
+            </a:effectLst>
+          </p:spPr>
+          <p:style>
+            <a:lnRef idx="2">
+              <a:schemeClr val="accent1">
+                <a:shade val="15000"/>
+              </a:schemeClr>
+            </a:lnRef>
+            <a:fillRef idx="1">
+              <a:schemeClr val="accent1"/>
+            </a:fillRef>
+            <a:effectRef idx="0">
+              <a:schemeClr val="accent1"/>
+            </a:effectRef>
+            <a:fontRef idx="minor">
+              <a:schemeClr val="lt1"/>
+            </a:fontRef>
+          </p:style>
+          <p:txBody>
+            <a:bodyPr rtlCol="0" anchor="ctr"/>
+            <a:lstStyle/>
+            <a:p>
+              <a:pPr algn="ctr"/>
+              <a:endParaRPr lang="pt-BR"/>
+            </a:p>
+          </p:txBody>
+        </p:sp>
+      </p:grpSp>
     </p:spTree>
     <p:extLst>
       <p:ext uri="{BB962C8B-B14F-4D97-AF65-F5344CB8AC3E}">
@@ -6009,450 +6166,294 @@
           <a:chExt cx="0" cy="0"/>
         </a:xfrm>
       </p:grpSpPr>
-      <p:sp>
-        <p:nvSpPr>
-          <p:cNvPr id="2" name="Retângulo: Cantos Arredondados 1">
+      <p:grpSp>
+        <p:nvGrpSpPr>
+          <p:cNvPr id="3" name="Agrupar 2">
             <a:extLst>
               <a:ext uri="{FF2B5EF4-FFF2-40B4-BE49-F238E27FC236}">
-                <a16:creationId xmlns:a16="http://schemas.microsoft.com/office/drawing/2014/main" id="{C3C47737-73D5-9728-85D2-30A3B7A3AFEC}"/>
+                <a16:creationId xmlns:a16="http://schemas.microsoft.com/office/drawing/2014/main" id="{89C6F816-872A-8E14-3DB5-106499F595AE}"/>
               </a:ext>
             </a:extLst>
           </p:cNvPr>
-          <p:cNvSpPr/>
+          <p:cNvGrpSpPr/>
           <p:nvPr/>
-        </p:nvSpPr>
-        <p:spPr>
+        </p:nvGrpSpPr>
+        <p:grpSpPr>
           <a:xfrm>
-            <a:off x="5213123" y="-155486"/>
-            <a:ext cx="8875410" cy="1245141"/>
+            <a:off x="0" y="5293"/>
+            <a:ext cx="18103850" cy="1188508"/>
+            <a:chOff x="0" y="5293"/>
+            <a:chExt cx="18103850" cy="1188508"/>
           </a:xfrm>
-          <a:prstGeom prst="roundRect">
-            <a:avLst>
-              <a:gd name="adj" fmla="val 29904"/>
-            </a:avLst>
-          </a:prstGeom>
-          <a:gradFill flip="none" rotWithShape="1">
-            <a:gsLst>
-              <a:gs pos="0">
-                <a:schemeClr val="accent1">
-                  <a:lumMod val="67000"/>
-                </a:schemeClr>
-              </a:gs>
-              <a:gs pos="48000">
-                <a:schemeClr val="accent1">
-                  <a:lumMod val="97000"/>
-                  <a:lumOff val="3000"/>
-                </a:schemeClr>
-              </a:gs>
-              <a:gs pos="100000">
-                <a:schemeClr val="accent1">
-                  <a:lumMod val="60000"/>
-                  <a:lumOff val="40000"/>
-                </a:schemeClr>
-              </a:gs>
-            </a:gsLst>
-            <a:lin ang="16200000" scaled="1"/>
-            <a:tileRect/>
-          </a:gradFill>
-          <a:ln>
-            <a:noFill/>
-          </a:ln>
-        </p:spPr>
-        <p:style>
-          <a:lnRef idx="0">
-            <a:scrgbClr r="0" g="0" b="0"/>
-          </a:lnRef>
-          <a:fillRef idx="0">
-            <a:scrgbClr r="0" g="0" b="0"/>
-          </a:fillRef>
-          <a:effectRef idx="0">
-            <a:scrgbClr r="0" g="0" b="0"/>
-          </a:effectRef>
-          <a:fontRef idx="minor">
-            <a:schemeClr val="lt1"/>
-          </a:fontRef>
-        </p:style>
-        <p:txBody>
-          <a:bodyPr rtlCol="0" anchor="ctr"/>
-          <a:lstStyle/>
-          <a:p>
-            <a:pPr algn="ctr"/>
-            <a:r>
-              <a:rPr lang="pt-BR" dirty="0"/>
-              <a:t> </a:t>
-            </a:r>
-          </a:p>
-        </p:txBody>
-      </p:sp>
-      <p:sp>
-        <p:nvSpPr>
-          <p:cNvPr id="75" name="Forma Livre: Forma 74">
-            <a:extLst>
-              <a:ext uri="{FF2B5EF4-FFF2-40B4-BE49-F238E27FC236}">
-                <a16:creationId xmlns:a16="http://schemas.microsoft.com/office/drawing/2014/main" id="{6FBA34B5-6300-27CA-4688-3A9DAFA28035}"/>
-              </a:ext>
-            </a:extLst>
-          </p:cNvPr>
-          <p:cNvSpPr/>
-          <p:nvPr/>
-        </p:nvSpPr>
-        <p:spPr>
-          <a:xfrm>
-            <a:off x="-1611087" y="-1204875"/>
-            <a:ext cx="20745591" cy="12235730"/>
-          </a:xfrm>
-          <a:custGeom>
-            <a:avLst/>
-            <a:gdLst>
-              <a:gd name="csX0" fmla="*/ 7433614 w 20745591"/>
-              <a:gd name="csY0" fmla="*/ 0 h 12235730"/>
-              <a:gd name="csX1" fmla="*/ 20005643 w 20745591"/>
-              <a:gd name="csY1" fmla="*/ 0 h 12235730"/>
-              <a:gd name="csX2" fmla="*/ 20445607 w 20745591"/>
-              <a:gd name="csY2" fmla="*/ 439963 h 12235730"/>
-              <a:gd name="csX3" fmla="*/ 20445607 w 20745591"/>
-              <a:gd name="csY3" fmla="*/ 1014678 h 12235730"/>
-              <a:gd name="csX4" fmla="*/ 20476139 w 20745591"/>
-              <a:gd name="csY4" fmla="*/ 1017757 h 12235730"/>
-              <a:gd name="csX5" fmla="*/ 20734203 w 20745591"/>
-              <a:gd name="csY5" fmla="*/ 1240166 h 12235730"/>
-              <a:gd name="csX6" fmla="*/ 20745591 w 20745591"/>
-              <a:gd name="csY6" fmla="*/ 1304700 h 12235730"/>
-              <a:gd name="csX7" fmla="*/ 7763393 w 20745591"/>
-              <a:gd name="csY7" fmla="*/ 1304700 h 12235730"/>
-              <a:gd name="csX8" fmla="*/ 7561295 w 20745591"/>
-              <a:gd name="csY8" fmla="*/ 1506798 h 12235730"/>
-              <a:gd name="csX9" fmla="*/ 7561295 w 20745591"/>
-              <a:gd name="csY9" fmla="*/ 1952773 h 12235730"/>
-              <a:gd name="csX10" fmla="*/ 7554839 w 20745591"/>
-              <a:gd name="csY10" fmla="*/ 2016809 h 12235730"/>
-              <a:gd name="csX11" fmla="*/ 7212163 w 20745591"/>
-              <a:gd name="csY11" fmla="*/ 2296098 h 12235730"/>
-              <a:gd name="csX12" fmla="*/ 7112004 w 20745591"/>
-              <a:gd name="csY12" fmla="*/ 2296098 h 12235730"/>
-              <a:gd name="csX13" fmla="*/ 2747714 w 20745591"/>
-              <a:gd name="csY13" fmla="*/ 2296098 h 12235730"/>
-              <a:gd name="csX14" fmla="*/ 2747715 w 20745591"/>
-              <a:gd name="csY14" fmla="*/ 2296099 h 12235730"/>
-              <a:gd name="csX15" fmla="*/ 2198812 w 20745591"/>
-              <a:gd name="csY15" fmla="*/ 2296099 h 12235730"/>
-              <a:gd name="csX16" fmla="*/ 1756234 w 20745591"/>
-              <a:gd name="csY16" fmla="*/ 2738677 h 12235730"/>
-              <a:gd name="csX17" fmla="*/ 1756234 w 20745591"/>
-              <a:gd name="csY17" fmla="*/ 11909268 h 12235730"/>
-              <a:gd name="csX18" fmla="*/ 1885862 w 20745591"/>
-              <a:gd name="csY18" fmla="*/ 12222218 h 12235730"/>
-              <a:gd name="csX19" fmla="*/ 1902239 w 20745591"/>
-              <a:gd name="csY19" fmla="*/ 12235730 h 12235730"/>
-              <a:gd name="csX20" fmla="*/ 750402 w 20745591"/>
-              <a:gd name="csY20" fmla="*/ 12235730 h 12235730"/>
-              <a:gd name="csX21" fmla="*/ 0 w 20745591"/>
-              <a:gd name="csY21" fmla="*/ 11485328 h 12235730"/>
-              <a:gd name="csX22" fmla="*/ 0 w 20745591"/>
-              <a:gd name="csY22" fmla="*/ 2395311 h 12235730"/>
-              <a:gd name="csX23" fmla="*/ 15246 w 20745591"/>
-              <a:gd name="csY23" fmla="*/ 2244079 h 12235730"/>
-              <a:gd name="csX24" fmla="*/ 51615 w 20745591"/>
-              <a:gd name="csY24" fmla="*/ 2126917 h 12235730"/>
-              <a:gd name="csX25" fmla="*/ 27488 w 20745591"/>
-              <a:gd name="csY25" fmla="*/ 2082467 h 12235730"/>
-              <a:gd name="csX26" fmla="*/ 0 w 20745591"/>
-              <a:gd name="csY26" fmla="*/ 1946315 h 12235730"/>
-              <a:gd name="csX27" fmla="*/ 0 w 20745591"/>
-              <a:gd name="csY27" fmla="*/ 1360433 h 12235730"/>
-              <a:gd name="csX28" fmla="*/ 349783 w 20745591"/>
-              <a:gd name="csY28" fmla="*/ 1010650 h 12235730"/>
-              <a:gd name="csX29" fmla="*/ 349784 w 20745591"/>
-              <a:gd name="csY29" fmla="*/ 1010650 h 12235730"/>
-              <a:gd name="csX30" fmla="*/ 6993649 w 20745591"/>
-              <a:gd name="csY30" fmla="*/ 1010650 h 12235730"/>
-              <a:gd name="csX31" fmla="*/ 6993649 w 20745591"/>
-              <a:gd name="csY31" fmla="*/ 439963 h 12235730"/>
-              <a:gd name="csX32" fmla="*/ 7433614 w 20745591"/>
-              <a:gd name="csY32" fmla="*/ 0 h 12235730"/>
-            </a:gdLst>
-            <a:ahLst/>
-            <a:cxnLst>
-              <a:cxn ang="0">
-                <a:pos x="csX0" y="csY0"/>
-              </a:cxn>
-              <a:cxn ang="0">
-                <a:pos x="csX1" y="csY1"/>
-              </a:cxn>
-              <a:cxn ang="0">
-                <a:pos x="csX2" y="csY2"/>
-              </a:cxn>
-              <a:cxn ang="0">
-                <a:pos x="csX3" y="csY3"/>
-              </a:cxn>
-              <a:cxn ang="0">
-                <a:pos x="csX4" y="csY4"/>
-              </a:cxn>
-              <a:cxn ang="0">
-                <a:pos x="csX5" y="csY5"/>
-              </a:cxn>
-              <a:cxn ang="0">
-                <a:pos x="csX6" y="csY6"/>
-              </a:cxn>
-              <a:cxn ang="0">
-                <a:pos x="csX7" y="csY7"/>
-              </a:cxn>
-              <a:cxn ang="0">
-                <a:pos x="csX8" y="csY8"/>
-              </a:cxn>
-              <a:cxn ang="0">
-                <a:pos x="csX9" y="csY9"/>
-              </a:cxn>
-              <a:cxn ang="0">
-                <a:pos x="csX10" y="csY10"/>
-              </a:cxn>
-              <a:cxn ang="0">
-                <a:pos x="csX11" y="csY11"/>
-              </a:cxn>
-              <a:cxn ang="0">
-                <a:pos x="csX12" y="csY12"/>
-              </a:cxn>
-              <a:cxn ang="0">
-                <a:pos x="csX13" y="csY13"/>
-              </a:cxn>
-              <a:cxn ang="0">
-                <a:pos x="csX14" y="csY14"/>
-              </a:cxn>
-              <a:cxn ang="0">
-                <a:pos x="csX15" y="csY15"/>
-              </a:cxn>
-              <a:cxn ang="0">
-                <a:pos x="csX16" y="csY16"/>
-              </a:cxn>
-              <a:cxn ang="0">
-                <a:pos x="csX17" y="csY17"/>
-              </a:cxn>
-              <a:cxn ang="0">
-                <a:pos x="csX18" y="csY18"/>
-              </a:cxn>
-              <a:cxn ang="0">
-                <a:pos x="csX19" y="csY19"/>
-              </a:cxn>
-              <a:cxn ang="0">
-                <a:pos x="csX20" y="csY20"/>
-              </a:cxn>
-              <a:cxn ang="0">
-                <a:pos x="csX21" y="csY21"/>
-              </a:cxn>
-              <a:cxn ang="0">
-                <a:pos x="csX22" y="csY22"/>
-              </a:cxn>
-              <a:cxn ang="0">
-                <a:pos x="csX23" y="csY23"/>
-              </a:cxn>
-              <a:cxn ang="0">
-                <a:pos x="csX24" y="csY24"/>
-              </a:cxn>
-              <a:cxn ang="0">
-                <a:pos x="csX25" y="csY25"/>
-              </a:cxn>
-              <a:cxn ang="0">
-                <a:pos x="csX26" y="csY26"/>
-              </a:cxn>
-              <a:cxn ang="0">
-                <a:pos x="csX27" y="csY27"/>
-              </a:cxn>
-              <a:cxn ang="0">
-                <a:pos x="csX28" y="csY28"/>
-              </a:cxn>
-              <a:cxn ang="0">
-                <a:pos x="csX29" y="csY29"/>
-              </a:cxn>
-              <a:cxn ang="0">
-                <a:pos x="csX30" y="csY30"/>
-              </a:cxn>
-              <a:cxn ang="0">
-                <a:pos x="csX31" y="csY31"/>
-              </a:cxn>
-              <a:cxn ang="0">
-                <a:pos x="csX32" y="csY32"/>
-              </a:cxn>
-            </a:cxnLst>
-            <a:rect l="l" t="t" r="r" b="b"/>
-            <a:pathLst>
-              <a:path w="20745591" h="12235730">
-                <a:moveTo>
-                  <a:pt x="7433614" y="0"/>
-                </a:moveTo>
-                <a:lnTo>
-                  <a:pt x="20005643" y="0"/>
-                </a:lnTo>
-                <a:cubicBezTo>
-                  <a:pt x="20248627" y="0"/>
-                  <a:pt x="20445607" y="196978"/>
-                  <a:pt x="20445607" y="439963"/>
-                </a:cubicBezTo>
-                <a:lnTo>
-                  <a:pt x="20445607" y="1014678"/>
-                </a:lnTo>
-                <a:lnTo>
-                  <a:pt x="20476139" y="1017757"/>
-                </a:lnTo>
-                <a:cubicBezTo>
-                  <a:pt x="20595683" y="1042218"/>
-                  <a:pt x="20693011" y="1127663"/>
-                  <a:pt x="20734203" y="1240166"/>
-                </a:cubicBezTo>
-                <a:lnTo>
-                  <a:pt x="20745591" y="1304700"/>
-                </a:lnTo>
-                <a:lnTo>
-                  <a:pt x="7763393" y="1304700"/>
-                </a:lnTo>
-                <a:cubicBezTo>
-                  <a:pt x="7651776" y="1304700"/>
-                  <a:pt x="7561295" y="1395182"/>
-                  <a:pt x="7561295" y="1506798"/>
-                </a:cubicBezTo>
-                <a:lnTo>
-                  <a:pt x="7561295" y="1952773"/>
-                </a:lnTo>
-                <a:lnTo>
-                  <a:pt x="7554839" y="2016809"/>
-                </a:lnTo>
-                <a:cubicBezTo>
-                  <a:pt x="7522224" y="2176199"/>
-                  <a:pt x="7381196" y="2296098"/>
-                  <a:pt x="7212163" y="2296098"/>
-                </a:cubicBezTo>
-                <a:lnTo>
-                  <a:pt x="7112004" y="2296098"/>
-                </a:lnTo>
-                <a:lnTo>
-                  <a:pt x="2747714" y="2296098"/>
-                </a:lnTo>
-                <a:lnTo>
-                  <a:pt x="2747715" y="2296099"/>
-                </a:lnTo>
-                <a:lnTo>
-                  <a:pt x="2198812" y="2296099"/>
-                </a:lnTo>
-                <a:cubicBezTo>
-                  <a:pt x="1954383" y="2296099"/>
-                  <a:pt x="1756234" y="2494248"/>
-                  <a:pt x="1756234" y="2738677"/>
-                </a:cubicBezTo>
-                <a:lnTo>
-                  <a:pt x="1756234" y="11909268"/>
-                </a:lnTo>
-                <a:cubicBezTo>
-                  <a:pt x="1756234" y="12031483"/>
-                  <a:pt x="1805772" y="12142127"/>
-                  <a:pt x="1885862" y="12222218"/>
-                </a:cubicBezTo>
-                <a:lnTo>
-                  <a:pt x="1902239" y="12235730"/>
-                </a:lnTo>
-                <a:lnTo>
-                  <a:pt x="750402" y="12235730"/>
-                </a:lnTo>
-                <a:cubicBezTo>
-                  <a:pt x="335966" y="12235730"/>
-                  <a:pt x="0" y="11899764"/>
-                  <a:pt x="0" y="11485328"/>
-                </a:cubicBezTo>
-                <a:lnTo>
-                  <a:pt x="0" y="2395311"/>
-                </a:lnTo>
-                <a:cubicBezTo>
-                  <a:pt x="0" y="2343507"/>
-                  <a:pt x="5250" y="2292928"/>
-                  <a:pt x="15246" y="2244079"/>
-                </a:cubicBezTo>
-                <a:lnTo>
-                  <a:pt x="51615" y="2126917"/>
-                </a:lnTo>
-                <a:lnTo>
-                  <a:pt x="27488" y="2082467"/>
-                </a:lnTo>
-                <a:cubicBezTo>
-                  <a:pt x="9789" y="2040619"/>
-                  <a:pt x="0" y="1994610"/>
-                  <a:pt x="0" y="1946315"/>
-                </a:cubicBezTo>
-                <a:lnTo>
-                  <a:pt x="0" y="1360433"/>
-                </a:lnTo>
-                <a:cubicBezTo>
-                  <a:pt x="0" y="1167253"/>
-                  <a:pt x="156603" y="1010650"/>
-                  <a:pt x="349783" y="1010650"/>
-                </a:cubicBezTo>
-                <a:lnTo>
-                  <a:pt x="349784" y="1010650"/>
-                </a:lnTo>
-                <a:lnTo>
-                  <a:pt x="6993649" y="1010650"/>
-                </a:lnTo>
-                <a:lnTo>
-                  <a:pt x="6993649" y="439963"/>
-                </a:lnTo>
-                <a:cubicBezTo>
-                  <a:pt x="6993649" y="196978"/>
-                  <a:pt x="7190628" y="0"/>
-                  <a:pt x="7433614" y="0"/>
-                </a:cubicBezTo>
-                <a:close/>
-              </a:path>
-            </a:pathLst>
-          </a:custGeom>
-          <a:gradFill flip="none" rotWithShape="1">
-            <a:gsLst>
-              <a:gs pos="0">
-                <a:schemeClr val="accent1">
-                  <a:lumMod val="67000"/>
-                </a:schemeClr>
-              </a:gs>
-              <a:gs pos="48000">
-                <a:schemeClr val="accent1">
-                  <a:lumMod val="97000"/>
-                  <a:lumOff val="3000"/>
-                </a:schemeClr>
-              </a:gs>
-              <a:gs pos="100000">
-                <a:schemeClr val="accent1">
-                  <a:lumMod val="60000"/>
-                  <a:lumOff val="40000"/>
-                </a:schemeClr>
-              </a:gs>
-            </a:gsLst>
-            <a:lin ang="16200000" scaled="1"/>
-            <a:tileRect/>
-          </a:gradFill>
-          <a:ln>
-            <a:noFill/>
-          </a:ln>
-        </p:spPr>
-        <p:style>
-          <a:lnRef idx="0">
-            <a:scrgbClr r="0" g="0" b="0"/>
-          </a:lnRef>
-          <a:fillRef idx="0">
-            <a:scrgbClr r="0" g="0" b="0"/>
-          </a:fillRef>
-          <a:effectRef idx="0">
-            <a:scrgbClr r="0" g="0" b="0"/>
-          </a:effectRef>
-          <a:fontRef idx="minor">
-            <a:schemeClr val="lt1"/>
-          </a:fontRef>
-        </p:style>
-        <p:txBody>
-          <a:bodyPr wrap="square" rtlCol="0" anchor="ctr">
-            <a:noAutofit/>
-          </a:bodyPr>
-          <a:lstStyle/>
-          <a:p>
-            <a:pPr algn="ctr"/>
-            <a:endParaRPr lang="pt-BR" dirty="0"/>
-          </a:p>
-        </p:txBody>
-      </p:sp>
+        </p:grpSpPr>
+        <p:sp>
+          <p:nvSpPr>
+            <p:cNvPr id="4" name="Retângulo 12">
+              <a:extLst>
+                <a:ext uri="{FF2B5EF4-FFF2-40B4-BE49-F238E27FC236}">
+                  <a16:creationId xmlns:a16="http://schemas.microsoft.com/office/drawing/2014/main" id="{B6187A41-7805-115C-C493-F89C987CCD24}"/>
+                </a:ext>
+              </a:extLst>
+            </p:cNvPr>
+            <p:cNvSpPr/>
+            <p:nvPr/>
+          </p:nvSpPr>
+          <p:spPr>
+            <a:xfrm>
+              <a:off x="6099145" y="1033463"/>
+              <a:ext cx="233395" cy="126999"/>
+            </a:xfrm>
+            <a:custGeom>
+              <a:avLst/>
+              <a:gdLst>
+                <a:gd name="csX0" fmla="*/ 0 w 233395"/>
+                <a:gd name="csY0" fmla="*/ 0 h 126999"/>
+                <a:gd name="csX1" fmla="*/ 233395 w 233395"/>
+                <a:gd name="csY1" fmla="*/ 0 h 126999"/>
+                <a:gd name="csX2" fmla="*/ 104808 w 233395"/>
+                <a:gd name="csY2" fmla="*/ 69849 h 126999"/>
+                <a:gd name="csX3" fmla="*/ 0 w 233395"/>
+                <a:gd name="csY3" fmla="*/ 126999 h 126999"/>
+                <a:gd name="csX4" fmla="*/ 0 w 233395"/>
+                <a:gd name="csY4" fmla="*/ 0 h 126999"/>
+              </a:gdLst>
+              <a:ahLst/>
+              <a:cxnLst>
+                <a:cxn ang="0">
+                  <a:pos x="csX0" y="csY0"/>
+                </a:cxn>
+                <a:cxn ang="0">
+                  <a:pos x="csX1" y="csY1"/>
+                </a:cxn>
+                <a:cxn ang="0">
+                  <a:pos x="csX2" y="csY2"/>
+                </a:cxn>
+                <a:cxn ang="0">
+                  <a:pos x="csX3" y="csY3"/>
+                </a:cxn>
+                <a:cxn ang="0">
+                  <a:pos x="csX4" y="csY4"/>
+                </a:cxn>
+              </a:cxnLst>
+              <a:rect l="l" t="t" r="r" b="b"/>
+              <a:pathLst>
+                <a:path w="233395" h="126999">
+                  <a:moveTo>
+                    <a:pt x="0" y="0"/>
+                  </a:moveTo>
+                  <a:lnTo>
+                    <a:pt x="233395" y="0"/>
+                  </a:lnTo>
+                  <a:lnTo>
+                    <a:pt x="104808" y="69849"/>
+                  </a:lnTo>
+                  <a:lnTo>
+                    <a:pt x="0" y="126999"/>
+                  </a:lnTo>
+                  <a:lnTo>
+                    <a:pt x="0" y="0"/>
+                  </a:lnTo>
+                  <a:close/>
+                </a:path>
+              </a:pathLst>
+            </a:custGeom>
+            <a:solidFill>
+              <a:schemeClr val="accent4">
+                <a:lumMod val="75000"/>
+              </a:schemeClr>
+            </a:solidFill>
+            <a:ln>
+              <a:noFill/>
+            </a:ln>
+          </p:spPr>
+          <p:style>
+            <a:lnRef idx="2">
+              <a:schemeClr val="accent1">
+                <a:shade val="15000"/>
+              </a:schemeClr>
+            </a:lnRef>
+            <a:fillRef idx="1">
+              <a:schemeClr val="accent1"/>
+            </a:fillRef>
+            <a:effectRef idx="0">
+              <a:schemeClr val="accent1"/>
+            </a:effectRef>
+            <a:fontRef idx="minor">
+              <a:schemeClr val="lt1"/>
+            </a:fontRef>
+          </p:style>
+          <p:txBody>
+            <a:bodyPr rtlCol="0" anchor="ctr"/>
+            <a:lstStyle/>
+            <a:p>
+              <a:pPr algn="ctr"/>
+              <a:endParaRPr lang="pt-BR" dirty="0"/>
+            </a:p>
+          </p:txBody>
+        </p:sp>
+        <p:sp>
+          <p:nvSpPr>
+            <p:cNvPr id="5" name="Retângulo 4">
+              <a:extLst>
+                <a:ext uri="{FF2B5EF4-FFF2-40B4-BE49-F238E27FC236}">
+                  <a16:creationId xmlns:a16="http://schemas.microsoft.com/office/drawing/2014/main" id="{84B3FBD7-A63C-8CE1-00B2-87D1B57D512F}"/>
+                </a:ext>
+              </a:extLst>
+            </p:cNvPr>
+            <p:cNvSpPr/>
+            <p:nvPr/>
+          </p:nvSpPr>
+          <p:spPr>
+            <a:xfrm>
+              <a:off x="6092793" y="5293"/>
+              <a:ext cx="12011057" cy="1048378"/>
+            </a:xfrm>
+            <a:prstGeom prst="rect">
+              <a:avLst/>
+            </a:prstGeom>
+            <a:solidFill>
+              <a:schemeClr val="accent1">
+                <a:lumMod val="60000"/>
+                <a:lumOff val="40000"/>
+              </a:schemeClr>
+            </a:solidFill>
+            <a:ln>
+              <a:noFill/>
+            </a:ln>
+          </p:spPr>
+          <p:style>
+            <a:lnRef idx="2">
+              <a:schemeClr val="accent1">
+                <a:shade val="15000"/>
+              </a:schemeClr>
+            </a:lnRef>
+            <a:fillRef idx="1">
+              <a:schemeClr val="accent1"/>
+            </a:fillRef>
+            <a:effectRef idx="0">
+              <a:schemeClr val="accent1"/>
+            </a:effectRef>
+            <a:fontRef idx="minor">
+              <a:schemeClr val="lt1"/>
+            </a:fontRef>
+          </p:style>
+          <p:txBody>
+            <a:bodyPr rtlCol="0" anchor="ctr"/>
+            <a:lstStyle/>
+            <a:p>
+              <a:pPr algn="ctr"/>
+              <a:endParaRPr lang="pt-BR"/>
+            </a:p>
+          </p:txBody>
+        </p:sp>
+        <p:sp>
+          <p:nvSpPr>
+            <p:cNvPr id="6" name="Retângulo 5">
+              <a:extLst>
+                <a:ext uri="{FF2B5EF4-FFF2-40B4-BE49-F238E27FC236}">
+                  <a16:creationId xmlns:a16="http://schemas.microsoft.com/office/drawing/2014/main" id="{DA14B2C4-93D2-E1B0-F10E-814F88B419F3}"/>
+                </a:ext>
+              </a:extLst>
+            </p:cNvPr>
+            <p:cNvSpPr/>
+            <p:nvPr/>
+          </p:nvSpPr>
+          <p:spPr>
+            <a:xfrm>
+              <a:off x="0" y="5293"/>
+              <a:ext cx="7414358" cy="1188508"/>
+            </a:xfrm>
+            <a:custGeom>
+              <a:avLst/>
+              <a:gdLst>
+                <a:gd name="csX0" fmla="*/ 0 w 6202680"/>
+                <a:gd name="csY0" fmla="*/ 0 h 1075896"/>
+                <a:gd name="csX1" fmla="*/ 6202680 w 6202680"/>
+                <a:gd name="csY1" fmla="*/ 0 h 1075896"/>
+                <a:gd name="csX2" fmla="*/ 5105400 w 6202680"/>
+                <a:gd name="csY2" fmla="*/ 1045416 h 1075896"/>
+                <a:gd name="csX3" fmla="*/ 0 w 6202680"/>
+                <a:gd name="csY3" fmla="*/ 1075896 h 1075896"/>
+                <a:gd name="csX4" fmla="*/ 0 w 6202680"/>
+                <a:gd name="csY4" fmla="*/ 0 h 1075896"/>
+              </a:gdLst>
+              <a:ahLst/>
+              <a:cxnLst>
+                <a:cxn ang="0">
+                  <a:pos x="csX0" y="csY0"/>
+                </a:cxn>
+                <a:cxn ang="0">
+                  <a:pos x="csX1" y="csY1"/>
+                </a:cxn>
+                <a:cxn ang="0">
+                  <a:pos x="csX2" y="csY2"/>
+                </a:cxn>
+                <a:cxn ang="0">
+                  <a:pos x="csX3" y="csY3"/>
+                </a:cxn>
+                <a:cxn ang="0">
+                  <a:pos x="csX4" y="csY4"/>
+                </a:cxn>
+              </a:cxnLst>
+              <a:rect l="l" t="t" r="r" b="b"/>
+              <a:pathLst>
+                <a:path w="6202680" h="1075896">
+                  <a:moveTo>
+                    <a:pt x="0" y="0"/>
+                  </a:moveTo>
+                  <a:lnTo>
+                    <a:pt x="6202680" y="0"/>
+                  </a:lnTo>
+                  <a:cubicBezTo>
+                    <a:pt x="5836920" y="348472"/>
+                    <a:pt x="5156200" y="102584"/>
+                    <a:pt x="5105400" y="1045416"/>
+                  </a:cubicBezTo>
+                  <a:lnTo>
+                    <a:pt x="0" y="1075896"/>
+                  </a:lnTo>
+                  <a:lnTo>
+                    <a:pt x="0" y="0"/>
+                  </a:lnTo>
+                  <a:close/>
+                </a:path>
+              </a:pathLst>
+            </a:custGeom>
+            <a:solidFill>
+              <a:schemeClr val="accent1">
+                <a:lumMod val="75000"/>
+              </a:schemeClr>
+            </a:solidFill>
+            <a:ln>
+              <a:noFill/>
+            </a:ln>
+          </p:spPr>
+          <p:style>
+            <a:lnRef idx="2">
+              <a:schemeClr val="accent1">
+                <a:shade val="15000"/>
+              </a:schemeClr>
+            </a:lnRef>
+            <a:fillRef idx="1">
+              <a:schemeClr val="accent1"/>
+            </a:fillRef>
+            <a:effectRef idx="0">
+              <a:schemeClr val="accent1"/>
+            </a:effectRef>
+            <a:fontRef idx="minor">
+              <a:schemeClr val="lt1"/>
+            </a:fontRef>
+          </p:style>
+          <p:txBody>
+            <a:bodyPr rtlCol="0" anchor="ctr"/>
+            <a:lstStyle/>
+            <a:p>
+              <a:pPr algn="ctr"/>
+              <a:endParaRPr lang="pt-BR"/>
+            </a:p>
+          </p:txBody>
+        </p:sp>
+      </p:grpSp>
       <p:sp>
         <p:nvSpPr>
           <p:cNvPr id="31" name="Retângulo 30">
@@ -6467,7 +6468,7 @@
         </p:nvSpPr>
         <p:spPr>
           <a:xfrm>
-            <a:off x="95250" y="95250"/>
+            <a:off x="236140" y="144761"/>
             <a:ext cx="4572000" cy="769441"/>
           </a:xfrm>
           <a:prstGeom prst="rect">
@@ -6533,8 +6534,8 @@
         </p:nvSpPr>
         <p:spPr>
           <a:xfrm>
-            <a:off x="373299" y="5854138"/>
-            <a:ext cx="3284299" cy="4237929"/>
+            <a:off x="236140" y="5854138"/>
+            <a:ext cx="2415619" cy="4237929"/>
           </a:xfrm>
           <a:prstGeom prst="roundRect">
             <a:avLst>
@@ -6542,18 +6543,15 @@
             </a:avLst>
           </a:prstGeom>
           <a:solidFill>
-            <a:schemeClr val="tx2">
-              <a:lumMod val="10000"/>
-              <a:lumOff val="90000"/>
-            </a:schemeClr>
+            <a:schemeClr val="bg1"/>
           </a:solidFill>
           <a:ln>
             <a:noFill/>
           </a:ln>
           <a:effectLst>
-            <a:outerShdw blurRad="63500" sx="102000" sy="102000" algn="ctr" rotWithShape="0">
+            <a:outerShdw blurRad="63500" dist="88900" dir="2820000" algn="ctr" rotWithShape="0">
               <a:prstClr val="black">
-                <a:alpha val="18000"/>
+                <a:alpha val="20000"/>
               </a:prstClr>
             </a:outerShdw>
           </a:effectLst>
@@ -6597,8 +6595,8 @@
         </p:nvSpPr>
         <p:spPr>
           <a:xfrm>
-            <a:off x="373300" y="1328681"/>
-            <a:ext cx="3284299" cy="4237929"/>
+            <a:off x="236141" y="1328681"/>
+            <a:ext cx="2415619" cy="4237929"/>
           </a:xfrm>
           <a:prstGeom prst="roundRect">
             <a:avLst>
@@ -6606,18 +6604,15 @@
             </a:avLst>
           </a:prstGeom>
           <a:solidFill>
-            <a:schemeClr val="tx2">
-              <a:lumMod val="10000"/>
-              <a:lumOff val="90000"/>
-            </a:schemeClr>
+            <a:schemeClr val="bg1"/>
           </a:solidFill>
           <a:ln>
             <a:noFill/>
           </a:ln>
           <a:effectLst>
-            <a:outerShdw blurRad="63500" sx="102000" sy="102000" algn="ctr" rotWithShape="0">
+            <a:outerShdw blurRad="63500" dist="88900" dir="2820000" algn="ctr" rotWithShape="0">
               <a:prstClr val="black">
-                <a:alpha val="18000"/>
+                <a:alpha val="20000"/>
               </a:prstClr>
             </a:outerShdw>
           </a:effectLst>
@@ -6661,8 +6656,8 @@
         </p:nvSpPr>
         <p:spPr>
           <a:xfrm>
-            <a:off x="4062829" y="6833937"/>
-            <a:ext cx="7260491" cy="3258129"/>
+            <a:off x="2923843" y="1328681"/>
+            <a:ext cx="7119318" cy="2731146"/>
           </a:xfrm>
           <a:prstGeom prst="roundRect">
             <a:avLst>
@@ -6676,9 +6671,9 @@
             <a:noFill/>
           </a:ln>
           <a:effectLst>
-            <a:outerShdw blurRad="63500" sx="102000" sy="102000" algn="ctr" rotWithShape="0">
+            <a:outerShdw blurRad="63500" dist="88900" dir="2820000" algn="ctr" rotWithShape="0">
               <a:prstClr val="black">
-                <a:alpha val="18000"/>
+                <a:alpha val="20000"/>
               </a:prstClr>
             </a:outerShdw>
           </a:effectLst>
@@ -6708,12 +6703,496 @@
           </a:p>
         </p:txBody>
       </p:sp>
-      <p:sp>
-        <p:nvSpPr>
-          <p:cNvPr id="30" name="Forma Livre: Forma 29">
+      <p:grpSp>
+        <p:nvGrpSpPr>
+          <p:cNvPr id="9" name="Agrupar 8">
             <a:extLst>
               <a:ext uri="{FF2B5EF4-FFF2-40B4-BE49-F238E27FC236}">
-                <a16:creationId xmlns:a16="http://schemas.microsoft.com/office/drawing/2014/main" id="{B4AC7AB5-5321-BEB2-D87F-3C0E9E03E29F}"/>
+                <a16:creationId xmlns:a16="http://schemas.microsoft.com/office/drawing/2014/main" id="{9428117B-4492-40D4-C30D-8C84D07AB24A}"/>
+              </a:ext>
+            </a:extLst>
+          </p:cNvPr>
+          <p:cNvGrpSpPr/>
+          <p:nvPr/>
+        </p:nvGrpSpPr>
+        <p:grpSpPr>
+          <a:xfrm>
+            <a:off x="10315244" y="5857180"/>
+            <a:ext cx="7415307" cy="4234886"/>
+            <a:chOff x="10315244" y="5857180"/>
+            <a:chExt cx="7415307" cy="4234886"/>
+          </a:xfrm>
+        </p:grpSpPr>
+        <p:sp>
+          <p:nvSpPr>
+            <p:cNvPr id="30" name="Forma Livre: Forma 29">
+              <a:extLst>
+                <a:ext uri="{FF2B5EF4-FFF2-40B4-BE49-F238E27FC236}">
+                  <a16:creationId xmlns:a16="http://schemas.microsoft.com/office/drawing/2014/main" id="{B4AC7AB5-5321-BEB2-D87F-3C0E9E03E29F}"/>
+                </a:ext>
+              </a:extLst>
+            </p:cNvPr>
+            <p:cNvSpPr/>
+            <p:nvPr/>
+          </p:nvSpPr>
+          <p:spPr>
+            <a:xfrm>
+              <a:off x="10453036" y="5857180"/>
+              <a:ext cx="2960105" cy="1257115"/>
+            </a:xfrm>
+            <a:custGeom>
+              <a:avLst/>
+              <a:gdLst>
+                <a:gd name="csX0" fmla="*/ 133353 w 2360908"/>
+                <a:gd name="csY0" fmla="*/ 0 h 1095484"/>
+                <a:gd name="csX1" fmla="*/ 2227555 w 2360908"/>
+                <a:gd name="csY1" fmla="*/ 0 h 1095484"/>
+                <a:gd name="csX2" fmla="*/ 2360908 w 2360908"/>
+                <a:gd name="csY2" fmla="*/ 133353 h 1095484"/>
+                <a:gd name="csX3" fmla="*/ 2360908 w 2360908"/>
+                <a:gd name="csY3" fmla="*/ 962131 h 1095484"/>
+                <a:gd name="csX4" fmla="*/ 2227555 w 2360908"/>
+                <a:gd name="csY4" fmla="*/ 1095484 h 1095484"/>
+                <a:gd name="csX5" fmla="*/ 133353 w 2360908"/>
+                <a:gd name="csY5" fmla="*/ 1095484 h 1095484"/>
+                <a:gd name="csX6" fmla="*/ 0 w 2360908"/>
+                <a:gd name="csY6" fmla="*/ 962131 h 1095484"/>
+                <a:gd name="csX7" fmla="*/ 0 w 2360908"/>
+                <a:gd name="csY7" fmla="*/ 133353 h 1095484"/>
+                <a:gd name="csX8" fmla="*/ 133353 w 2360908"/>
+                <a:gd name="csY8" fmla="*/ 0 h 1095484"/>
+              </a:gdLst>
+              <a:ahLst/>
+              <a:cxnLst>
+                <a:cxn ang="0">
+                  <a:pos x="csX0" y="csY0"/>
+                </a:cxn>
+                <a:cxn ang="0">
+                  <a:pos x="csX1" y="csY1"/>
+                </a:cxn>
+                <a:cxn ang="0">
+                  <a:pos x="csX2" y="csY2"/>
+                </a:cxn>
+                <a:cxn ang="0">
+                  <a:pos x="csX3" y="csY3"/>
+                </a:cxn>
+                <a:cxn ang="0">
+                  <a:pos x="csX4" y="csY4"/>
+                </a:cxn>
+                <a:cxn ang="0">
+                  <a:pos x="csX5" y="csY5"/>
+                </a:cxn>
+                <a:cxn ang="0">
+                  <a:pos x="csX6" y="csY6"/>
+                </a:cxn>
+                <a:cxn ang="0">
+                  <a:pos x="csX7" y="csY7"/>
+                </a:cxn>
+                <a:cxn ang="0">
+                  <a:pos x="csX8" y="csY8"/>
+                </a:cxn>
+              </a:cxnLst>
+              <a:rect l="l" t="t" r="r" b="b"/>
+              <a:pathLst>
+                <a:path w="2360908" h="1095484">
+                  <a:moveTo>
+                    <a:pt x="133353" y="0"/>
+                  </a:moveTo>
+                  <a:lnTo>
+                    <a:pt x="2227555" y="0"/>
+                  </a:lnTo>
+                  <a:cubicBezTo>
+                    <a:pt x="2301204" y="0"/>
+                    <a:pt x="2360908" y="59704"/>
+                    <a:pt x="2360908" y="133353"/>
+                  </a:cubicBezTo>
+                  <a:lnTo>
+                    <a:pt x="2360908" y="962131"/>
+                  </a:lnTo>
+                  <a:cubicBezTo>
+                    <a:pt x="2360908" y="1035780"/>
+                    <a:pt x="2301204" y="1095484"/>
+                    <a:pt x="2227555" y="1095484"/>
+                  </a:cubicBezTo>
+                  <a:lnTo>
+                    <a:pt x="133353" y="1095484"/>
+                  </a:lnTo>
+                  <a:cubicBezTo>
+                    <a:pt x="59704" y="1095484"/>
+                    <a:pt x="0" y="1035780"/>
+                    <a:pt x="0" y="962131"/>
+                  </a:cubicBezTo>
+                  <a:lnTo>
+                    <a:pt x="0" y="133353"/>
+                  </a:lnTo>
+                  <a:cubicBezTo>
+                    <a:pt x="0" y="59704"/>
+                    <a:pt x="59704" y="0"/>
+                    <a:pt x="133353" y="0"/>
+                  </a:cubicBezTo>
+                  <a:close/>
+                </a:path>
+              </a:pathLst>
+            </a:custGeom>
+            <a:gradFill>
+              <a:gsLst>
+                <a:gs pos="0">
+                  <a:schemeClr val="accent1">
+                    <a:satMod val="103000"/>
+                    <a:lumMod val="102000"/>
+                    <a:tint val="94000"/>
+                  </a:schemeClr>
+                </a:gs>
+                <a:gs pos="100000">
+                  <a:schemeClr val="accent1">
+                    <a:lumMod val="99000"/>
+                    <a:satMod val="120000"/>
+                    <a:shade val="78000"/>
+                  </a:schemeClr>
+                </a:gs>
+              </a:gsLst>
+            </a:gradFill>
+            <a:ln>
+              <a:noFill/>
+            </a:ln>
+            <a:effectLst>
+              <a:outerShdw blurRad="63500" sx="102000" sy="102000" algn="ctr" rotWithShape="0">
+                <a:prstClr val="black">
+                  <a:alpha val="40000"/>
+                </a:prstClr>
+              </a:outerShdw>
+            </a:effectLst>
+          </p:spPr>
+          <p:style>
+            <a:lnRef idx="0">
+              <a:schemeClr val="accent1"/>
+            </a:lnRef>
+            <a:fillRef idx="3">
+              <a:schemeClr val="accent1"/>
+            </a:fillRef>
+            <a:effectRef idx="3">
+              <a:schemeClr val="accent1"/>
+            </a:effectRef>
+            <a:fontRef idx="minor">
+              <a:schemeClr val="lt1"/>
+            </a:fontRef>
+          </p:style>
+          <p:txBody>
+            <a:bodyPr wrap="square" rtlCol="0" anchor="ctr">
+              <a:noAutofit/>
+            </a:bodyPr>
+            <a:lstStyle/>
+            <a:p>
+              <a:pPr algn="ctr"/>
+              <a:endParaRPr lang="pt-BR"/>
+            </a:p>
+          </p:txBody>
+        </p:sp>
+        <p:sp>
+          <p:nvSpPr>
+            <p:cNvPr id="37" name="Retângulo: Cantos Arredondados 36">
+              <a:extLst>
+                <a:ext uri="{FF2B5EF4-FFF2-40B4-BE49-F238E27FC236}">
+                  <a16:creationId xmlns:a16="http://schemas.microsoft.com/office/drawing/2014/main" id="{37A0E2AC-E042-D774-C28B-2467AD578F04}"/>
+                </a:ext>
+              </a:extLst>
+            </p:cNvPr>
+            <p:cNvSpPr/>
+            <p:nvPr/>
+          </p:nvSpPr>
+          <p:spPr>
+            <a:xfrm>
+              <a:off x="10315244" y="6672066"/>
+              <a:ext cx="7415307" cy="3420000"/>
+            </a:xfrm>
+            <a:prstGeom prst="roundRect">
+              <a:avLst>
+                <a:gd name="adj" fmla="val 3237"/>
+              </a:avLst>
+            </a:prstGeom>
+            <a:solidFill>
+              <a:schemeClr val="bg1"/>
+            </a:solidFill>
+            <a:ln>
+              <a:noFill/>
+            </a:ln>
+            <a:effectLst>
+              <a:outerShdw blurRad="63500" dist="88900" dir="2820000" algn="ctr" rotWithShape="0">
+                <a:prstClr val="black">
+                  <a:alpha val="20000"/>
+                </a:prstClr>
+              </a:outerShdw>
+            </a:effectLst>
+          </p:spPr>
+          <p:style>
+            <a:lnRef idx="2">
+              <a:schemeClr val="accent1">
+                <a:shade val="15000"/>
+              </a:schemeClr>
+            </a:lnRef>
+            <a:fillRef idx="1">
+              <a:schemeClr val="accent1"/>
+            </a:fillRef>
+            <a:effectRef idx="0">
+              <a:schemeClr val="accent1"/>
+            </a:effectRef>
+            <a:fontRef idx="minor">
+              <a:schemeClr val="lt1"/>
+            </a:fontRef>
+          </p:style>
+          <p:txBody>
+            <a:bodyPr rtlCol="0" anchor="ctr"/>
+            <a:lstStyle/>
+            <a:p>
+              <a:pPr algn="ctr"/>
+              <a:endParaRPr lang="pt-BR"/>
+            </a:p>
+          </p:txBody>
+        </p:sp>
+      </p:grpSp>
+      <p:grpSp>
+        <p:nvGrpSpPr>
+          <p:cNvPr id="8" name="Agrupar 7">
+            <a:extLst>
+              <a:ext uri="{FF2B5EF4-FFF2-40B4-BE49-F238E27FC236}">
+                <a16:creationId xmlns:a16="http://schemas.microsoft.com/office/drawing/2014/main" id="{DA458E46-F5B3-C26C-6D26-241567F43B89}"/>
+              </a:ext>
+            </a:extLst>
+          </p:cNvPr>
+          <p:cNvGrpSpPr/>
+          <p:nvPr/>
+        </p:nvGrpSpPr>
+        <p:grpSpPr>
+          <a:xfrm>
+            <a:off x="10315244" y="1322508"/>
+            <a:ext cx="7415307" cy="4244102"/>
+            <a:chOff x="10315244" y="1322508"/>
+            <a:chExt cx="7415307" cy="4244102"/>
+          </a:xfrm>
+        </p:grpSpPr>
+        <p:sp>
+          <p:nvSpPr>
+            <p:cNvPr id="33" name="Forma Livre: Forma 32">
+              <a:extLst>
+                <a:ext uri="{FF2B5EF4-FFF2-40B4-BE49-F238E27FC236}">
+                  <a16:creationId xmlns:a16="http://schemas.microsoft.com/office/drawing/2014/main" id="{67479E83-D2FE-B678-EDAF-34EB3AF901EA}"/>
+                </a:ext>
+              </a:extLst>
+            </p:cNvPr>
+            <p:cNvSpPr/>
+            <p:nvPr/>
+          </p:nvSpPr>
+          <p:spPr>
+            <a:xfrm>
+              <a:off x="14615717" y="1322508"/>
+              <a:ext cx="2960105" cy="1129807"/>
+            </a:xfrm>
+            <a:custGeom>
+              <a:avLst/>
+              <a:gdLst>
+                <a:gd name="csX0" fmla="*/ 133353 w 2360908"/>
+                <a:gd name="csY0" fmla="*/ 0 h 1095484"/>
+                <a:gd name="csX1" fmla="*/ 2227555 w 2360908"/>
+                <a:gd name="csY1" fmla="*/ 0 h 1095484"/>
+                <a:gd name="csX2" fmla="*/ 2360908 w 2360908"/>
+                <a:gd name="csY2" fmla="*/ 133353 h 1095484"/>
+                <a:gd name="csX3" fmla="*/ 2360908 w 2360908"/>
+                <a:gd name="csY3" fmla="*/ 962131 h 1095484"/>
+                <a:gd name="csX4" fmla="*/ 2227555 w 2360908"/>
+                <a:gd name="csY4" fmla="*/ 1095484 h 1095484"/>
+                <a:gd name="csX5" fmla="*/ 133353 w 2360908"/>
+                <a:gd name="csY5" fmla="*/ 1095484 h 1095484"/>
+                <a:gd name="csX6" fmla="*/ 0 w 2360908"/>
+                <a:gd name="csY6" fmla="*/ 962131 h 1095484"/>
+                <a:gd name="csX7" fmla="*/ 0 w 2360908"/>
+                <a:gd name="csY7" fmla="*/ 133353 h 1095484"/>
+                <a:gd name="csX8" fmla="*/ 133353 w 2360908"/>
+                <a:gd name="csY8" fmla="*/ 0 h 1095484"/>
+              </a:gdLst>
+              <a:ahLst/>
+              <a:cxnLst>
+                <a:cxn ang="0">
+                  <a:pos x="csX0" y="csY0"/>
+                </a:cxn>
+                <a:cxn ang="0">
+                  <a:pos x="csX1" y="csY1"/>
+                </a:cxn>
+                <a:cxn ang="0">
+                  <a:pos x="csX2" y="csY2"/>
+                </a:cxn>
+                <a:cxn ang="0">
+                  <a:pos x="csX3" y="csY3"/>
+                </a:cxn>
+                <a:cxn ang="0">
+                  <a:pos x="csX4" y="csY4"/>
+                </a:cxn>
+                <a:cxn ang="0">
+                  <a:pos x="csX5" y="csY5"/>
+                </a:cxn>
+                <a:cxn ang="0">
+                  <a:pos x="csX6" y="csY6"/>
+                </a:cxn>
+                <a:cxn ang="0">
+                  <a:pos x="csX7" y="csY7"/>
+                </a:cxn>
+                <a:cxn ang="0">
+                  <a:pos x="csX8" y="csY8"/>
+                </a:cxn>
+              </a:cxnLst>
+              <a:rect l="l" t="t" r="r" b="b"/>
+              <a:pathLst>
+                <a:path w="2360908" h="1095484">
+                  <a:moveTo>
+                    <a:pt x="133353" y="0"/>
+                  </a:moveTo>
+                  <a:lnTo>
+                    <a:pt x="2227555" y="0"/>
+                  </a:lnTo>
+                  <a:cubicBezTo>
+                    <a:pt x="2301204" y="0"/>
+                    <a:pt x="2360908" y="59704"/>
+                    <a:pt x="2360908" y="133353"/>
+                  </a:cubicBezTo>
+                  <a:lnTo>
+                    <a:pt x="2360908" y="962131"/>
+                  </a:lnTo>
+                  <a:cubicBezTo>
+                    <a:pt x="2360908" y="1035780"/>
+                    <a:pt x="2301204" y="1095484"/>
+                    <a:pt x="2227555" y="1095484"/>
+                  </a:cubicBezTo>
+                  <a:lnTo>
+                    <a:pt x="133353" y="1095484"/>
+                  </a:lnTo>
+                  <a:cubicBezTo>
+                    <a:pt x="59704" y="1095484"/>
+                    <a:pt x="0" y="1035780"/>
+                    <a:pt x="0" y="962131"/>
+                  </a:cubicBezTo>
+                  <a:lnTo>
+                    <a:pt x="0" y="133353"/>
+                  </a:lnTo>
+                  <a:cubicBezTo>
+                    <a:pt x="0" y="59704"/>
+                    <a:pt x="59704" y="0"/>
+                    <a:pt x="133353" y="0"/>
+                  </a:cubicBezTo>
+                  <a:close/>
+                </a:path>
+              </a:pathLst>
+            </a:custGeom>
+            <a:gradFill>
+              <a:gsLst>
+                <a:gs pos="0">
+                  <a:srgbClr val="FFC000"/>
+                </a:gs>
+                <a:gs pos="100000">
+                  <a:srgbClr val="DFDA00"/>
+                </a:gs>
+              </a:gsLst>
+            </a:gradFill>
+            <a:ln/>
+            <a:effectLst>
+              <a:outerShdw blurRad="63500" sx="102000" sy="102000" algn="ctr" rotWithShape="0">
+                <a:prstClr val="black">
+                  <a:alpha val="40000"/>
+                </a:prstClr>
+              </a:outerShdw>
+            </a:effectLst>
+          </p:spPr>
+          <p:style>
+            <a:lnRef idx="0">
+              <a:schemeClr val="accent1"/>
+            </a:lnRef>
+            <a:fillRef idx="3">
+              <a:schemeClr val="accent1"/>
+            </a:fillRef>
+            <a:effectRef idx="3">
+              <a:schemeClr val="accent1"/>
+            </a:effectRef>
+            <a:fontRef idx="minor">
+              <a:schemeClr val="lt1"/>
+            </a:fontRef>
+          </p:style>
+          <p:txBody>
+            <a:bodyPr wrap="square" rtlCol="0" anchor="ctr">
+              <a:noAutofit/>
+            </a:bodyPr>
+            <a:lstStyle/>
+            <a:p>
+              <a:pPr algn="ctr"/>
+              <a:endParaRPr lang="pt-BR"/>
+            </a:p>
+          </p:txBody>
+        </p:sp>
+        <p:sp>
+          <p:nvSpPr>
+            <p:cNvPr id="45" name="Retângulo: Cantos Arredondados 44">
+              <a:extLst>
+                <a:ext uri="{FF2B5EF4-FFF2-40B4-BE49-F238E27FC236}">
+                  <a16:creationId xmlns:a16="http://schemas.microsoft.com/office/drawing/2014/main" id="{08C3BDF5-0B20-A341-6C94-F24F5C0349B6}"/>
+                </a:ext>
+              </a:extLst>
+            </p:cNvPr>
+            <p:cNvSpPr/>
+            <p:nvPr/>
+          </p:nvSpPr>
+          <p:spPr>
+            <a:xfrm>
+              <a:off x="10315244" y="2146610"/>
+              <a:ext cx="7415307" cy="3420000"/>
+            </a:xfrm>
+            <a:prstGeom prst="roundRect">
+              <a:avLst>
+                <a:gd name="adj" fmla="val 3237"/>
+              </a:avLst>
+            </a:prstGeom>
+            <a:solidFill>
+              <a:schemeClr val="bg1"/>
+            </a:solidFill>
+            <a:ln>
+              <a:noFill/>
+            </a:ln>
+            <a:effectLst>
+              <a:outerShdw blurRad="63500" dist="88900" dir="2820000" algn="ctr" rotWithShape="0">
+                <a:prstClr val="black">
+                  <a:alpha val="20000"/>
+                </a:prstClr>
+              </a:outerShdw>
+            </a:effectLst>
+          </p:spPr>
+          <p:style>
+            <a:lnRef idx="2">
+              <a:schemeClr val="accent1">
+                <a:shade val="15000"/>
+              </a:schemeClr>
+            </a:lnRef>
+            <a:fillRef idx="1">
+              <a:schemeClr val="accent1"/>
+            </a:fillRef>
+            <a:effectRef idx="0">
+              <a:schemeClr val="accent1"/>
+            </a:effectRef>
+            <a:fontRef idx="minor">
+              <a:schemeClr val="lt1"/>
+            </a:fontRef>
+          </p:style>
+          <p:txBody>
+            <a:bodyPr rtlCol="0" anchor="ctr"/>
+            <a:lstStyle/>
+            <a:p>
+              <a:pPr algn="ctr"/>
+              <a:endParaRPr lang="pt-BR"/>
+            </a:p>
+          </p:txBody>
+        </p:sp>
+      </p:grpSp>
+      <p:sp>
+        <p:nvSpPr>
+          <p:cNvPr id="7" name="Retângulo: Cantos Arredondados 6">
+            <a:extLst>
+              <a:ext uri="{FF2B5EF4-FFF2-40B4-BE49-F238E27FC236}">
+                <a16:creationId xmlns:a16="http://schemas.microsoft.com/office/drawing/2014/main" id="{937D19D9-72D9-B196-A44B-5BE5F2A54D4C}"/>
               </a:ext>
             </a:extLst>
           </p:cNvPr>
@@ -6722,328 +7201,8 @@
         </p:nvSpPr>
         <p:spPr>
           <a:xfrm>
-            <a:off x="14598316" y="5225580"/>
-            <a:ext cx="2960105" cy="1257115"/>
-          </a:xfrm>
-          <a:custGeom>
-            <a:avLst/>
-            <a:gdLst>
-              <a:gd name="csX0" fmla="*/ 133353 w 2360908"/>
-              <a:gd name="csY0" fmla="*/ 0 h 1095484"/>
-              <a:gd name="csX1" fmla="*/ 2227555 w 2360908"/>
-              <a:gd name="csY1" fmla="*/ 0 h 1095484"/>
-              <a:gd name="csX2" fmla="*/ 2360908 w 2360908"/>
-              <a:gd name="csY2" fmla="*/ 133353 h 1095484"/>
-              <a:gd name="csX3" fmla="*/ 2360908 w 2360908"/>
-              <a:gd name="csY3" fmla="*/ 962131 h 1095484"/>
-              <a:gd name="csX4" fmla="*/ 2227555 w 2360908"/>
-              <a:gd name="csY4" fmla="*/ 1095484 h 1095484"/>
-              <a:gd name="csX5" fmla="*/ 133353 w 2360908"/>
-              <a:gd name="csY5" fmla="*/ 1095484 h 1095484"/>
-              <a:gd name="csX6" fmla="*/ 0 w 2360908"/>
-              <a:gd name="csY6" fmla="*/ 962131 h 1095484"/>
-              <a:gd name="csX7" fmla="*/ 0 w 2360908"/>
-              <a:gd name="csY7" fmla="*/ 133353 h 1095484"/>
-              <a:gd name="csX8" fmla="*/ 133353 w 2360908"/>
-              <a:gd name="csY8" fmla="*/ 0 h 1095484"/>
-            </a:gdLst>
-            <a:ahLst/>
-            <a:cxnLst>
-              <a:cxn ang="0">
-                <a:pos x="csX0" y="csY0"/>
-              </a:cxn>
-              <a:cxn ang="0">
-                <a:pos x="csX1" y="csY1"/>
-              </a:cxn>
-              <a:cxn ang="0">
-                <a:pos x="csX2" y="csY2"/>
-              </a:cxn>
-              <a:cxn ang="0">
-                <a:pos x="csX3" y="csY3"/>
-              </a:cxn>
-              <a:cxn ang="0">
-                <a:pos x="csX4" y="csY4"/>
-              </a:cxn>
-              <a:cxn ang="0">
-                <a:pos x="csX5" y="csY5"/>
-              </a:cxn>
-              <a:cxn ang="0">
-                <a:pos x="csX6" y="csY6"/>
-              </a:cxn>
-              <a:cxn ang="0">
-                <a:pos x="csX7" y="csY7"/>
-              </a:cxn>
-              <a:cxn ang="0">
-                <a:pos x="csX8" y="csY8"/>
-              </a:cxn>
-            </a:cxnLst>
-            <a:rect l="l" t="t" r="r" b="b"/>
-            <a:pathLst>
-              <a:path w="2360908" h="1095484">
-                <a:moveTo>
-                  <a:pt x="133353" y="0"/>
-                </a:moveTo>
-                <a:lnTo>
-                  <a:pt x="2227555" y="0"/>
-                </a:lnTo>
-                <a:cubicBezTo>
-                  <a:pt x="2301204" y="0"/>
-                  <a:pt x="2360908" y="59704"/>
-                  <a:pt x="2360908" y="133353"/>
-                </a:cubicBezTo>
-                <a:lnTo>
-                  <a:pt x="2360908" y="962131"/>
-                </a:lnTo>
-                <a:cubicBezTo>
-                  <a:pt x="2360908" y="1035780"/>
-                  <a:pt x="2301204" y="1095484"/>
-                  <a:pt x="2227555" y="1095484"/>
-                </a:cubicBezTo>
-                <a:lnTo>
-                  <a:pt x="133353" y="1095484"/>
-                </a:lnTo>
-                <a:cubicBezTo>
-                  <a:pt x="59704" y="1095484"/>
-                  <a:pt x="0" y="1035780"/>
-                  <a:pt x="0" y="962131"/>
-                </a:cubicBezTo>
-                <a:lnTo>
-                  <a:pt x="0" y="133353"/>
-                </a:lnTo>
-                <a:cubicBezTo>
-                  <a:pt x="0" y="59704"/>
-                  <a:pt x="59704" y="0"/>
-                  <a:pt x="133353" y="0"/>
-                </a:cubicBezTo>
-                <a:close/>
-              </a:path>
-            </a:pathLst>
-          </a:custGeom>
-          <a:gradFill>
-            <a:gsLst>
-              <a:gs pos="0">
-                <a:schemeClr val="accent1">
-                  <a:satMod val="103000"/>
-                  <a:lumMod val="102000"/>
-                  <a:tint val="94000"/>
-                </a:schemeClr>
-              </a:gs>
-              <a:gs pos="100000">
-                <a:schemeClr val="accent1">
-                  <a:lumMod val="99000"/>
-                  <a:satMod val="120000"/>
-                  <a:shade val="78000"/>
-                </a:schemeClr>
-              </a:gs>
-            </a:gsLst>
-          </a:gradFill>
-          <a:ln>
-            <a:noFill/>
-          </a:ln>
-          <a:effectLst>
-            <a:outerShdw blurRad="63500" sx="102000" sy="102000" algn="ctr" rotWithShape="0">
-              <a:prstClr val="black">
-                <a:alpha val="40000"/>
-              </a:prstClr>
-            </a:outerShdw>
-          </a:effectLst>
-        </p:spPr>
-        <p:style>
-          <a:lnRef idx="0">
-            <a:schemeClr val="accent1"/>
-          </a:lnRef>
-          <a:fillRef idx="3">
-            <a:schemeClr val="accent1"/>
-          </a:fillRef>
-          <a:effectRef idx="3">
-            <a:schemeClr val="accent1"/>
-          </a:effectRef>
-          <a:fontRef idx="minor">
-            <a:schemeClr val="lt1"/>
-          </a:fontRef>
-        </p:style>
-        <p:txBody>
-          <a:bodyPr wrap="square" rtlCol="0" anchor="ctr">
-            <a:noAutofit/>
-          </a:bodyPr>
-          <a:lstStyle/>
-          <a:p>
-            <a:pPr algn="ctr"/>
-            <a:endParaRPr lang="pt-BR"/>
-          </a:p>
-        </p:txBody>
-      </p:sp>
-      <p:sp>
-        <p:nvSpPr>
-          <p:cNvPr id="33" name="Forma Livre: Forma 32">
-            <a:extLst>
-              <a:ext uri="{FF2B5EF4-FFF2-40B4-BE49-F238E27FC236}">
-                <a16:creationId xmlns:a16="http://schemas.microsoft.com/office/drawing/2014/main" id="{67479E83-D2FE-B678-EDAF-34EB3AF901EA}"/>
-              </a:ext>
-            </a:extLst>
-          </p:cNvPr>
-          <p:cNvSpPr/>
-          <p:nvPr/>
-        </p:nvSpPr>
-        <p:spPr>
-          <a:xfrm>
-            <a:off x="14598316" y="297325"/>
-            <a:ext cx="2960105" cy="1129807"/>
-          </a:xfrm>
-          <a:custGeom>
-            <a:avLst/>
-            <a:gdLst>
-              <a:gd name="csX0" fmla="*/ 133353 w 2360908"/>
-              <a:gd name="csY0" fmla="*/ 0 h 1095484"/>
-              <a:gd name="csX1" fmla="*/ 2227555 w 2360908"/>
-              <a:gd name="csY1" fmla="*/ 0 h 1095484"/>
-              <a:gd name="csX2" fmla="*/ 2360908 w 2360908"/>
-              <a:gd name="csY2" fmla="*/ 133353 h 1095484"/>
-              <a:gd name="csX3" fmla="*/ 2360908 w 2360908"/>
-              <a:gd name="csY3" fmla="*/ 962131 h 1095484"/>
-              <a:gd name="csX4" fmla="*/ 2227555 w 2360908"/>
-              <a:gd name="csY4" fmla="*/ 1095484 h 1095484"/>
-              <a:gd name="csX5" fmla="*/ 133353 w 2360908"/>
-              <a:gd name="csY5" fmla="*/ 1095484 h 1095484"/>
-              <a:gd name="csX6" fmla="*/ 0 w 2360908"/>
-              <a:gd name="csY6" fmla="*/ 962131 h 1095484"/>
-              <a:gd name="csX7" fmla="*/ 0 w 2360908"/>
-              <a:gd name="csY7" fmla="*/ 133353 h 1095484"/>
-              <a:gd name="csX8" fmla="*/ 133353 w 2360908"/>
-              <a:gd name="csY8" fmla="*/ 0 h 1095484"/>
-            </a:gdLst>
-            <a:ahLst/>
-            <a:cxnLst>
-              <a:cxn ang="0">
-                <a:pos x="csX0" y="csY0"/>
-              </a:cxn>
-              <a:cxn ang="0">
-                <a:pos x="csX1" y="csY1"/>
-              </a:cxn>
-              <a:cxn ang="0">
-                <a:pos x="csX2" y="csY2"/>
-              </a:cxn>
-              <a:cxn ang="0">
-                <a:pos x="csX3" y="csY3"/>
-              </a:cxn>
-              <a:cxn ang="0">
-                <a:pos x="csX4" y="csY4"/>
-              </a:cxn>
-              <a:cxn ang="0">
-                <a:pos x="csX5" y="csY5"/>
-              </a:cxn>
-              <a:cxn ang="0">
-                <a:pos x="csX6" y="csY6"/>
-              </a:cxn>
-              <a:cxn ang="0">
-                <a:pos x="csX7" y="csY7"/>
-              </a:cxn>
-              <a:cxn ang="0">
-                <a:pos x="csX8" y="csY8"/>
-              </a:cxn>
-            </a:cxnLst>
-            <a:rect l="l" t="t" r="r" b="b"/>
-            <a:pathLst>
-              <a:path w="2360908" h="1095484">
-                <a:moveTo>
-                  <a:pt x="133353" y="0"/>
-                </a:moveTo>
-                <a:lnTo>
-                  <a:pt x="2227555" y="0"/>
-                </a:lnTo>
-                <a:cubicBezTo>
-                  <a:pt x="2301204" y="0"/>
-                  <a:pt x="2360908" y="59704"/>
-                  <a:pt x="2360908" y="133353"/>
-                </a:cubicBezTo>
-                <a:lnTo>
-                  <a:pt x="2360908" y="962131"/>
-                </a:lnTo>
-                <a:cubicBezTo>
-                  <a:pt x="2360908" y="1035780"/>
-                  <a:pt x="2301204" y="1095484"/>
-                  <a:pt x="2227555" y="1095484"/>
-                </a:cubicBezTo>
-                <a:lnTo>
-                  <a:pt x="133353" y="1095484"/>
-                </a:lnTo>
-                <a:cubicBezTo>
-                  <a:pt x="59704" y="1095484"/>
-                  <a:pt x="0" y="1035780"/>
-                  <a:pt x="0" y="962131"/>
-                </a:cubicBezTo>
-                <a:lnTo>
-                  <a:pt x="0" y="133353"/>
-                </a:lnTo>
-                <a:cubicBezTo>
-                  <a:pt x="0" y="59704"/>
-                  <a:pt x="59704" y="0"/>
-                  <a:pt x="133353" y="0"/>
-                </a:cubicBezTo>
-                <a:close/>
-              </a:path>
-            </a:pathLst>
-          </a:custGeom>
-          <a:gradFill>
-            <a:gsLst>
-              <a:gs pos="0">
-                <a:srgbClr val="FFC000"/>
-              </a:gs>
-              <a:gs pos="100000">
-                <a:srgbClr val="DFDA00"/>
-              </a:gs>
-            </a:gsLst>
-          </a:gradFill>
-          <a:ln/>
-          <a:effectLst>
-            <a:outerShdw blurRad="63500" sx="102000" sy="102000" algn="ctr" rotWithShape="0">
-              <a:prstClr val="black">
-                <a:alpha val="40000"/>
-              </a:prstClr>
-            </a:outerShdw>
-          </a:effectLst>
-        </p:spPr>
-        <p:style>
-          <a:lnRef idx="0">
-            <a:schemeClr val="accent1"/>
-          </a:lnRef>
-          <a:fillRef idx="3">
-            <a:schemeClr val="accent1"/>
-          </a:fillRef>
-          <a:effectRef idx="3">
-            <a:schemeClr val="accent1"/>
-          </a:effectRef>
-          <a:fontRef idx="minor">
-            <a:schemeClr val="lt1"/>
-          </a:fontRef>
-        </p:style>
-        <p:txBody>
-          <a:bodyPr wrap="square" rtlCol="0" anchor="ctr">
-            <a:noAutofit/>
-          </a:bodyPr>
-          <a:lstStyle/>
-          <a:p>
-            <a:pPr algn="ctr"/>
-            <a:endParaRPr lang="pt-BR"/>
-          </a:p>
-        </p:txBody>
-      </p:sp>
-      <p:sp>
-        <p:nvSpPr>
-          <p:cNvPr id="37" name="Retângulo: Cantos Arredondados 36">
-            <a:extLst>
-              <a:ext uri="{FF2B5EF4-FFF2-40B4-BE49-F238E27FC236}">
-                <a16:creationId xmlns:a16="http://schemas.microsoft.com/office/drawing/2014/main" id="{37A0E2AC-E042-D774-C28B-2467AD578F04}"/>
-              </a:ext>
-            </a:extLst>
-          </p:cNvPr>
-          <p:cNvSpPr/>
-          <p:nvPr/>
-        </p:nvSpPr>
-        <p:spPr>
-          <a:xfrm>
-            <a:off x="11673840" y="6304547"/>
-            <a:ext cx="6056711" cy="3787519"/>
+            <a:off x="2923843" y="4334837"/>
+            <a:ext cx="7119318" cy="5757229"/>
           </a:xfrm>
           <a:prstGeom prst="roundRect">
             <a:avLst>
@@ -7057,70 +7216,9 @@
             <a:noFill/>
           </a:ln>
           <a:effectLst>
-            <a:outerShdw blurRad="63500" sx="102000" sy="102000" algn="ctr" rotWithShape="0">
+            <a:outerShdw blurRad="63500" dist="88900" dir="2820000" algn="ctr" rotWithShape="0">
               <a:prstClr val="black">
-                <a:alpha val="18000"/>
-              </a:prstClr>
-            </a:outerShdw>
-          </a:effectLst>
-        </p:spPr>
-        <p:style>
-          <a:lnRef idx="2">
-            <a:schemeClr val="accent1">
-              <a:shade val="15000"/>
-            </a:schemeClr>
-          </a:lnRef>
-          <a:fillRef idx="1">
-            <a:schemeClr val="accent1"/>
-          </a:fillRef>
-          <a:effectRef idx="0">
-            <a:schemeClr val="accent1"/>
-          </a:effectRef>
-          <a:fontRef idx="minor">
-            <a:schemeClr val="lt1"/>
-          </a:fontRef>
-        </p:style>
-        <p:txBody>
-          <a:bodyPr rtlCol="0" anchor="ctr"/>
-          <a:lstStyle/>
-          <a:p>
-            <a:pPr algn="ctr"/>
-            <a:endParaRPr lang="pt-BR"/>
-          </a:p>
-        </p:txBody>
-      </p:sp>
-      <p:sp>
-        <p:nvSpPr>
-          <p:cNvPr id="45" name="Retângulo: Cantos Arredondados 44">
-            <a:extLst>
-              <a:ext uri="{FF2B5EF4-FFF2-40B4-BE49-F238E27FC236}">
-                <a16:creationId xmlns:a16="http://schemas.microsoft.com/office/drawing/2014/main" id="{08C3BDF5-0B20-A341-6C94-F24F5C0349B6}"/>
-              </a:ext>
-            </a:extLst>
-          </p:cNvPr>
-          <p:cNvSpPr/>
-          <p:nvPr/>
-        </p:nvSpPr>
-        <p:spPr>
-          <a:xfrm>
-            <a:off x="11673840" y="1328681"/>
-            <a:ext cx="6056711" cy="3787519"/>
-          </a:xfrm>
-          <a:prstGeom prst="roundRect">
-            <a:avLst>
-              <a:gd name="adj" fmla="val 3237"/>
-            </a:avLst>
-          </a:prstGeom>
-          <a:solidFill>
-            <a:schemeClr val="bg1"/>
-          </a:solidFill>
-          <a:ln>
-            <a:noFill/>
-          </a:ln>
-          <a:effectLst>
-            <a:outerShdw blurRad="63500" sx="102000" sy="102000" algn="ctr" rotWithShape="0">
-              <a:prstClr val="black">
-                <a:alpha val="18000"/>
+                <a:alpha val="20000"/>
               </a:prstClr>
             </a:outerShdw>
           </a:effectLst>
